--- a/course/modules/M01/L001/M01-L001-canva-deck.pptx
+++ b/course/modules/M01/L001/M01-L001-canva-deck.pptx
@@ -3419,7 +3419,7 @@
                 <a:ea typeface="Sarabun"/>
                 <a:cs typeface="Sarabun"/>
               </a:rPr>
-              <a:t>Learner</a:t>
+              <a:t>You</a:t>
             </a:r>
           </a:p>
         </p:txBody>
@@ -3663,7 +3663,7 @@
                 <a:ea typeface="Sarabun"/>
                 <a:cs typeface="Sarabun"/>
               </a:rPr>
-              <a:t>Learner (your turn — say the next line before I show it)</a:t>
+              <a:t>You</a:t>
             </a:r>
           </a:p>
         </p:txBody>
@@ -3907,7 +3907,7 @@
                 <a:ea typeface="Sarabun"/>
                 <a:cs typeface="Sarabun"/>
               </a:rPr>
-              <a:t>Learner (your turn — what do you say after receiving help?)</a:t>
+              <a:t>You</a:t>
             </a:r>
           </a:p>
         </p:txBody>

--- a/course/modules/M01/L001/M01-L001-canva-deck.pptx
+++ b/course/modules/M01/L001/M01-L001-canva-deck.pptx
@@ -3271,6 +3271,63 @@
           </a:p>
         </p:txBody>
       </p:sp>
+      <p:sp>
+        <p:nvSpPr>
+          <p:cNvPr id="7" name="__pip_placeholder__"/>
+          <p:cNvSpPr/>
+          <p:nvPr/>
+        </p:nvSpPr>
+        <p:spPr>
+          <a:xfrm>
+            <a:off x="8351215" y="0"/>
+            <a:ext cx="3840480" cy="2880360"/>
+          </a:xfrm>
+          <a:prstGeom prst="rect">
+            <a:avLst/>
+          </a:prstGeom>
+          <a:solidFill>
+            <a:srgbClr val="DBE7EC">
+              <a:alpha val="30000"/>
+            </a:srgbClr>
+          </a:solidFill>
+          <a:ln w="19050">
+            <a:solidFill>
+              <a:srgbClr val="355C7D"/>
+            </a:solidFill>
+            <a:prstDash val="sysDash"/>
+          </a:ln>
+        </p:spPr>
+        <p:style>
+          <a:lnRef idx="1">
+            <a:schemeClr val="accent1"/>
+          </a:lnRef>
+          <a:fillRef idx="3">
+            <a:schemeClr val="accent1"/>
+          </a:fillRef>
+          <a:effectRef idx="2">
+            <a:schemeClr val="accent1"/>
+          </a:effectRef>
+          <a:fontRef idx="minor">
+            <a:schemeClr val="lt1"/>
+          </a:fontRef>
+        </p:style>
+        <p:txBody>
+          <a:bodyPr rtlCol="0" anchor="ctr" wrap="none"/>
+          <a:lstStyle/>
+          <a:p>
+            <a:pPr algn="ctr"/>
+            <a:r>
+              <a:rPr sz="1800" b="1">
+                <a:solidFill>
+                  <a:srgbClr val="355C7D"/>
+                </a:solidFill>
+                <a:latin typeface="Sarabun"/>
+              </a:rPr>
+              <a:t>Nine</a:t>
+            </a:r>
+          </a:p>
+        </p:txBody>
+      </p:sp>
     </p:spTree>
   </p:cSld>
   <p:clrMapOvr>
@@ -4119,6 +4176,63 @@
           </a:p>
         </p:txBody>
       </p:sp>
+      <p:sp>
+        <p:nvSpPr>
+          <p:cNvPr id="23" name="__pip_placeholder__"/>
+          <p:cNvSpPr/>
+          <p:nvPr/>
+        </p:nvSpPr>
+        <p:spPr>
+          <a:xfrm>
+            <a:off x="8351215" y="0"/>
+            <a:ext cx="3840480" cy="2880360"/>
+          </a:xfrm>
+          <a:prstGeom prst="rect">
+            <a:avLst/>
+          </a:prstGeom>
+          <a:solidFill>
+            <a:srgbClr val="DBE7EC">
+              <a:alpha val="30000"/>
+            </a:srgbClr>
+          </a:solidFill>
+          <a:ln w="19050">
+            <a:solidFill>
+              <a:srgbClr val="355C7D"/>
+            </a:solidFill>
+            <a:prstDash val="sysDash"/>
+          </a:ln>
+        </p:spPr>
+        <p:style>
+          <a:lnRef idx="1">
+            <a:schemeClr val="accent1"/>
+          </a:lnRef>
+          <a:fillRef idx="3">
+            <a:schemeClr val="accent1"/>
+          </a:fillRef>
+          <a:effectRef idx="2">
+            <a:schemeClr val="accent1"/>
+          </a:effectRef>
+          <a:fontRef idx="minor">
+            <a:schemeClr val="lt1"/>
+          </a:fontRef>
+        </p:style>
+        <p:txBody>
+          <a:bodyPr rtlCol="0" anchor="ctr" wrap="none"/>
+          <a:lstStyle/>
+          <a:p>
+            <a:pPr algn="ctr"/>
+            <a:r>
+              <a:rPr sz="1800" b="1">
+                <a:solidFill>
+                  <a:srgbClr val="355C7D"/>
+                </a:solidFill>
+                <a:latin typeface="Sarabun"/>
+              </a:rPr>
+              <a:t>Nine</a:t>
+            </a:r>
+          </a:p>
+        </p:txBody>
+      </p:sp>
     </p:spTree>
   </p:cSld>
   <p:clrMapOvr>
@@ -4581,6 +4695,63 @@
           </a:p>
         </p:txBody>
       </p:sp>
+      <p:sp>
+        <p:nvSpPr>
+          <p:cNvPr id="9" name="__pip_placeholder__"/>
+          <p:cNvSpPr/>
+          <p:nvPr/>
+        </p:nvSpPr>
+        <p:spPr>
+          <a:xfrm>
+            <a:off x="8351215" y="0"/>
+            <a:ext cx="3840480" cy="2880360"/>
+          </a:xfrm>
+          <a:prstGeom prst="rect">
+            <a:avLst/>
+          </a:prstGeom>
+          <a:solidFill>
+            <a:srgbClr val="DBE7EC">
+              <a:alpha val="30000"/>
+            </a:srgbClr>
+          </a:solidFill>
+          <a:ln w="19050">
+            <a:solidFill>
+              <a:srgbClr val="355C7D"/>
+            </a:solidFill>
+            <a:prstDash val="sysDash"/>
+          </a:ln>
+        </p:spPr>
+        <p:style>
+          <a:lnRef idx="1">
+            <a:schemeClr val="accent1"/>
+          </a:lnRef>
+          <a:fillRef idx="3">
+            <a:schemeClr val="accent1"/>
+          </a:fillRef>
+          <a:effectRef idx="2">
+            <a:schemeClr val="accent1"/>
+          </a:effectRef>
+          <a:fontRef idx="minor">
+            <a:schemeClr val="lt1"/>
+          </a:fontRef>
+        </p:style>
+        <p:txBody>
+          <a:bodyPr rtlCol="0" anchor="ctr" wrap="none"/>
+          <a:lstStyle/>
+          <a:p>
+            <a:pPr algn="ctr"/>
+            <a:r>
+              <a:rPr sz="1800" b="1">
+                <a:solidFill>
+                  <a:srgbClr val="355C7D"/>
+                </a:solidFill>
+                <a:latin typeface="Sarabun"/>
+              </a:rPr>
+              <a:t>Nine</a:t>
+            </a:r>
+          </a:p>
+        </p:txBody>
+      </p:sp>
     </p:spTree>
   </p:cSld>
   <p:clrMapOvr>
@@ -4822,6 +4993,63 @@
           </a:p>
         </p:txBody>
       </p:sp>
+      <p:sp>
+        <p:nvSpPr>
+          <p:cNvPr id="8" name="__pip_placeholder__"/>
+          <p:cNvSpPr/>
+          <p:nvPr/>
+        </p:nvSpPr>
+        <p:spPr>
+          <a:xfrm>
+            <a:off x="8351215" y="0"/>
+            <a:ext cx="3840480" cy="2880360"/>
+          </a:xfrm>
+          <a:prstGeom prst="rect">
+            <a:avLst/>
+          </a:prstGeom>
+          <a:solidFill>
+            <a:srgbClr val="DBE7EC">
+              <a:alpha val="30000"/>
+            </a:srgbClr>
+          </a:solidFill>
+          <a:ln w="19050">
+            <a:solidFill>
+              <a:srgbClr val="355C7D"/>
+            </a:solidFill>
+            <a:prstDash val="sysDash"/>
+          </a:ln>
+        </p:spPr>
+        <p:style>
+          <a:lnRef idx="1">
+            <a:schemeClr val="accent1"/>
+          </a:lnRef>
+          <a:fillRef idx="3">
+            <a:schemeClr val="accent1"/>
+          </a:fillRef>
+          <a:effectRef idx="2">
+            <a:schemeClr val="accent1"/>
+          </a:effectRef>
+          <a:fontRef idx="minor">
+            <a:schemeClr val="lt1"/>
+          </a:fontRef>
+        </p:style>
+        <p:txBody>
+          <a:bodyPr rtlCol="0" anchor="ctr" wrap="none"/>
+          <a:lstStyle/>
+          <a:p>
+            <a:pPr algn="ctr"/>
+            <a:r>
+              <a:rPr sz="1800" b="1">
+                <a:solidFill>
+                  <a:srgbClr val="355C7D"/>
+                </a:solidFill>
+                <a:latin typeface="Sarabun"/>
+              </a:rPr>
+              <a:t>Nine</a:t>
+            </a:r>
+          </a:p>
+        </p:txBody>
+      </p:sp>
     </p:spTree>
   </p:cSld>
   <p:clrMapOvr>
@@ -5339,6 +5567,63 @@
           </a:p>
         </p:txBody>
       </p:sp>
+      <p:sp>
+        <p:nvSpPr>
+          <p:cNvPr id="9" name="__pip_placeholder__"/>
+          <p:cNvSpPr/>
+          <p:nvPr/>
+        </p:nvSpPr>
+        <p:spPr>
+          <a:xfrm>
+            <a:off x="8351215" y="0"/>
+            <a:ext cx="3840480" cy="2880360"/>
+          </a:xfrm>
+          <a:prstGeom prst="rect">
+            <a:avLst/>
+          </a:prstGeom>
+          <a:solidFill>
+            <a:srgbClr val="DBE7EC">
+              <a:alpha val="30000"/>
+            </a:srgbClr>
+          </a:solidFill>
+          <a:ln w="19050">
+            <a:solidFill>
+              <a:srgbClr val="355C7D"/>
+            </a:solidFill>
+            <a:prstDash val="sysDash"/>
+          </a:ln>
+        </p:spPr>
+        <p:style>
+          <a:lnRef idx="1">
+            <a:schemeClr val="accent1"/>
+          </a:lnRef>
+          <a:fillRef idx="3">
+            <a:schemeClr val="accent1"/>
+          </a:fillRef>
+          <a:effectRef idx="2">
+            <a:schemeClr val="accent1"/>
+          </a:effectRef>
+          <a:fontRef idx="minor">
+            <a:schemeClr val="lt1"/>
+          </a:fontRef>
+        </p:style>
+        <p:txBody>
+          <a:bodyPr rtlCol="0" anchor="ctr" wrap="none"/>
+          <a:lstStyle/>
+          <a:p>
+            <a:pPr algn="ctr"/>
+            <a:r>
+              <a:rPr sz="1800" b="1">
+                <a:solidFill>
+                  <a:srgbClr val="355C7D"/>
+                </a:solidFill>
+                <a:latin typeface="Sarabun"/>
+              </a:rPr>
+              <a:t>Nine</a:t>
+            </a:r>
+          </a:p>
+        </p:txBody>
+      </p:sp>
     </p:spTree>
   </p:cSld>
   <p:clrMapOvr>
@@ -5591,6 +5876,63 @@
           </a:p>
         </p:txBody>
       </p:sp>
+      <p:sp>
+        <p:nvSpPr>
+          <p:cNvPr id="8" name="__pip_placeholder__"/>
+          <p:cNvSpPr/>
+          <p:nvPr/>
+        </p:nvSpPr>
+        <p:spPr>
+          <a:xfrm>
+            <a:off x="8351215" y="0"/>
+            <a:ext cx="3840480" cy="2880360"/>
+          </a:xfrm>
+          <a:prstGeom prst="rect">
+            <a:avLst/>
+          </a:prstGeom>
+          <a:solidFill>
+            <a:srgbClr val="DBE7EC">
+              <a:alpha val="30000"/>
+            </a:srgbClr>
+          </a:solidFill>
+          <a:ln w="19050">
+            <a:solidFill>
+              <a:srgbClr val="355C7D"/>
+            </a:solidFill>
+            <a:prstDash val="sysDash"/>
+          </a:ln>
+        </p:spPr>
+        <p:style>
+          <a:lnRef idx="1">
+            <a:schemeClr val="accent1"/>
+          </a:lnRef>
+          <a:fillRef idx="3">
+            <a:schemeClr val="accent1"/>
+          </a:fillRef>
+          <a:effectRef idx="2">
+            <a:schemeClr val="accent1"/>
+          </a:effectRef>
+          <a:fontRef idx="minor">
+            <a:schemeClr val="lt1"/>
+          </a:fontRef>
+        </p:style>
+        <p:txBody>
+          <a:bodyPr rtlCol="0" anchor="ctr" wrap="none"/>
+          <a:lstStyle/>
+          <a:p>
+            <a:pPr algn="ctr"/>
+            <a:r>
+              <a:rPr sz="1800" b="1">
+                <a:solidFill>
+                  <a:srgbClr val="355C7D"/>
+                </a:solidFill>
+                <a:latin typeface="Sarabun"/>
+              </a:rPr>
+              <a:t>Nine</a:t>
+            </a:r>
+          </a:p>
+        </p:txBody>
+      </p:sp>
     </p:spTree>
   </p:cSld>
   <p:clrMapOvr>
@@ -5999,6 +6341,63 @@
           </a:p>
         </p:txBody>
       </p:sp>
+      <p:sp>
+        <p:nvSpPr>
+          <p:cNvPr id="12" name="__pip_placeholder__"/>
+          <p:cNvSpPr/>
+          <p:nvPr/>
+        </p:nvSpPr>
+        <p:spPr>
+          <a:xfrm>
+            <a:off x="8351215" y="0"/>
+            <a:ext cx="3840480" cy="2880360"/>
+          </a:xfrm>
+          <a:prstGeom prst="rect">
+            <a:avLst/>
+          </a:prstGeom>
+          <a:solidFill>
+            <a:srgbClr val="DBE7EC">
+              <a:alpha val="30000"/>
+            </a:srgbClr>
+          </a:solidFill>
+          <a:ln w="19050">
+            <a:solidFill>
+              <a:srgbClr val="355C7D"/>
+            </a:solidFill>
+            <a:prstDash val="sysDash"/>
+          </a:ln>
+        </p:spPr>
+        <p:style>
+          <a:lnRef idx="1">
+            <a:schemeClr val="accent1"/>
+          </a:lnRef>
+          <a:fillRef idx="3">
+            <a:schemeClr val="accent1"/>
+          </a:fillRef>
+          <a:effectRef idx="2">
+            <a:schemeClr val="accent1"/>
+          </a:effectRef>
+          <a:fontRef idx="minor">
+            <a:schemeClr val="lt1"/>
+          </a:fontRef>
+        </p:style>
+        <p:txBody>
+          <a:bodyPr rtlCol="0" anchor="ctr" wrap="none"/>
+          <a:lstStyle/>
+          <a:p>
+            <a:pPr algn="ctr"/>
+            <a:r>
+              <a:rPr sz="1800" b="1">
+                <a:solidFill>
+                  <a:srgbClr val="355C7D"/>
+                </a:solidFill>
+                <a:latin typeface="Sarabun"/>
+              </a:rPr>
+              <a:t>Nine</a:t>
+            </a:r>
+          </a:p>
+        </p:txBody>
+      </p:sp>
     </p:spTree>
   </p:cSld>
   <p:clrMapOvr>
@@ -6481,6 +6880,63 @@
           </a:p>
         </p:txBody>
       </p:sp>
+      <p:sp>
+        <p:nvSpPr>
+          <p:cNvPr id="14" name="__pip_placeholder__"/>
+          <p:cNvSpPr/>
+          <p:nvPr/>
+        </p:nvSpPr>
+        <p:spPr>
+          <a:xfrm>
+            <a:off x="8351215" y="0"/>
+            <a:ext cx="3840480" cy="2880360"/>
+          </a:xfrm>
+          <a:prstGeom prst="rect">
+            <a:avLst/>
+          </a:prstGeom>
+          <a:solidFill>
+            <a:srgbClr val="DBE7EC">
+              <a:alpha val="30000"/>
+            </a:srgbClr>
+          </a:solidFill>
+          <a:ln w="19050">
+            <a:solidFill>
+              <a:srgbClr val="355C7D"/>
+            </a:solidFill>
+            <a:prstDash val="sysDash"/>
+          </a:ln>
+        </p:spPr>
+        <p:style>
+          <a:lnRef idx="1">
+            <a:schemeClr val="accent1"/>
+          </a:lnRef>
+          <a:fillRef idx="3">
+            <a:schemeClr val="accent1"/>
+          </a:fillRef>
+          <a:effectRef idx="2">
+            <a:schemeClr val="accent1"/>
+          </a:effectRef>
+          <a:fontRef idx="minor">
+            <a:schemeClr val="lt1"/>
+          </a:fontRef>
+        </p:style>
+        <p:txBody>
+          <a:bodyPr rtlCol="0" anchor="ctr" wrap="none"/>
+          <a:lstStyle/>
+          <a:p>
+            <a:pPr algn="ctr"/>
+            <a:r>
+              <a:rPr sz="1800" b="1">
+                <a:solidFill>
+                  <a:srgbClr val="355C7D"/>
+                </a:solidFill>
+                <a:latin typeface="Sarabun"/>
+              </a:rPr>
+              <a:t>Nine</a:t>
+            </a:r>
+          </a:p>
+        </p:txBody>
+      </p:sp>
     </p:spTree>
   </p:cSld>
   <p:clrMapOvr>
@@ -7000,6 +7456,63 @@
           </a:p>
         </p:txBody>
       </p:sp>
+      <p:sp>
+        <p:nvSpPr>
+          <p:cNvPr id="15" name="__pip_placeholder__"/>
+          <p:cNvSpPr/>
+          <p:nvPr/>
+        </p:nvSpPr>
+        <p:spPr>
+          <a:xfrm>
+            <a:off x="8351215" y="0"/>
+            <a:ext cx="3840480" cy="2880360"/>
+          </a:xfrm>
+          <a:prstGeom prst="rect">
+            <a:avLst/>
+          </a:prstGeom>
+          <a:solidFill>
+            <a:srgbClr val="DBE7EC">
+              <a:alpha val="30000"/>
+            </a:srgbClr>
+          </a:solidFill>
+          <a:ln w="19050">
+            <a:solidFill>
+              <a:srgbClr val="355C7D"/>
+            </a:solidFill>
+            <a:prstDash val="sysDash"/>
+          </a:ln>
+        </p:spPr>
+        <p:style>
+          <a:lnRef idx="1">
+            <a:schemeClr val="accent1"/>
+          </a:lnRef>
+          <a:fillRef idx="3">
+            <a:schemeClr val="accent1"/>
+          </a:fillRef>
+          <a:effectRef idx="2">
+            <a:schemeClr val="accent1"/>
+          </a:effectRef>
+          <a:fontRef idx="minor">
+            <a:schemeClr val="lt1"/>
+          </a:fontRef>
+        </p:style>
+        <p:txBody>
+          <a:bodyPr rtlCol="0" anchor="ctr" wrap="none"/>
+          <a:lstStyle/>
+          <a:p>
+            <a:pPr algn="ctr"/>
+            <a:r>
+              <a:rPr sz="1800" b="1">
+                <a:solidFill>
+                  <a:srgbClr val="355C7D"/>
+                </a:solidFill>
+                <a:latin typeface="Sarabun"/>
+              </a:rPr>
+              <a:t>Nine</a:t>
+            </a:r>
+          </a:p>
+        </p:txBody>
+      </p:sp>
     </p:spTree>
   </p:cSld>
   <p:clrMapOvr>
@@ -7553,6 +8066,63 @@
           </a:p>
         </p:txBody>
       </p:sp>
+      <p:sp>
+        <p:nvSpPr>
+          <p:cNvPr id="13" name="__pip_placeholder__"/>
+          <p:cNvSpPr/>
+          <p:nvPr/>
+        </p:nvSpPr>
+        <p:spPr>
+          <a:xfrm>
+            <a:off x="8351215" y="0"/>
+            <a:ext cx="3840480" cy="2880360"/>
+          </a:xfrm>
+          <a:prstGeom prst="rect">
+            <a:avLst/>
+          </a:prstGeom>
+          <a:solidFill>
+            <a:srgbClr val="DBE7EC">
+              <a:alpha val="30000"/>
+            </a:srgbClr>
+          </a:solidFill>
+          <a:ln w="19050">
+            <a:solidFill>
+              <a:srgbClr val="355C7D"/>
+            </a:solidFill>
+            <a:prstDash val="sysDash"/>
+          </a:ln>
+        </p:spPr>
+        <p:style>
+          <a:lnRef idx="1">
+            <a:schemeClr val="accent1"/>
+          </a:lnRef>
+          <a:fillRef idx="3">
+            <a:schemeClr val="accent1"/>
+          </a:fillRef>
+          <a:effectRef idx="2">
+            <a:schemeClr val="accent1"/>
+          </a:effectRef>
+          <a:fontRef idx="minor">
+            <a:schemeClr val="lt1"/>
+          </a:fontRef>
+        </p:style>
+        <p:txBody>
+          <a:bodyPr rtlCol="0" anchor="ctr" wrap="none"/>
+          <a:lstStyle/>
+          <a:p>
+            <a:pPr algn="ctr"/>
+            <a:r>
+              <a:rPr sz="1800" b="1">
+                <a:solidFill>
+                  <a:srgbClr val="355C7D"/>
+                </a:solidFill>
+                <a:latin typeface="Sarabun"/>
+              </a:rPr>
+              <a:t>Nine</a:t>
+            </a:r>
+          </a:p>
+        </p:txBody>
+      </p:sp>
     </p:spTree>
   </p:cSld>
   <p:clrMapOvr>
@@ -8406,6 +8976,63 @@
           </a:p>
         </p:txBody>
       </p:sp>
+      <p:sp>
+        <p:nvSpPr>
+          <p:cNvPr id="16" name="__pip_placeholder__"/>
+          <p:cNvSpPr/>
+          <p:nvPr/>
+        </p:nvSpPr>
+        <p:spPr>
+          <a:xfrm>
+            <a:off x="8351215" y="0"/>
+            <a:ext cx="3840480" cy="2880360"/>
+          </a:xfrm>
+          <a:prstGeom prst="rect">
+            <a:avLst/>
+          </a:prstGeom>
+          <a:solidFill>
+            <a:srgbClr val="DBE7EC">
+              <a:alpha val="30000"/>
+            </a:srgbClr>
+          </a:solidFill>
+          <a:ln w="19050">
+            <a:solidFill>
+              <a:srgbClr val="355C7D"/>
+            </a:solidFill>
+            <a:prstDash val="sysDash"/>
+          </a:ln>
+        </p:spPr>
+        <p:style>
+          <a:lnRef idx="1">
+            <a:schemeClr val="accent1"/>
+          </a:lnRef>
+          <a:fillRef idx="3">
+            <a:schemeClr val="accent1"/>
+          </a:fillRef>
+          <a:effectRef idx="2">
+            <a:schemeClr val="accent1"/>
+          </a:effectRef>
+          <a:fontRef idx="minor">
+            <a:schemeClr val="lt1"/>
+          </a:fontRef>
+        </p:style>
+        <p:txBody>
+          <a:bodyPr rtlCol="0" anchor="ctr" wrap="none"/>
+          <a:lstStyle/>
+          <a:p>
+            <a:pPr algn="ctr"/>
+            <a:r>
+              <a:rPr sz="1800" b="1">
+                <a:solidFill>
+                  <a:srgbClr val="355C7D"/>
+                </a:solidFill>
+                <a:latin typeface="Sarabun"/>
+              </a:rPr>
+              <a:t>Nine</a:t>
+            </a:r>
+          </a:p>
+        </p:txBody>
+      </p:sp>
     </p:spTree>
   </p:cSld>
   <p:clrMapOvr>
@@ -8947,6 +9574,63 @@
                 <a:cs typeface="Sarabun"/>
               </a:rPr>
               <a:t>Softens the situation - not a yes/no answer</a:t>
+            </a:r>
+          </a:p>
+        </p:txBody>
+      </p:sp>
+      <p:sp>
+        <p:nvSpPr>
+          <p:cNvPr id="16" name="__pip_placeholder__"/>
+          <p:cNvSpPr/>
+          <p:nvPr/>
+        </p:nvSpPr>
+        <p:spPr>
+          <a:xfrm>
+            <a:off x="8351215" y="0"/>
+            <a:ext cx="3840480" cy="2880360"/>
+          </a:xfrm>
+          <a:prstGeom prst="rect">
+            <a:avLst/>
+          </a:prstGeom>
+          <a:solidFill>
+            <a:srgbClr val="DBE7EC">
+              <a:alpha val="30000"/>
+            </a:srgbClr>
+          </a:solidFill>
+          <a:ln w="19050">
+            <a:solidFill>
+              <a:srgbClr val="355C7D"/>
+            </a:solidFill>
+            <a:prstDash val="sysDash"/>
+          </a:ln>
+        </p:spPr>
+        <p:style>
+          <a:lnRef idx="1">
+            <a:schemeClr val="accent1"/>
+          </a:lnRef>
+          <a:fillRef idx="3">
+            <a:schemeClr val="accent1"/>
+          </a:fillRef>
+          <a:effectRef idx="2">
+            <a:schemeClr val="accent1"/>
+          </a:effectRef>
+          <a:fontRef idx="minor">
+            <a:schemeClr val="lt1"/>
+          </a:fontRef>
+        </p:style>
+        <p:txBody>
+          <a:bodyPr rtlCol="0" anchor="ctr" wrap="none"/>
+          <a:lstStyle/>
+          <a:p>
+            <a:pPr algn="ctr"/>
+            <a:r>
+              <a:rPr sz="1800" b="1">
+                <a:solidFill>
+                  <a:srgbClr val="355C7D"/>
+                </a:solidFill>
+                <a:latin typeface="Sarabun"/>
+              </a:rPr>
+              <a:t>Nine</a:t>
             </a:r>
           </a:p>
         </p:txBody>

--- a/course/modules/M01/L001/M01-L001-canva-deck.pptx
+++ b/course/modules/M01/L001/M01-L001-canva-deck.pptx
@@ -4816,7 +4816,7 @@
         <p:spPr>
           <a:xfrm>
             <a:off x="731520" y="1325880"/>
-            <a:ext cx="3889080" cy="1572768"/>
+            <a:ext cx="7071055" cy="1572768"/>
           </a:xfrm>
           <a:prstGeom prst="roundRect">
             <a:avLst/>
@@ -4900,7 +4900,7 @@
         <p:spPr>
           <a:xfrm>
             <a:off x="1078992" y="1435608"/>
-            <a:ext cx="3431880" cy="658368"/>
+            <a:ext cx="6613855" cy="658368"/>
           </a:xfrm>
           <a:prstGeom prst="rect">
             <a:avLst/>
@@ -4948,7 +4948,7 @@
         <p:spPr>
           <a:xfrm>
             <a:off x="1078992" y="2203704"/>
-            <a:ext cx="3431880" cy="274320"/>
+            <a:ext cx="6613855" cy="274320"/>
           </a:xfrm>
           <a:prstGeom prst="rect">
             <a:avLst/>
@@ -4985,7 +4985,7 @@
         <p:spPr>
           <a:xfrm>
             <a:off x="731520" y="3081528"/>
-            <a:ext cx="3889080" cy="1572768"/>
+            <a:ext cx="7071055" cy="1572768"/>
           </a:xfrm>
           <a:prstGeom prst="roundRect">
             <a:avLst/>
@@ -5069,7 +5069,7 @@
         <p:spPr>
           <a:xfrm>
             <a:off x="1078992" y="3191256"/>
-            <a:ext cx="3431880" cy="658368"/>
+            <a:ext cx="6613855" cy="658368"/>
           </a:xfrm>
           <a:prstGeom prst="rect">
             <a:avLst/>
@@ -5117,7 +5117,7 @@
         <p:spPr>
           <a:xfrm>
             <a:off x="1078992" y="3959352"/>
-            <a:ext cx="3431880" cy="274320"/>
+            <a:ext cx="6613855" cy="274320"/>
           </a:xfrm>
           <a:prstGeom prst="rect">
             <a:avLst/>
@@ -5154,7 +5154,7 @@
         <p:spPr>
           <a:xfrm>
             <a:off x="731520" y="4837176"/>
-            <a:ext cx="3889080" cy="1572768"/>
+            <a:ext cx="7071055" cy="1572768"/>
           </a:xfrm>
           <a:prstGeom prst="roundRect">
             <a:avLst/>
@@ -5238,7 +5238,7 @@
         <p:spPr>
           <a:xfrm>
             <a:off x="1078992" y="4946904"/>
-            <a:ext cx="3431880" cy="658368"/>
+            <a:ext cx="6613855" cy="658368"/>
           </a:xfrm>
           <a:prstGeom prst="rect">
             <a:avLst/>
@@ -5286,7 +5286,7 @@
         <p:spPr>
           <a:xfrm>
             <a:off x="1078992" y="5715000"/>
-            <a:ext cx="3431880" cy="274320"/>
+            <a:ext cx="6613855" cy="274320"/>
           </a:xfrm>
           <a:prstGeom prst="rect">
             <a:avLst/>
@@ -5322,7 +5322,7 @@
         </p:nvSpPr>
         <p:spPr>
           <a:xfrm>
-            <a:off x="932688" y="6922008"/>
+            <a:off x="932688" y="6876288"/>
             <a:ext cx="9692640" cy="228600"/>
           </a:xfrm>
           <a:prstGeom prst="rect">
@@ -5359,7 +5359,7 @@
         </p:nvSpPr>
         <p:spPr>
           <a:xfrm>
-            <a:off x="932688" y="7306056"/>
+            <a:off x="932688" y="7260336"/>
             <a:ext cx="82296" cy="82296"/>
           </a:xfrm>
           <a:prstGeom prst="ellipse">
@@ -5402,7 +5402,7 @@
         </p:nvSpPr>
         <p:spPr>
           <a:xfrm>
-            <a:off x="1078992" y="7214616"/>
+            <a:off x="1078992" y="7168896"/>
             <a:ext cx="9555480" cy="274320"/>
           </a:xfrm>
           <a:prstGeom prst="rect">
@@ -5739,7 +5739,7 @@
         <p:spPr>
           <a:xfrm>
             <a:off x="731520" y="1325880"/>
-            <a:ext cx="3889080" cy="1572768"/>
+            <a:ext cx="7071055" cy="1572768"/>
           </a:xfrm>
           <a:prstGeom prst="roundRect">
             <a:avLst/>
@@ -5823,7 +5823,7 @@
         <p:spPr>
           <a:xfrm>
             <a:off x="1078992" y="1435608"/>
-            <a:ext cx="3431880" cy="658368"/>
+            <a:ext cx="6613855" cy="658368"/>
           </a:xfrm>
           <a:prstGeom prst="rect">
             <a:avLst/>
@@ -5871,7 +5871,7 @@
         <p:spPr>
           <a:xfrm>
             <a:off x="1078992" y="2203704"/>
-            <a:ext cx="3431880" cy="274320"/>
+            <a:ext cx="6613855" cy="274320"/>
           </a:xfrm>
           <a:prstGeom prst="rect">
             <a:avLst/>
@@ -5908,7 +5908,7 @@
         <p:spPr>
           <a:xfrm>
             <a:off x="731520" y="3081528"/>
-            <a:ext cx="3889080" cy="1572768"/>
+            <a:ext cx="7071055" cy="1572768"/>
           </a:xfrm>
           <a:prstGeom prst="roundRect">
             <a:avLst/>
@@ -5992,7 +5992,7 @@
         <p:spPr>
           <a:xfrm>
             <a:off x="1078992" y="3191256"/>
-            <a:ext cx="3431880" cy="658368"/>
+            <a:ext cx="6613855" cy="658368"/>
           </a:xfrm>
           <a:prstGeom prst="rect">
             <a:avLst/>
@@ -6040,7 +6040,7 @@
         <p:spPr>
           <a:xfrm>
             <a:off x="1078992" y="3959352"/>
-            <a:ext cx="3431880" cy="274320"/>
+            <a:ext cx="6613855" cy="274320"/>
           </a:xfrm>
           <a:prstGeom prst="rect">
             <a:avLst/>
@@ -6077,7 +6077,7 @@
         <p:spPr>
           <a:xfrm>
             <a:off x="731520" y="4837176"/>
-            <a:ext cx="3889080" cy="1572768"/>
+            <a:ext cx="7071055" cy="1572768"/>
           </a:xfrm>
           <a:prstGeom prst="roundRect">
             <a:avLst/>
@@ -6161,7 +6161,7 @@
         <p:spPr>
           <a:xfrm>
             <a:off x="1078992" y="4946904"/>
-            <a:ext cx="3431880" cy="658368"/>
+            <a:ext cx="6613855" cy="658368"/>
           </a:xfrm>
           <a:prstGeom prst="rect">
             <a:avLst/>
@@ -6209,7 +6209,7 @@
         <p:spPr>
           <a:xfrm>
             <a:off x="1078992" y="5715000"/>
-            <a:ext cx="3431880" cy="274320"/>
+            <a:ext cx="6613855" cy="274320"/>
           </a:xfrm>
           <a:prstGeom prst="rect">
             <a:avLst/>
@@ -6245,7 +6245,7 @@
         </p:nvSpPr>
         <p:spPr>
           <a:xfrm>
-            <a:off x="932688" y="6922008"/>
+            <a:off x="932688" y="6876288"/>
             <a:ext cx="9692640" cy="228600"/>
           </a:xfrm>
           <a:prstGeom prst="rect">
@@ -6282,7 +6282,7 @@
         </p:nvSpPr>
         <p:spPr>
           <a:xfrm>
-            <a:off x="932688" y="7306056"/>
+            <a:off x="932688" y="7260336"/>
             <a:ext cx="82296" cy="82296"/>
           </a:xfrm>
           <a:prstGeom prst="ellipse">
@@ -6325,7 +6325,7 @@
         </p:nvSpPr>
         <p:spPr>
           <a:xfrm>
-            <a:off x="1078992" y="7214616"/>
+            <a:off x="1078992" y="7168896"/>
             <a:ext cx="9555480" cy="274320"/>
           </a:xfrm>
           <a:prstGeom prst="rect">
@@ -6629,7 +6629,7 @@
         <p:spPr>
           <a:xfrm>
             <a:off x="731520" y="1325880"/>
-            <a:ext cx="3889080" cy="1572768"/>
+            <a:ext cx="7071055" cy="1572768"/>
           </a:xfrm>
           <a:prstGeom prst="roundRect">
             <a:avLst/>
@@ -6713,7 +6713,7 @@
         <p:spPr>
           <a:xfrm>
             <a:off x="1078992" y="1435608"/>
-            <a:ext cx="3431880" cy="658368"/>
+            <a:ext cx="6613855" cy="658368"/>
           </a:xfrm>
           <a:prstGeom prst="rect">
             <a:avLst/>
@@ -6761,7 +6761,7 @@
         <p:spPr>
           <a:xfrm>
             <a:off x="1078992" y="2203704"/>
-            <a:ext cx="3431880" cy="274320"/>
+            <a:ext cx="6613855" cy="274320"/>
           </a:xfrm>
           <a:prstGeom prst="rect">
             <a:avLst/>
@@ -6798,7 +6798,7 @@
         <p:spPr>
           <a:xfrm>
             <a:off x="731520" y="3081528"/>
-            <a:ext cx="3889080" cy="1572768"/>
+            <a:ext cx="7071055" cy="1572768"/>
           </a:xfrm>
           <a:prstGeom prst="roundRect">
             <a:avLst/>
@@ -6882,7 +6882,7 @@
         <p:spPr>
           <a:xfrm>
             <a:off x="1078992" y="3191256"/>
-            <a:ext cx="3431880" cy="658368"/>
+            <a:ext cx="6613855" cy="658368"/>
           </a:xfrm>
           <a:prstGeom prst="rect">
             <a:avLst/>
@@ -6930,7 +6930,7 @@
         <p:spPr>
           <a:xfrm>
             <a:off x="1078992" y="3959352"/>
-            <a:ext cx="3431880" cy="274320"/>
+            <a:ext cx="6613855" cy="274320"/>
           </a:xfrm>
           <a:prstGeom prst="rect">
             <a:avLst/>
@@ -6967,7 +6967,7 @@
         <p:spPr>
           <a:xfrm>
             <a:off x="731520" y="4837176"/>
-            <a:ext cx="3889080" cy="1572768"/>
+            <a:ext cx="7071055" cy="1572768"/>
           </a:xfrm>
           <a:prstGeom prst="roundRect">
             <a:avLst/>
@@ -7051,7 +7051,7 @@
         <p:spPr>
           <a:xfrm>
             <a:off x="1078992" y="4946904"/>
-            <a:ext cx="3431880" cy="658368"/>
+            <a:ext cx="6613855" cy="658368"/>
           </a:xfrm>
           <a:prstGeom prst="rect">
             <a:avLst/>
@@ -7099,7 +7099,7 @@
         <p:spPr>
           <a:xfrm>
             <a:off x="1078992" y="5715000"/>
-            <a:ext cx="3431880" cy="274320"/>
+            <a:ext cx="6613855" cy="274320"/>
           </a:xfrm>
           <a:prstGeom prst="rect">
             <a:avLst/>
@@ -7135,7 +7135,7 @@
         </p:nvSpPr>
         <p:spPr>
           <a:xfrm>
-            <a:off x="932688" y="6922008"/>
+            <a:off x="932688" y="6876288"/>
             <a:ext cx="9692640" cy="228600"/>
           </a:xfrm>
           <a:prstGeom prst="rect">
@@ -7172,7 +7172,7 @@
         </p:nvSpPr>
         <p:spPr>
           <a:xfrm>
-            <a:off x="932688" y="7306056"/>
+            <a:off x="932688" y="7260336"/>
             <a:ext cx="82296" cy="82296"/>
           </a:xfrm>
           <a:prstGeom prst="ellipse">
@@ -7215,7 +7215,7 @@
         </p:nvSpPr>
         <p:spPr>
           <a:xfrm>
-            <a:off x="1078992" y="7214616"/>
+            <a:off x="1078992" y="7168896"/>
             <a:ext cx="9555480" cy="274320"/>
           </a:xfrm>
           <a:prstGeom prst="rect">
@@ -7552,7 +7552,7 @@
         <p:spPr>
           <a:xfrm>
             <a:off x="731520" y="1325880"/>
-            <a:ext cx="3889080" cy="1572768"/>
+            <a:ext cx="7071055" cy="1572768"/>
           </a:xfrm>
           <a:prstGeom prst="roundRect">
             <a:avLst/>
@@ -7636,7 +7636,7 @@
         <p:spPr>
           <a:xfrm>
             <a:off x="1078992" y="1435608"/>
-            <a:ext cx="3431880" cy="658368"/>
+            <a:ext cx="6613855" cy="658368"/>
           </a:xfrm>
           <a:prstGeom prst="rect">
             <a:avLst/>
@@ -7684,7 +7684,7 @@
         <p:spPr>
           <a:xfrm>
             <a:off x="1078992" y="2203704"/>
-            <a:ext cx="3431880" cy="274320"/>
+            <a:ext cx="6613855" cy="274320"/>
           </a:xfrm>
           <a:prstGeom prst="rect">
             <a:avLst/>
@@ -7721,7 +7721,7 @@
         <p:spPr>
           <a:xfrm>
             <a:off x="731520" y="3081528"/>
-            <a:ext cx="3889080" cy="1572768"/>
+            <a:ext cx="7071055" cy="1572768"/>
           </a:xfrm>
           <a:prstGeom prst="roundRect">
             <a:avLst/>
@@ -7805,7 +7805,7 @@
         <p:spPr>
           <a:xfrm>
             <a:off x="1078992" y="3191256"/>
-            <a:ext cx="3431880" cy="658368"/>
+            <a:ext cx="6613855" cy="658368"/>
           </a:xfrm>
           <a:prstGeom prst="rect">
             <a:avLst/>
@@ -7853,7 +7853,7 @@
         <p:spPr>
           <a:xfrm>
             <a:off x="1078992" y="3959352"/>
-            <a:ext cx="3431880" cy="274320"/>
+            <a:ext cx="6613855" cy="274320"/>
           </a:xfrm>
           <a:prstGeom prst="rect">
             <a:avLst/>
@@ -7890,7 +7890,7 @@
         <p:spPr>
           <a:xfrm>
             <a:off x="731520" y="4837176"/>
-            <a:ext cx="3889080" cy="1572768"/>
+            <a:ext cx="7071055" cy="1572768"/>
           </a:xfrm>
           <a:prstGeom prst="roundRect">
             <a:avLst/>
@@ -7974,7 +7974,7 @@
         <p:spPr>
           <a:xfrm>
             <a:off x="1078992" y="4946904"/>
-            <a:ext cx="3431880" cy="658368"/>
+            <a:ext cx="6613855" cy="658368"/>
           </a:xfrm>
           <a:prstGeom prst="rect">
             <a:avLst/>
@@ -8022,7 +8022,7 @@
         <p:spPr>
           <a:xfrm>
             <a:off x="1078992" y="5715000"/>
-            <a:ext cx="3431880" cy="274320"/>
+            <a:ext cx="6613855" cy="274320"/>
           </a:xfrm>
           <a:prstGeom prst="rect">
             <a:avLst/>
@@ -8058,7 +8058,7 @@
         </p:nvSpPr>
         <p:spPr>
           <a:xfrm>
-            <a:off x="932688" y="6922008"/>
+            <a:off x="932688" y="6876288"/>
             <a:ext cx="9692640" cy="228600"/>
           </a:xfrm>
           <a:prstGeom prst="rect">
@@ -8095,7 +8095,7 @@
         </p:nvSpPr>
         <p:spPr>
           <a:xfrm>
-            <a:off x="932688" y="7306056"/>
+            <a:off x="932688" y="7260336"/>
             <a:ext cx="82296" cy="82296"/>
           </a:xfrm>
           <a:prstGeom prst="ellipse">
@@ -8138,7 +8138,7 @@
         </p:nvSpPr>
         <p:spPr>
           <a:xfrm>
-            <a:off x="1078992" y="7214616"/>
+            <a:off x="1078992" y="7168896"/>
             <a:ext cx="9555480" cy="274320"/>
           </a:xfrm>
           <a:prstGeom prst="rect">
@@ -8442,7 +8442,7 @@
         <p:spPr>
           <a:xfrm>
             <a:off x="731520" y="1325880"/>
-            <a:ext cx="3889080" cy="1572768"/>
+            <a:ext cx="7071055" cy="1572768"/>
           </a:xfrm>
           <a:prstGeom prst="roundRect">
             <a:avLst/>
@@ -8526,7 +8526,7 @@
         <p:spPr>
           <a:xfrm>
             <a:off x="1078992" y="1435608"/>
-            <a:ext cx="3431880" cy="658368"/>
+            <a:ext cx="6613855" cy="658368"/>
           </a:xfrm>
           <a:prstGeom prst="rect">
             <a:avLst/>
@@ -8574,7 +8574,7 @@
         <p:spPr>
           <a:xfrm>
             <a:off x="1078992" y="2203704"/>
-            <a:ext cx="3431880" cy="274320"/>
+            <a:ext cx="6613855" cy="274320"/>
           </a:xfrm>
           <a:prstGeom prst="rect">
             <a:avLst/>
@@ -8611,7 +8611,7 @@
         <p:spPr>
           <a:xfrm>
             <a:off x="731520" y="3081528"/>
-            <a:ext cx="3889080" cy="1572768"/>
+            <a:ext cx="7071055" cy="1572768"/>
           </a:xfrm>
           <a:prstGeom prst="roundRect">
             <a:avLst/>
@@ -8695,7 +8695,7 @@
         <p:spPr>
           <a:xfrm>
             <a:off x="1078992" y="3191256"/>
-            <a:ext cx="3431880" cy="658368"/>
+            <a:ext cx="6613855" cy="658368"/>
           </a:xfrm>
           <a:prstGeom prst="rect">
             <a:avLst/>
@@ -8743,7 +8743,7 @@
         <p:spPr>
           <a:xfrm>
             <a:off x="1078992" y="3959352"/>
-            <a:ext cx="3431880" cy="274320"/>
+            <a:ext cx="6613855" cy="274320"/>
           </a:xfrm>
           <a:prstGeom prst="rect">
             <a:avLst/>
@@ -8780,7 +8780,7 @@
         <p:spPr>
           <a:xfrm>
             <a:off x="731520" y="4837176"/>
-            <a:ext cx="3889080" cy="1572768"/>
+            <a:ext cx="7071055" cy="1572768"/>
           </a:xfrm>
           <a:prstGeom prst="roundRect">
             <a:avLst/>
@@ -8864,7 +8864,7 @@
         <p:spPr>
           <a:xfrm>
             <a:off x="1078992" y="4946904"/>
-            <a:ext cx="3431880" cy="658368"/>
+            <a:ext cx="6613855" cy="658368"/>
           </a:xfrm>
           <a:prstGeom prst="rect">
             <a:avLst/>
@@ -8912,7 +8912,7 @@
         <p:spPr>
           <a:xfrm>
             <a:off x="1078992" y="5715000"/>
-            <a:ext cx="3431880" cy="274320"/>
+            <a:ext cx="6613855" cy="274320"/>
           </a:xfrm>
           <a:prstGeom prst="rect">
             <a:avLst/>
@@ -8948,7 +8948,7 @@
         </p:nvSpPr>
         <p:spPr>
           <a:xfrm>
-            <a:off x="932688" y="6922008"/>
+            <a:off x="932688" y="6876288"/>
             <a:ext cx="9692640" cy="228600"/>
           </a:xfrm>
           <a:prstGeom prst="rect">
@@ -8985,7 +8985,7 @@
         </p:nvSpPr>
         <p:spPr>
           <a:xfrm>
-            <a:off x="932688" y="7306056"/>
+            <a:off x="932688" y="7260336"/>
             <a:ext cx="82296" cy="82296"/>
           </a:xfrm>
           <a:prstGeom prst="ellipse">
@@ -9028,7 +9028,7 @@
         </p:nvSpPr>
         <p:spPr>
           <a:xfrm>
-            <a:off x="1078992" y="7214616"/>
+            <a:off x="1078992" y="7168896"/>
             <a:ext cx="9555480" cy="274320"/>
           </a:xfrm>
           <a:prstGeom prst="rect">

--- a/course/modules/M01/L001/M01-L001-canva-deck.pptx
+++ b/course/modules/M01/L001/M01-L001-canva-deck.pptx
@@ -8,13 +8,13 @@
     <p:sldId id="256" r:id="rId7"/>
     <p:sldId id="257" r:id="rId8"/>
     <p:sldId id="258" r:id="rId9"/>
-    <p:sldId id="259" r:id="rId10"/>
-    <p:sldId id="260" r:id="rId11"/>
-    <p:sldId id="261" r:id="rId12"/>
-    <p:sldId id="262" r:id="rId13"/>
-    <p:sldId id="263" r:id="rId14"/>
-    <p:sldId id="264" r:id="rId15"/>
-    <p:sldId id="265" r:id="rId16"/>
+    <p:sldId id="259" r:id="rId11"/>
+    <p:sldId id="260" r:id="rId12"/>
+    <p:sldId id="261" r:id="rId13"/>
+    <p:sldId id="262" r:id="rId14"/>
+    <p:sldId id="263" r:id="rId15"/>
+    <p:sldId id="264" r:id="rId16"/>
+    <p:sldId id="265" r:id="rId17"/>
   </p:sldIdLst>
   <p:sldSz cx="12191695" cy="6858000" type="screen4x3"/>
   <p:notesSz cx="6858000" cy="9144000"/>
@@ -114,6 +114,791 @@
     </a:lvl9pPr>
   </p:defaultTextStyle>
 </p:presentation>
+</file>
+
+<file path=ppt/notesMasters/notesMaster1.xml><?xml version="1.0" encoding="utf-8"?>
+<p:notesMaster xmlns:a="http://schemas.openxmlformats.org/drawingml/2006/main" xmlns:p="http://schemas.openxmlformats.org/presentationml/2006/main" xmlns:r="http://schemas.openxmlformats.org/officeDocument/2006/relationships">
+  <p:cSld>
+    <p:bg>
+      <p:bgRef idx="1001">
+        <a:schemeClr val="bg1"/>
+      </p:bgRef>
+    </p:bg>
+    <p:spTree>
+      <p:nvGrpSpPr>
+        <p:cNvPr id="1" name=""/>
+        <p:cNvGrpSpPr/>
+        <p:nvPr/>
+      </p:nvGrpSpPr>
+      <p:grpSpPr>
+        <a:xfrm>
+          <a:off x="0" y="0"/>
+          <a:ext cx="0" cy="0"/>
+          <a:chOff x="0" y="0"/>
+          <a:chExt cx="0" cy="0"/>
+        </a:xfrm>
+      </p:grpSpPr>
+      <p:sp>
+        <p:nvSpPr>
+          <p:cNvPr id="2" name="Header Placeholder 1"/>
+          <p:cNvSpPr>
+            <a:spLocks noGrp="1"/>
+          </p:cNvSpPr>
+          <p:nvPr>
+            <p:ph type="hdr" sz="quarter"/>
+          </p:nvPr>
+        </p:nvSpPr>
+        <p:spPr>
+          <a:xfrm>
+            <a:off x="0" y="0"/>
+            <a:ext cx="2971800" cy="457200"/>
+          </a:xfrm>
+          <a:prstGeom prst="rect">
+            <a:avLst/>
+          </a:prstGeom>
+        </p:spPr>
+        <p:txBody>
+          <a:bodyPr vert="horz" lIns="91440" tIns="45720" rIns="91440" bIns="45720" rtlCol="0"/>
+          <a:lstStyle>
+            <a:lvl1pPr algn="l">
+              <a:defRPr sz="1200"/>
+            </a:lvl1pPr>
+          </a:lstStyle>
+          <a:p>
+            <a:endParaRPr lang="en-US"/>
+          </a:p>
+        </p:txBody>
+      </p:sp>
+      <p:sp>
+        <p:nvSpPr>
+          <p:cNvPr id="3" name="Date Placeholder 2"/>
+          <p:cNvSpPr>
+            <a:spLocks noGrp="1"/>
+          </p:cNvSpPr>
+          <p:nvPr>
+            <p:ph type="dt" idx="1"/>
+          </p:nvPr>
+        </p:nvSpPr>
+        <p:spPr>
+          <a:xfrm>
+            <a:off x="3884613" y="0"/>
+            <a:ext cx="2971800" cy="457200"/>
+          </a:xfrm>
+          <a:prstGeom prst="rect">
+            <a:avLst/>
+          </a:prstGeom>
+        </p:spPr>
+        <p:txBody>
+          <a:bodyPr vert="horz" lIns="91440" tIns="45720" rIns="91440" bIns="45720" rtlCol="0"/>
+          <a:lstStyle>
+            <a:lvl1pPr algn="r">
+              <a:defRPr sz="1200"/>
+            </a:lvl1pPr>
+          </a:lstStyle>
+          <a:p>
+            <a:fld id="{0F89C1C7-3DCD-1040-A9CF-14679D8B5DDD}" type="datetimeFigureOut">
+              <a:rPr lang="en-US" smtClean="0"/>
+              <a:t>10/17/16</a:t>
+            </a:fld>
+            <a:endParaRPr lang="en-US"/>
+          </a:p>
+        </p:txBody>
+      </p:sp>
+      <p:sp>
+        <p:nvSpPr>
+          <p:cNvPr id="4" name="Slide Image Placeholder 3"/>
+          <p:cNvSpPr>
+            <a:spLocks noGrp="1" noRot="1" noChangeAspect="1"/>
+          </p:cNvSpPr>
+          <p:nvPr>
+            <p:ph type="sldImg" idx="2"/>
+          </p:nvPr>
+        </p:nvSpPr>
+        <p:spPr>
+          <a:xfrm>
+            <a:off x="1143000" y="685800"/>
+            <a:ext cx="4572000" cy="3429000"/>
+          </a:xfrm>
+          <a:prstGeom prst="rect">
+            <a:avLst/>
+          </a:prstGeom>
+          <a:noFill/>
+          <a:ln w="12700">
+            <a:solidFill>
+              <a:prstClr val="black"/>
+            </a:solidFill>
+          </a:ln>
+        </p:spPr>
+        <p:txBody>
+          <a:bodyPr vert="horz" lIns="91440" tIns="45720" rIns="91440" bIns="45720" rtlCol="0" anchor="ctr"/>
+          <a:lstStyle/>
+          <a:p>
+            <a:endParaRPr lang="en-US"/>
+          </a:p>
+        </p:txBody>
+      </p:sp>
+      <p:sp>
+        <p:nvSpPr>
+          <p:cNvPr id="5" name="Notes Placeholder 4"/>
+          <p:cNvSpPr>
+            <a:spLocks noGrp="1"/>
+          </p:cNvSpPr>
+          <p:nvPr>
+            <p:ph type="body" sz="quarter" idx="3"/>
+          </p:nvPr>
+        </p:nvSpPr>
+        <p:spPr>
+          <a:xfrm>
+            <a:off x="685800" y="4343400"/>
+            <a:ext cx="5486400" cy="4114800"/>
+          </a:xfrm>
+          <a:prstGeom prst="rect">
+            <a:avLst/>
+          </a:prstGeom>
+        </p:spPr>
+        <p:txBody>
+          <a:bodyPr vert="horz" lIns="91440" tIns="45720" rIns="91440" bIns="45720" rtlCol="0"/>
+          <a:lstStyle/>
+          <a:p>
+            <a:pPr lvl="0"/>
+            <a:r>
+              <a:rPr lang="en-US" smtClean="0"/>
+              <a:t>Click to edit Master text styles</a:t>
+            </a:r>
+          </a:p>
+          <a:p>
+            <a:pPr lvl="1"/>
+            <a:r>
+              <a:rPr lang="en-US" smtClean="0"/>
+              <a:t>Second level</a:t>
+            </a:r>
+          </a:p>
+          <a:p>
+            <a:pPr lvl="2"/>
+            <a:r>
+              <a:rPr lang="en-US" smtClean="0"/>
+              <a:t>Third level</a:t>
+            </a:r>
+          </a:p>
+          <a:p>
+            <a:pPr lvl="3"/>
+            <a:r>
+              <a:rPr lang="en-US" smtClean="0"/>
+              <a:t>Fourth level</a:t>
+            </a:r>
+          </a:p>
+          <a:p>
+            <a:pPr lvl="4"/>
+            <a:r>
+              <a:rPr lang="en-US" smtClean="0"/>
+              <a:t>Fifth level</a:t>
+            </a:r>
+            <a:endParaRPr lang="en-US"/>
+          </a:p>
+        </p:txBody>
+      </p:sp>
+      <p:sp>
+        <p:nvSpPr>
+          <p:cNvPr id="6" name="Footer Placeholder 5"/>
+          <p:cNvSpPr>
+            <a:spLocks noGrp="1"/>
+          </p:cNvSpPr>
+          <p:nvPr>
+            <p:ph type="ftr" sz="quarter" idx="4"/>
+          </p:nvPr>
+        </p:nvSpPr>
+        <p:spPr>
+          <a:xfrm>
+            <a:off x="0" y="8685213"/>
+            <a:ext cx="2971800" cy="457200"/>
+          </a:xfrm>
+          <a:prstGeom prst="rect">
+            <a:avLst/>
+          </a:prstGeom>
+        </p:spPr>
+        <p:txBody>
+          <a:bodyPr vert="horz" lIns="91440" tIns="45720" rIns="91440" bIns="45720" rtlCol="0" anchor="b"/>
+          <a:lstStyle>
+            <a:lvl1pPr algn="l">
+              <a:defRPr sz="1200"/>
+            </a:lvl1pPr>
+          </a:lstStyle>
+          <a:p>
+            <a:endParaRPr lang="en-US"/>
+          </a:p>
+        </p:txBody>
+      </p:sp>
+      <p:sp>
+        <p:nvSpPr>
+          <p:cNvPr id="7" name="Slide Number Placeholder 6"/>
+          <p:cNvSpPr>
+            <a:spLocks noGrp="1"/>
+          </p:cNvSpPr>
+          <p:nvPr>
+            <p:ph type="sldNum" sz="quarter" idx="5"/>
+          </p:nvPr>
+        </p:nvSpPr>
+        <p:spPr>
+          <a:xfrm>
+            <a:off x="3884613" y="8685213"/>
+            <a:ext cx="2971800" cy="457200"/>
+          </a:xfrm>
+          <a:prstGeom prst="rect">
+            <a:avLst/>
+          </a:prstGeom>
+        </p:spPr>
+        <p:txBody>
+          <a:bodyPr vert="horz" lIns="91440" tIns="45720" rIns="91440" bIns="45720" rtlCol="0" anchor="b"/>
+          <a:lstStyle>
+            <a:lvl1pPr algn="r">
+              <a:defRPr sz="1200"/>
+            </a:lvl1pPr>
+          </a:lstStyle>
+          <a:p>
+            <a:fld id="{BB5E49A5-4136-284D-997B-48E1D791AD67}" type="slidenum">
+              <a:rPr lang="en-US" smtClean="0"/>
+              <a:t>‹#›</a:t>
+            </a:fld>
+            <a:endParaRPr lang="en-US"/>
+          </a:p>
+        </p:txBody>
+      </p:sp>
+    </p:spTree>
+    <p:extLst>
+      <p:ext uri="{BB962C8B-B14F-4D97-AF65-F5344CB8AC3E}">
+        <p14:creationId xmlns:p14="http://schemas.microsoft.com/office/powerpoint/2010/main" val="2623252185"/>
+      </p:ext>
+    </p:extLst>
+  </p:cSld>
+  <p:clrMap bg1="lt1" tx1="dk1" bg2="lt2" tx2="dk2" accent1="accent1" accent2="accent2" accent3="accent3" accent4="accent4" accent5="accent5" accent6="accent6" hlink="hlink" folHlink="folHlink"/>
+  <p:notesStyle>
+    <a:lvl1pPr marL="0" algn="l" defTabSz="457200" rtl="0" eaLnBrk="1" latinLnBrk="0" hangingPunct="1">
+      <a:defRPr sz="1200" kern="1200">
+        <a:solidFill>
+          <a:schemeClr val="tx1"/>
+        </a:solidFill>
+        <a:latin typeface="+mn-lt"/>
+        <a:ea typeface="+mn-ea"/>
+        <a:cs typeface="+mn-cs"/>
+      </a:defRPr>
+    </a:lvl1pPr>
+    <a:lvl2pPr marL="457200" algn="l" defTabSz="457200" rtl="0" eaLnBrk="1" latinLnBrk="0" hangingPunct="1">
+      <a:defRPr sz="1200" kern="1200">
+        <a:solidFill>
+          <a:schemeClr val="tx1"/>
+        </a:solidFill>
+        <a:latin typeface="+mn-lt"/>
+        <a:ea typeface="+mn-ea"/>
+        <a:cs typeface="+mn-cs"/>
+      </a:defRPr>
+    </a:lvl2pPr>
+    <a:lvl3pPr marL="914400" algn="l" defTabSz="457200" rtl="0" eaLnBrk="1" latinLnBrk="0" hangingPunct="1">
+      <a:defRPr sz="1200" kern="1200">
+        <a:solidFill>
+          <a:schemeClr val="tx1"/>
+        </a:solidFill>
+        <a:latin typeface="+mn-lt"/>
+        <a:ea typeface="+mn-ea"/>
+        <a:cs typeface="+mn-cs"/>
+      </a:defRPr>
+    </a:lvl3pPr>
+    <a:lvl4pPr marL="1371600" algn="l" defTabSz="457200" rtl="0" eaLnBrk="1" latinLnBrk="0" hangingPunct="1">
+      <a:defRPr sz="1200" kern="1200">
+        <a:solidFill>
+          <a:schemeClr val="tx1"/>
+        </a:solidFill>
+        <a:latin typeface="+mn-lt"/>
+        <a:ea typeface="+mn-ea"/>
+        <a:cs typeface="+mn-cs"/>
+      </a:defRPr>
+    </a:lvl4pPr>
+    <a:lvl5pPr marL="1828800" algn="l" defTabSz="457200" rtl="0" eaLnBrk="1" latinLnBrk="0" hangingPunct="1">
+      <a:defRPr sz="1200" kern="1200">
+        <a:solidFill>
+          <a:schemeClr val="tx1"/>
+        </a:solidFill>
+        <a:latin typeface="+mn-lt"/>
+        <a:ea typeface="+mn-ea"/>
+        <a:cs typeface="+mn-cs"/>
+      </a:defRPr>
+    </a:lvl5pPr>
+    <a:lvl6pPr marL="2286000" algn="l" defTabSz="457200" rtl="0" eaLnBrk="1" latinLnBrk="0" hangingPunct="1">
+      <a:defRPr sz="1200" kern="1200">
+        <a:solidFill>
+          <a:schemeClr val="tx1"/>
+        </a:solidFill>
+        <a:latin typeface="+mn-lt"/>
+        <a:ea typeface="+mn-ea"/>
+        <a:cs typeface="+mn-cs"/>
+      </a:defRPr>
+    </a:lvl6pPr>
+    <a:lvl7pPr marL="2743200" algn="l" defTabSz="457200" rtl="0" eaLnBrk="1" latinLnBrk="0" hangingPunct="1">
+      <a:defRPr sz="1200" kern="1200">
+        <a:solidFill>
+          <a:schemeClr val="tx1"/>
+        </a:solidFill>
+        <a:latin typeface="+mn-lt"/>
+        <a:ea typeface="+mn-ea"/>
+        <a:cs typeface="+mn-cs"/>
+      </a:defRPr>
+    </a:lvl7pPr>
+    <a:lvl8pPr marL="3200400" algn="l" defTabSz="457200" rtl="0" eaLnBrk="1" latinLnBrk="0" hangingPunct="1">
+      <a:defRPr sz="1200" kern="1200">
+        <a:solidFill>
+          <a:schemeClr val="tx1"/>
+        </a:solidFill>
+        <a:latin typeface="+mn-lt"/>
+        <a:ea typeface="+mn-ea"/>
+        <a:cs typeface="+mn-cs"/>
+      </a:defRPr>
+    </a:lvl8pPr>
+    <a:lvl9pPr marL="3657600" algn="l" defTabSz="457200" rtl="0" eaLnBrk="1" latinLnBrk="0" hangingPunct="1">
+      <a:defRPr sz="1200" kern="1200">
+        <a:solidFill>
+          <a:schemeClr val="tx1"/>
+        </a:solidFill>
+        <a:latin typeface="+mn-lt"/>
+        <a:ea typeface="+mn-ea"/>
+        <a:cs typeface="+mn-cs"/>
+      </a:defRPr>
+    </a:lvl9pPr>
+  </p:notesStyle>
+</p:notesMaster>
+</file>
+
+<file path=ppt/notesSlides/notesSlide1.xml><?xml version="1.0" encoding="utf-8"?>
+<p:notes xmlns:a="http://schemas.openxmlformats.org/drawingml/2006/main" xmlns:p="http://schemas.openxmlformats.org/presentationml/2006/main" xmlns:r="http://schemas.openxmlformats.org/officeDocument/2006/relationships">
+  <p:cSld>
+    <p:spTree>
+      <p:nvGrpSpPr>
+        <p:cNvPr id="1" name=""/>
+        <p:cNvGrpSpPr/>
+        <p:nvPr/>
+      </p:nvGrpSpPr>
+      <p:grpSpPr>
+        <a:xfrm>
+          <a:off x="0" y="0"/>
+          <a:ext cx="0" cy="0"/>
+          <a:chOff x="0" y="0"/>
+          <a:chExt cx="0" cy="0"/>
+        </a:xfrm>
+      </p:grpSpPr>
+      <p:sp>
+        <p:nvSpPr>
+          <p:cNvPr id="2" name="Slide Image Placeholder 1"/>
+          <p:cNvSpPr>
+            <a:spLocks noGrp="1"/>
+          </p:cNvSpPr>
+          <p:nvPr>
+            <p:ph type="sldImg" idx="2"/>
+          </p:nvPr>
+        </p:nvSpPr>
+        <p:spPr/>
+      </p:sp>
+      <p:sp>
+        <p:nvSpPr>
+          <p:cNvPr id="3" name="Notes Placeholder 2"/>
+          <p:cNvSpPr>
+            <a:spLocks noGrp="1"/>
+          </p:cNvSpPr>
+          <p:nvPr>
+            <p:ph type="body" idx="3" sz="quarter"/>
+          </p:nvPr>
+        </p:nvSpPr>
+        <p:spPr/>
+        <p:txBody>
+          <a:bodyPr/>
+          <a:lstStyle/>
+          <a:p/>
+          <a:p/>
+          <a:p>
+            <a:r>
+              <a:t>[Practice — moved to notes, no room on slide]</a:t>
+            </a:r>
+          </a:p>
+          <a:p>
+            <a:r>
+              <a:t>• Listen and repeat three times: สวัสดี, สวัสดีครับ, สวัสดีค่ะ.</a:t>
+            </a:r>
+          </a:p>
+          <a:p>
+            <a:r>
+              <a:t>• Your turn: I will point to a male or female role. Say the correct full greeting aloud before I show the answer.</a:t>
+            </a:r>
+          </a:p>
+          <a:p>
+            <a:r>
+              <a:t>• Substitution drill: replace the ending — say สวัสดี with ครับ, now with ค่ะ.</a:t>
+            </a:r>
+          </a:p>
+          <a:p/>
+        </p:txBody>
+      </p:sp>
+      <p:sp>
+        <p:nvSpPr>
+          <p:cNvPr id="4" name="Slide Number Placeholder 3"/>
+          <p:cNvSpPr>
+            <a:spLocks noGrp="1"/>
+          </p:cNvSpPr>
+          <p:nvPr>
+            <p:ph type="sldNum" idx="5" sz="quarter"/>
+          </p:nvPr>
+        </p:nvSpPr>
+        <p:spPr/>
+      </p:sp>
+    </p:spTree>
+  </p:cSld>
+  <p:clrMapOvr>
+    <a:masterClrMapping/>
+  </p:clrMapOvr>
+</p:notes>
+</file>
+
+<file path=ppt/notesSlides/notesSlide2.xml><?xml version="1.0" encoding="utf-8"?>
+<p:notes xmlns:a="http://schemas.openxmlformats.org/drawingml/2006/main" xmlns:p="http://schemas.openxmlformats.org/presentationml/2006/main" xmlns:r="http://schemas.openxmlformats.org/officeDocument/2006/relationships">
+  <p:cSld>
+    <p:spTree>
+      <p:nvGrpSpPr>
+        <p:cNvPr id="1" name=""/>
+        <p:cNvGrpSpPr/>
+        <p:nvPr/>
+      </p:nvGrpSpPr>
+      <p:grpSpPr>
+        <a:xfrm>
+          <a:off x="0" y="0"/>
+          <a:ext cx="0" cy="0"/>
+          <a:chOff x="0" y="0"/>
+          <a:chExt cx="0" cy="0"/>
+        </a:xfrm>
+      </p:grpSpPr>
+      <p:sp>
+        <p:nvSpPr>
+          <p:cNvPr id="2" name="Slide Image Placeholder 1"/>
+          <p:cNvSpPr>
+            <a:spLocks noGrp="1"/>
+          </p:cNvSpPr>
+          <p:nvPr>
+            <p:ph type="sldImg" idx="2"/>
+          </p:nvPr>
+        </p:nvSpPr>
+        <p:spPr/>
+      </p:sp>
+      <p:sp>
+        <p:nvSpPr>
+          <p:cNvPr id="3" name="Notes Placeholder 2"/>
+          <p:cNvSpPr>
+            <a:spLocks noGrp="1"/>
+          </p:cNvSpPr>
+          <p:nvPr>
+            <p:ph type="body" idx="3" sz="quarter"/>
+          </p:nvPr>
+        </p:nvSpPr>
+        <p:spPr/>
+        <p:txBody>
+          <a:bodyPr/>
+          <a:lstStyle/>
+          <a:p/>
+          <a:p/>
+          <a:p>
+            <a:r>
+              <a:t>[Practice — moved to notes, no room on slide]</a:t>
+            </a:r>
+          </a:p>
+          <a:p>
+            <a:r>
+              <a:t>• Discrimination drill: I describe a situation. Choose ขอบคุณ or ขอโทษ — which one fits? Say it aloud.</a:t>
+            </a:r>
+          </a:p>
+          <a:p>
+            <a:r>
+              <a:t>• Response-building drill: I say ขอโทษครับ. Your turn — what do you say back? Pause and answer before I show it.</a:t>
+            </a:r>
+          </a:p>
+          <a:p>
+            <a:r>
+              <a:t>• Substitution drill: say ขอบคุณ with ครับ, now with ค่ะ. Now say ขอโทษ with ครับ, now with ค่ะ.</a:t>
+            </a:r>
+          </a:p>
+          <a:p/>
+        </p:txBody>
+      </p:sp>
+      <p:sp>
+        <p:nvSpPr>
+          <p:cNvPr id="4" name="Slide Number Placeholder 3"/>
+          <p:cNvSpPr>
+            <a:spLocks noGrp="1"/>
+          </p:cNvSpPr>
+          <p:nvPr>
+            <p:ph type="sldNum" idx="5" sz="quarter"/>
+          </p:nvPr>
+        </p:nvSpPr>
+        <p:spPr/>
+      </p:sp>
+    </p:spTree>
+  </p:cSld>
+  <p:clrMapOvr>
+    <a:masterClrMapping/>
+  </p:clrMapOvr>
+</p:notes>
+</file>
+
+<file path=ppt/notesSlides/notesSlide3.xml><?xml version="1.0" encoding="utf-8"?>
+<p:notes xmlns:a="http://schemas.openxmlformats.org/drawingml/2006/main" xmlns:p="http://schemas.openxmlformats.org/presentationml/2006/main" xmlns:r="http://schemas.openxmlformats.org/officeDocument/2006/relationships">
+  <p:cSld>
+    <p:spTree>
+      <p:nvGrpSpPr>
+        <p:cNvPr id="1" name=""/>
+        <p:cNvGrpSpPr/>
+        <p:nvPr/>
+      </p:nvGrpSpPr>
+      <p:grpSpPr>
+        <a:xfrm>
+          <a:off x="0" y="0"/>
+          <a:ext cx="0" cy="0"/>
+          <a:chOff x="0" y="0"/>
+          <a:chExt cx="0" cy="0"/>
+        </a:xfrm>
+      </p:grpSpPr>
+      <p:sp>
+        <p:nvSpPr>
+          <p:cNvPr id="2" name="Slide Image Placeholder 1"/>
+          <p:cNvSpPr>
+            <a:spLocks noGrp="1"/>
+          </p:cNvSpPr>
+          <p:nvPr>
+            <p:ph type="sldImg" idx="2"/>
+          </p:nvPr>
+        </p:nvSpPr>
+        <p:spPr/>
+      </p:sp>
+      <p:sp>
+        <p:nvSpPr>
+          <p:cNvPr id="3" name="Notes Placeholder 2"/>
+          <p:cNvSpPr>
+            <a:spLocks noGrp="1"/>
+          </p:cNvSpPr>
+          <p:nvPr>
+            <p:ph type="body" idx="3" sz="quarter"/>
+          </p:nvPr>
+        </p:nvSpPr>
+        <p:spPr/>
+        <p:txBody>
+          <a:bodyPr/>
+          <a:lstStyle/>
+          <a:p/>
+          <a:p/>
+          <a:p>
+            <a:r>
+              <a:t>[Practice — moved to notes, no room on slide]</a:t>
+            </a:r>
+          </a:p>
+          <a:p>
+            <a:r>
+              <a:t>• Substitution drill: I say a bare phrase. You add the correct polite ending. สวัสดี — your turn. ขอบคุณ — your turn. ขอโทษ — your turn.</a:t>
+            </a:r>
+          </a:p>
+          <a:p>
+            <a:r>
+              <a:t>• Discrimination drill: I say ค่ะ or คะ. Is the speaker making a statement or asking a question? Choose before I tell you.</a:t>
+            </a:r>
+          </a:p>
+          <a:p>
+            <a:r>
+              <a:t>• Substitution drill round 2: now try it with ไม่เป็นไร and ใช่. Add ครับ or ค่ะ.</a:t>
+            </a:r>
+          </a:p>
+          <a:p/>
+        </p:txBody>
+      </p:sp>
+      <p:sp>
+        <p:nvSpPr>
+          <p:cNvPr id="4" name="Slide Number Placeholder 3"/>
+          <p:cNvSpPr>
+            <a:spLocks noGrp="1"/>
+          </p:cNvSpPr>
+          <p:nvPr>
+            <p:ph type="sldNum" idx="5" sz="quarter"/>
+          </p:nvPr>
+        </p:nvSpPr>
+        <p:spPr/>
+      </p:sp>
+    </p:spTree>
+  </p:cSld>
+  <p:clrMapOvr>
+    <a:masterClrMapping/>
+  </p:clrMapOvr>
+</p:notes>
+</file>
+
+<file path=ppt/notesSlides/notesSlide4.xml><?xml version="1.0" encoding="utf-8"?>
+<p:notes xmlns:a="http://schemas.openxmlformats.org/drawingml/2006/main" xmlns:p="http://schemas.openxmlformats.org/presentationml/2006/main" xmlns:r="http://schemas.openxmlformats.org/officeDocument/2006/relationships">
+  <p:cSld>
+    <p:spTree>
+      <p:nvGrpSpPr>
+        <p:cNvPr id="1" name=""/>
+        <p:cNvGrpSpPr/>
+        <p:nvPr/>
+      </p:nvGrpSpPr>
+      <p:grpSpPr>
+        <a:xfrm>
+          <a:off x="0" y="0"/>
+          <a:ext cx="0" cy="0"/>
+          <a:chOff x="0" y="0"/>
+          <a:chExt cx="0" cy="0"/>
+        </a:xfrm>
+      </p:grpSpPr>
+      <p:sp>
+        <p:nvSpPr>
+          <p:cNvPr id="2" name="Slide Image Placeholder 1"/>
+          <p:cNvSpPr>
+            <a:spLocks noGrp="1"/>
+          </p:cNvSpPr>
+          <p:nvPr>
+            <p:ph type="sldImg" idx="2"/>
+          </p:nvPr>
+        </p:nvSpPr>
+        <p:spPr/>
+      </p:sp>
+      <p:sp>
+        <p:nvSpPr>
+          <p:cNvPr id="3" name="Notes Placeholder 2"/>
+          <p:cNvSpPr>
+            <a:spLocks noGrp="1"/>
+          </p:cNvSpPr>
+          <p:nvPr>
+            <p:ph type="body" idx="3" sz="quarter"/>
+          </p:nvPr>
+        </p:nvSpPr>
+        <p:spPr/>
+        <p:txBody>
+          <a:bodyPr/>
+          <a:lstStyle/>
+          <a:p/>
+          <a:p/>
+          <a:p>
+            <a:r>
+              <a:t>[Practice — moved to notes, no room on slide]</a:t>
+            </a:r>
+          </a:p>
+          <a:p>
+            <a:r>
+              <a:t>• Pause-and-produce: I ask a yes/no question. Say ใช่ or ไม่ใช่ before I show the answer.</a:t>
+            </a:r>
+          </a:p>
+          <a:p>
+            <a:r>
+              <a:t>• Response-building: I say ขอโทษครับ. What do you say back? Then I say ขอบคุณค่ะ. What do you say back?</a:t>
+            </a:r>
+          </a:p>
+          <a:p>
+            <a:r>
+              <a:t>• Substitution drill: say ใช่ with ครับ, now with ค่ะ. Say ไม่ใช่ with ครับ, now with ค่ะ.</a:t>
+            </a:r>
+          </a:p>
+          <a:p/>
+        </p:txBody>
+      </p:sp>
+      <p:sp>
+        <p:nvSpPr>
+          <p:cNvPr id="4" name="Slide Number Placeholder 3"/>
+          <p:cNvSpPr>
+            <a:spLocks noGrp="1"/>
+          </p:cNvSpPr>
+          <p:nvPr>
+            <p:ph type="sldNum" idx="5" sz="quarter"/>
+          </p:nvPr>
+        </p:nvSpPr>
+        <p:spPr/>
+      </p:sp>
+    </p:spTree>
+  </p:cSld>
+  <p:clrMapOvr>
+    <a:masterClrMapping/>
+  </p:clrMapOvr>
+</p:notes>
+</file>
+
+<file path=ppt/notesSlides/notesSlide5.xml><?xml version="1.0" encoding="utf-8"?>
+<p:notes xmlns:a="http://schemas.openxmlformats.org/drawingml/2006/main" xmlns:p="http://schemas.openxmlformats.org/presentationml/2006/main" xmlns:r="http://schemas.openxmlformats.org/officeDocument/2006/relationships">
+  <p:cSld>
+    <p:spTree>
+      <p:nvGrpSpPr>
+        <p:cNvPr id="1" name=""/>
+        <p:cNvGrpSpPr/>
+        <p:nvPr/>
+      </p:nvGrpSpPr>
+      <p:grpSpPr>
+        <a:xfrm>
+          <a:off x="0" y="0"/>
+          <a:ext cx="0" cy="0"/>
+          <a:chOff x="0" y="0"/>
+          <a:chExt cx="0" cy="0"/>
+        </a:xfrm>
+      </p:grpSpPr>
+      <p:sp>
+        <p:nvSpPr>
+          <p:cNvPr id="2" name="Slide Image Placeholder 1"/>
+          <p:cNvSpPr>
+            <a:spLocks noGrp="1"/>
+          </p:cNvSpPr>
+          <p:nvPr>
+            <p:ph type="sldImg" idx="2"/>
+          </p:nvPr>
+        </p:nvSpPr>
+        <p:spPr/>
+      </p:sp>
+      <p:sp>
+        <p:nvSpPr>
+          <p:cNvPr id="3" name="Notes Placeholder 2"/>
+          <p:cNvSpPr>
+            <a:spLocks noGrp="1"/>
+          </p:cNvSpPr>
+          <p:nvPr>
+            <p:ph type="body" idx="3" sz="quarter"/>
+          </p:nvPr>
+        </p:nvSpPr>
+        <p:spPr/>
+        <p:txBody>
+          <a:bodyPr/>
+          <a:lstStyle/>
+          <a:p/>
+          <a:p/>
+          <a:p>
+            <a:r>
+              <a:t>[Practice — moved to notes, no room on slide]</a:t>
+            </a:r>
+          </a:p>
+          <a:p>
+            <a:r>
+              <a:t>• Tone echo: I say ครับ khráp. Repeat it. Now I say ค่ะ khâ. Repeat it. Can you feel the difference?</a:t>
+            </a:r>
+          </a:p>
+          <a:p>
+            <a:r>
+              <a:t>• Minimal pair choice: I say two words. Which one is ครับ and which is ค่ะ? Point to the answer.</a:t>
+            </a:r>
+          </a:p>
+          <a:p/>
+        </p:txBody>
+      </p:sp>
+      <p:sp>
+        <p:nvSpPr>
+          <p:cNvPr id="4" name="Slide Number Placeholder 3"/>
+          <p:cNvSpPr>
+            <a:spLocks noGrp="1"/>
+          </p:cNvSpPr>
+          <p:nvPr>
+            <p:ph type="sldNum" idx="5" sz="quarter"/>
+          </p:nvPr>
+        </p:nvSpPr>
+        <p:spPr/>
+      </p:sp>
+    </p:spTree>
+  </p:cSld>
+  <p:clrMapOvr>
+    <a:masterClrMapping/>
+  </p:clrMapOvr>
+</p:notes>
 </file>
 
 <file path=ppt/slideLayouts/slideLayout1.xml><?xml version="1.0" encoding="utf-8"?>
@@ -5314,222 +6099,6 @@
           </a:p>
         </p:txBody>
       </p:sp>
-      <p:sp>
-        <p:nvSpPr>
-          <p:cNvPr id="18" name="TextBox 17"/>
-          <p:cNvSpPr txBox="1"/>
-          <p:nvPr/>
-        </p:nvSpPr>
-        <p:spPr>
-          <a:xfrm>
-            <a:off x="932688" y="6876288"/>
-            <a:ext cx="9692640" cy="228600"/>
-          </a:xfrm>
-          <a:prstGeom prst="rect">
-            <a:avLst/>
-          </a:prstGeom>
-          <a:noFill/>
-        </p:spPr>
-        <p:txBody>
-          <a:bodyPr wrap="square" anchor="t">
-            <a:spAutoFit/>
-          </a:bodyPr>
-          <a:lstStyle/>
-          <a:p>
-            <a:pPr algn="l"/>
-            <a:r>
-              <a:rPr sz="1700" b="1" i="0" lang="en-US" altLang="en-US">
-                <a:solidFill>
-                  <a:srgbClr val="C96F4A"/>
-                </a:solidFill>
-                <a:latin typeface="Sarabun"/>
-                <a:ea typeface="Sarabun"/>
-                <a:cs typeface="Sarabun"/>
-              </a:rPr>
-              <a:t>Practice</a:t>
-            </a:r>
-          </a:p>
-        </p:txBody>
-      </p:sp>
-      <p:sp>
-        <p:nvSpPr>
-          <p:cNvPr id="19" name="Oval 18"/>
-          <p:cNvSpPr/>
-          <p:nvPr/>
-        </p:nvSpPr>
-        <p:spPr>
-          <a:xfrm>
-            <a:off x="932688" y="7260336"/>
-            <a:ext cx="82296" cy="82296"/>
-          </a:xfrm>
-          <a:prstGeom prst="ellipse">
-            <a:avLst/>
-          </a:prstGeom>
-          <a:solidFill>
-            <a:srgbClr val="C96F4A"/>
-          </a:solidFill>
-          <a:ln>
-            <a:noFill/>
-          </a:ln>
-        </p:spPr>
-        <p:style>
-          <a:lnRef idx="1">
-            <a:schemeClr val="accent1"/>
-          </a:lnRef>
-          <a:fillRef idx="3">
-            <a:schemeClr val="accent1"/>
-          </a:fillRef>
-          <a:effectRef idx="2">
-            <a:schemeClr val="accent1"/>
-          </a:effectRef>
-          <a:fontRef idx="minor">
-            <a:schemeClr val="lt1"/>
-          </a:fontRef>
-        </p:style>
-        <p:txBody>
-          <a:bodyPr rtlCol="0" anchor="ctr"/>
-          <a:lstStyle/>
-          <a:p>
-            <a:pPr algn="ctr"/>
-          </a:p>
-        </p:txBody>
-      </p:sp>
-      <p:sp>
-        <p:nvSpPr>
-          <p:cNvPr id="20" name="TextBox 19"/>
-          <p:cNvSpPr txBox="1"/>
-          <p:nvPr/>
-        </p:nvSpPr>
-        <p:spPr>
-          <a:xfrm>
-            <a:off x="1078992" y="7168896"/>
-            <a:ext cx="9555480" cy="274320"/>
-          </a:xfrm>
-          <a:prstGeom prst="rect">
-            <a:avLst/>
-          </a:prstGeom>
-          <a:noFill/>
-        </p:spPr>
-        <p:txBody>
-          <a:bodyPr wrap="square" anchor="t">
-            <a:spAutoFit/>
-          </a:bodyPr>
-          <a:lstStyle/>
-          <a:p>
-            <a:pPr algn="l"/>
-            <a:r>
-              <a:rPr sz="1700" b="0" i="0" lang="en-US" altLang="en-US">
-                <a:solidFill>
-                  <a:srgbClr val="24333D"/>
-                </a:solidFill>
-                <a:latin typeface="Sarabun"/>
-                <a:ea typeface="Sarabun"/>
-                <a:cs typeface="Sarabun"/>
-              </a:rPr>
-              <a:t>Listen and repeat three times: </a:t>
-            </a:r>
-            <a:r>
-              <a:rPr sz="1700" b="0" i="0" lang="th-TH" altLang="en-US">
-                <a:solidFill>
-                  <a:srgbClr val="24333D"/>
-                </a:solidFill>
-                <a:latin typeface="Sarabun"/>
-                <a:ea typeface="Sarabun"/>
-                <a:cs typeface="Sarabun"/>
-              </a:rPr>
-              <a:t>สวัสดี</a:t>
-            </a:r>
-            <a:r>
-              <a:rPr sz="1700" b="0" i="1" lang="en-US" altLang="en-US">
-                <a:solidFill>
-                  <a:srgbClr val="566873"/>
-                </a:solidFill>
-                <a:latin typeface="Sarabun"/>
-                <a:ea typeface="Sarabun"/>
-                <a:cs typeface="Sarabun"/>
-              </a:rPr>
-              <a:t> (sà-wàt-dii)</a:t>
-            </a:r>
-            <a:r>
-              <a:rPr sz="1700" b="0" i="0" lang="en-US" altLang="en-US">
-                <a:solidFill>
-                  <a:srgbClr val="24333D"/>
-                </a:solidFill>
-                <a:latin typeface="Sarabun"/>
-                <a:ea typeface="Sarabun"/>
-                <a:cs typeface="Sarabun"/>
-              </a:rPr>
-              <a:t>, </a:t>
-            </a:r>
-            <a:r>
-              <a:rPr sz="1700" b="0" i="0" lang="th-TH" altLang="en-US">
-                <a:solidFill>
-                  <a:srgbClr val="24333D"/>
-                </a:solidFill>
-                <a:latin typeface="Sarabun"/>
-                <a:ea typeface="Sarabun"/>
-                <a:cs typeface="Sarabun"/>
-              </a:rPr>
-              <a:t>สวัสดีครับ</a:t>
-            </a:r>
-            <a:r>
-              <a:rPr sz="1700" b="0" i="1" lang="en-US" altLang="en-US">
-                <a:solidFill>
-                  <a:srgbClr val="566873"/>
-                </a:solidFill>
-                <a:latin typeface="Sarabun"/>
-                <a:ea typeface="Sarabun"/>
-                <a:cs typeface="Sarabun"/>
-              </a:rPr>
-              <a:t> (sà-wàt-dii khráp)</a:t>
-            </a:r>
-            <a:r>
-              <a:rPr sz="1700" b="0" i="0" lang="en-US" altLang="en-US">
-                <a:solidFill>
-                  <a:srgbClr val="24333D"/>
-                </a:solidFill>
-                <a:latin typeface="Sarabun"/>
-                <a:ea typeface="Sarabun"/>
-                <a:cs typeface="Sarabun"/>
-              </a:rPr>
-              <a:t>, </a:t>
-            </a:r>
-            <a:r>
-              <a:rPr sz="1700" b="0" i="0" lang="th-TH" altLang="en-US">
-                <a:solidFill>
-                  <a:srgbClr val="24333D"/>
-                </a:solidFill>
-                <a:latin typeface="Sarabun"/>
-                <a:ea typeface="Sarabun"/>
-                <a:cs typeface="Sarabun"/>
-              </a:rPr>
-              <a:t>สวัสดีค่ะ</a:t>
-            </a:r>
-            <a:r>
-              <a:rPr sz="1700" b="0" i="1" lang="en-US" altLang="en-US">
-                <a:solidFill>
-                  <a:srgbClr val="566873"/>
-                </a:solidFill>
-                <a:latin typeface="Sarabun"/>
-                <a:ea typeface="Sarabun"/>
-                <a:cs typeface="Sarabun"/>
-              </a:rPr>
-              <a:t> (sà-wàt-dii khâ)</a:t>
-            </a:r>
-            <a:r>
-              <a:rPr sz="1700" b="0" i="0" lang="en-US" altLang="en-US">
-                <a:solidFill>
-                  <a:srgbClr val="24333D"/>
-                </a:solidFill>
-                <a:latin typeface="Sarabun"/>
-                <a:ea typeface="Sarabun"/>
-                <a:cs typeface="Sarabun"/>
-              </a:rPr>
-              <a:t>.</a:t>
-            </a:r>
-          </a:p>
-        </p:txBody>
-      </p:sp>
     </p:spTree>
   </p:cSld>
   <p:clrMapOvr>
@@ -6237,189 +6806,6 @@
           </a:p>
         </p:txBody>
       </p:sp>
-      <p:sp>
-        <p:nvSpPr>
-          <p:cNvPr id="18" name="TextBox 17"/>
-          <p:cNvSpPr txBox="1"/>
-          <p:nvPr/>
-        </p:nvSpPr>
-        <p:spPr>
-          <a:xfrm>
-            <a:off x="932688" y="6876288"/>
-            <a:ext cx="9692640" cy="228600"/>
-          </a:xfrm>
-          <a:prstGeom prst="rect">
-            <a:avLst/>
-          </a:prstGeom>
-          <a:noFill/>
-        </p:spPr>
-        <p:txBody>
-          <a:bodyPr wrap="square" anchor="t">
-            <a:spAutoFit/>
-          </a:bodyPr>
-          <a:lstStyle/>
-          <a:p>
-            <a:pPr algn="l"/>
-            <a:r>
-              <a:rPr sz="1700" b="1" i="0" lang="en-US" altLang="en-US">
-                <a:solidFill>
-                  <a:srgbClr val="C96F4A"/>
-                </a:solidFill>
-                <a:latin typeface="Sarabun"/>
-                <a:ea typeface="Sarabun"/>
-                <a:cs typeface="Sarabun"/>
-              </a:rPr>
-              <a:t>Practice</a:t>
-            </a:r>
-          </a:p>
-        </p:txBody>
-      </p:sp>
-      <p:sp>
-        <p:nvSpPr>
-          <p:cNvPr id="19" name="Oval 18"/>
-          <p:cNvSpPr/>
-          <p:nvPr/>
-        </p:nvSpPr>
-        <p:spPr>
-          <a:xfrm>
-            <a:off x="932688" y="7260336"/>
-            <a:ext cx="82296" cy="82296"/>
-          </a:xfrm>
-          <a:prstGeom prst="ellipse">
-            <a:avLst/>
-          </a:prstGeom>
-          <a:solidFill>
-            <a:srgbClr val="C96F4A"/>
-          </a:solidFill>
-          <a:ln>
-            <a:noFill/>
-          </a:ln>
-        </p:spPr>
-        <p:style>
-          <a:lnRef idx="1">
-            <a:schemeClr val="accent1"/>
-          </a:lnRef>
-          <a:fillRef idx="3">
-            <a:schemeClr val="accent1"/>
-          </a:fillRef>
-          <a:effectRef idx="2">
-            <a:schemeClr val="accent1"/>
-          </a:effectRef>
-          <a:fontRef idx="minor">
-            <a:schemeClr val="lt1"/>
-          </a:fontRef>
-        </p:style>
-        <p:txBody>
-          <a:bodyPr rtlCol="0" anchor="ctr"/>
-          <a:lstStyle/>
-          <a:p>
-            <a:pPr algn="ctr"/>
-          </a:p>
-        </p:txBody>
-      </p:sp>
-      <p:sp>
-        <p:nvSpPr>
-          <p:cNvPr id="20" name="TextBox 19"/>
-          <p:cNvSpPr txBox="1"/>
-          <p:nvPr/>
-        </p:nvSpPr>
-        <p:spPr>
-          <a:xfrm>
-            <a:off x="1078992" y="7168896"/>
-            <a:ext cx="9555480" cy="274320"/>
-          </a:xfrm>
-          <a:prstGeom prst="rect">
-            <a:avLst/>
-          </a:prstGeom>
-          <a:noFill/>
-        </p:spPr>
-        <p:txBody>
-          <a:bodyPr wrap="square" anchor="t">
-            <a:spAutoFit/>
-          </a:bodyPr>
-          <a:lstStyle/>
-          <a:p>
-            <a:pPr algn="l"/>
-            <a:r>
-              <a:rPr sz="1700" b="0" i="0" lang="en-US" altLang="en-US">
-                <a:solidFill>
-                  <a:srgbClr val="24333D"/>
-                </a:solidFill>
-                <a:latin typeface="Sarabun"/>
-                <a:ea typeface="Sarabun"/>
-                <a:cs typeface="Sarabun"/>
-              </a:rPr>
-              <a:t>Discrimination drill: I describe a situation. Choose </a:t>
-            </a:r>
-            <a:r>
-              <a:rPr sz="1700" b="0" i="0" lang="th-TH" altLang="en-US">
-                <a:solidFill>
-                  <a:srgbClr val="24333D"/>
-                </a:solidFill>
-                <a:latin typeface="Sarabun"/>
-                <a:ea typeface="Sarabun"/>
-                <a:cs typeface="Sarabun"/>
-              </a:rPr>
-              <a:t>ขอบคุณ</a:t>
-            </a:r>
-            <a:r>
-              <a:rPr sz="1700" b="0" i="1" lang="en-US" altLang="en-US">
-                <a:solidFill>
-                  <a:srgbClr val="566873"/>
-                </a:solidFill>
-                <a:latin typeface="Sarabun"/>
-                <a:ea typeface="Sarabun"/>
-                <a:cs typeface="Sarabun"/>
-              </a:rPr>
-              <a:t> (khàawp-khun)</a:t>
-            </a:r>
-            <a:r>
-              <a:rPr sz="1700" b="0" i="0" lang="en-US" altLang="en-US">
-                <a:solidFill>
-                  <a:srgbClr val="24333D"/>
-                </a:solidFill>
-                <a:latin typeface="Sarabun"/>
-                <a:ea typeface="Sarabun"/>
-                <a:cs typeface="Sarabun"/>
-              </a:rPr>
-              <a:t> or </a:t>
-            </a:r>
-            <a:r>
-              <a:rPr sz="1700" b="0" i="0" lang="th-TH" altLang="en-US">
-                <a:solidFill>
-                  <a:srgbClr val="24333D"/>
-                </a:solidFill>
-                <a:latin typeface="Sarabun"/>
-                <a:ea typeface="Sarabun"/>
-                <a:cs typeface="Sarabun"/>
-              </a:rPr>
-              <a:t>ขอโทษ</a:t>
-            </a:r>
-            <a:r>
-              <a:rPr sz="1700" b="0" i="1" lang="en-US" altLang="en-US">
-                <a:solidFill>
-                  <a:srgbClr val="566873"/>
-                </a:solidFill>
-                <a:latin typeface="Sarabun"/>
-                <a:ea typeface="Sarabun"/>
-                <a:cs typeface="Sarabun"/>
-              </a:rPr>
-              <a:t> (khǎaw-thôot)</a:t>
-            </a:r>
-            <a:r>
-              <a:rPr sz="1700" b="0" i="0" lang="en-US" altLang="en-US">
-                <a:solidFill>
-                  <a:srgbClr val="24333D"/>
-                </a:solidFill>
-                <a:latin typeface="Sarabun"/>
-                <a:ea typeface="Sarabun"/>
-                <a:cs typeface="Sarabun"/>
-              </a:rPr>
-              <a:t> — which one fits? Say it aloud.</a:t>
-            </a:r>
-          </a:p>
-        </p:txBody>
-      </p:sp>
     </p:spTree>
   </p:cSld>
   <p:clrMapOvr>
@@ -7127,222 +7513,6 @@
           </a:p>
         </p:txBody>
       </p:sp>
-      <p:sp>
-        <p:nvSpPr>
-          <p:cNvPr id="18" name="TextBox 17"/>
-          <p:cNvSpPr txBox="1"/>
-          <p:nvPr/>
-        </p:nvSpPr>
-        <p:spPr>
-          <a:xfrm>
-            <a:off x="932688" y="6876288"/>
-            <a:ext cx="9692640" cy="228600"/>
-          </a:xfrm>
-          <a:prstGeom prst="rect">
-            <a:avLst/>
-          </a:prstGeom>
-          <a:noFill/>
-        </p:spPr>
-        <p:txBody>
-          <a:bodyPr wrap="square" anchor="t">
-            <a:spAutoFit/>
-          </a:bodyPr>
-          <a:lstStyle/>
-          <a:p>
-            <a:pPr algn="l"/>
-            <a:r>
-              <a:rPr sz="1700" b="1" i="0" lang="en-US" altLang="en-US">
-                <a:solidFill>
-                  <a:srgbClr val="C96F4A"/>
-                </a:solidFill>
-                <a:latin typeface="Sarabun"/>
-                <a:ea typeface="Sarabun"/>
-                <a:cs typeface="Sarabun"/>
-              </a:rPr>
-              <a:t>Practice</a:t>
-            </a:r>
-          </a:p>
-        </p:txBody>
-      </p:sp>
-      <p:sp>
-        <p:nvSpPr>
-          <p:cNvPr id="19" name="Oval 18"/>
-          <p:cNvSpPr/>
-          <p:nvPr/>
-        </p:nvSpPr>
-        <p:spPr>
-          <a:xfrm>
-            <a:off x="932688" y="7260336"/>
-            <a:ext cx="82296" cy="82296"/>
-          </a:xfrm>
-          <a:prstGeom prst="ellipse">
-            <a:avLst/>
-          </a:prstGeom>
-          <a:solidFill>
-            <a:srgbClr val="C96F4A"/>
-          </a:solidFill>
-          <a:ln>
-            <a:noFill/>
-          </a:ln>
-        </p:spPr>
-        <p:style>
-          <a:lnRef idx="1">
-            <a:schemeClr val="accent1"/>
-          </a:lnRef>
-          <a:fillRef idx="3">
-            <a:schemeClr val="accent1"/>
-          </a:fillRef>
-          <a:effectRef idx="2">
-            <a:schemeClr val="accent1"/>
-          </a:effectRef>
-          <a:fontRef idx="minor">
-            <a:schemeClr val="lt1"/>
-          </a:fontRef>
-        </p:style>
-        <p:txBody>
-          <a:bodyPr rtlCol="0" anchor="ctr"/>
-          <a:lstStyle/>
-          <a:p>
-            <a:pPr algn="ctr"/>
-          </a:p>
-        </p:txBody>
-      </p:sp>
-      <p:sp>
-        <p:nvSpPr>
-          <p:cNvPr id="20" name="TextBox 19"/>
-          <p:cNvSpPr txBox="1"/>
-          <p:nvPr/>
-        </p:nvSpPr>
-        <p:spPr>
-          <a:xfrm>
-            <a:off x="1078992" y="7168896"/>
-            <a:ext cx="9555480" cy="274320"/>
-          </a:xfrm>
-          <a:prstGeom prst="rect">
-            <a:avLst/>
-          </a:prstGeom>
-          <a:noFill/>
-        </p:spPr>
-        <p:txBody>
-          <a:bodyPr wrap="square" anchor="t">
-            <a:spAutoFit/>
-          </a:bodyPr>
-          <a:lstStyle/>
-          <a:p>
-            <a:pPr algn="l"/>
-            <a:r>
-              <a:rPr sz="1700" b="0" i="0" lang="en-US" altLang="en-US">
-                <a:solidFill>
-                  <a:srgbClr val="24333D"/>
-                </a:solidFill>
-                <a:latin typeface="Sarabun"/>
-                <a:ea typeface="Sarabun"/>
-                <a:cs typeface="Sarabun"/>
-              </a:rPr>
-              <a:t>Substitution drill: I say a bare phrase. You add the correct polite ending. </a:t>
-            </a:r>
-            <a:r>
-              <a:rPr sz="1700" b="0" i="0" lang="th-TH" altLang="en-US">
-                <a:solidFill>
-                  <a:srgbClr val="24333D"/>
-                </a:solidFill>
-                <a:latin typeface="Sarabun"/>
-                <a:ea typeface="Sarabun"/>
-                <a:cs typeface="Sarabun"/>
-              </a:rPr>
-              <a:t>สวัสดี</a:t>
-            </a:r>
-            <a:r>
-              <a:rPr sz="1700" b="0" i="1" lang="en-US" altLang="en-US">
-                <a:solidFill>
-                  <a:srgbClr val="566873"/>
-                </a:solidFill>
-                <a:latin typeface="Sarabun"/>
-                <a:ea typeface="Sarabun"/>
-                <a:cs typeface="Sarabun"/>
-              </a:rPr>
-              <a:t> (sà-wàt-dii)</a:t>
-            </a:r>
-            <a:r>
-              <a:rPr sz="1700" b="0" i="0" lang="en-US" altLang="en-US">
-                <a:solidFill>
-                  <a:srgbClr val="24333D"/>
-                </a:solidFill>
-                <a:latin typeface="Sarabun"/>
-                <a:ea typeface="Sarabun"/>
-                <a:cs typeface="Sarabun"/>
-              </a:rPr>
-              <a:t> — your turn. </a:t>
-            </a:r>
-            <a:r>
-              <a:rPr sz="1700" b="0" i="0" lang="th-TH" altLang="en-US">
-                <a:solidFill>
-                  <a:srgbClr val="24333D"/>
-                </a:solidFill>
-                <a:latin typeface="Sarabun"/>
-                <a:ea typeface="Sarabun"/>
-                <a:cs typeface="Sarabun"/>
-              </a:rPr>
-              <a:t>ขอบคุณ</a:t>
-            </a:r>
-            <a:r>
-              <a:rPr sz="1700" b="0" i="1" lang="en-US" altLang="en-US">
-                <a:solidFill>
-                  <a:srgbClr val="566873"/>
-                </a:solidFill>
-                <a:latin typeface="Sarabun"/>
-                <a:ea typeface="Sarabun"/>
-                <a:cs typeface="Sarabun"/>
-              </a:rPr>
-              <a:t> (khàawp-khun)</a:t>
-            </a:r>
-            <a:r>
-              <a:rPr sz="1700" b="0" i="0" lang="en-US" altLang="en-US">
-                <a:solidFill>
-                  <a:srgbClr val="24333D"/>
-                </a:solidFill>
-                <a:latin typeface="Sarabun"/>
-                <a:ea typeface="Sarabun"/>
-                <a:cs typeface="Sarabun"/>
-              </a:rPr>
-              <a:t> — your turn. </a:t>
-            </a:r>
-            <a:r>
-              <a:rPr sz="1700" b="0" i="0" lang="th-TH" altLang="en-US">
-                <a:solidFill>
-                  <a:srgbClr val="24333D"/>
-                </a:solidFill>
-                <a:latin typeface="Sarabun"/>
-                <a:ea typeface="Sarabun"/>
-                <a:cs typeface="Sarabun"/>
-              </a:rPr>
-              <a:t>ขอโทษ</a:t>
-            </a:r>
-            <a:r>
-              <a:rPr sz="1700" b="0" i="1" lang="en-US" altLang="en-US">
-                <a:solidFill>
-                  <a:srgbClr val="566873"/>
-                </a:solidFill>
-                <a:latin typeface="Sarabun"/>
-                <a:ea typeface="Sarabun"/>
-                <a:cs typeface="Sarabun"/>
-              </a:rPr>
-              <a:t> (khǎaw-thôot)</a:t>
-            </a:r>
-            <a:r>
-              <a:rPr sz="1700" b="0" i="0" lang="en-US" altLang="en-US">
-                <a:solidFill>
-                  <a:srgbClr val="24333D"/>
-                </a:solidFill>
-                <a:latin typeface="Sarabun"/>
-                <a:ea typeface="Sarabun"/>
-                <a:cs typeface="Sarabun"/>
-              </a:rPr>
-              <a:t> — your turn.</a:t>
-            </a:r>
-          </a:p>
-        </p:txBody>
-      </p:sp>
     </p:spTree>
   </p:cSld>
   <p:clrMapOvr>
@@ -8050,189 +8220,6 @@
           </a:p>
         </p:txBody>
       </p:sp>
-      <p:sp>
-        <p:nvSpPr>
-          <p:cNvPr id="18" name="TextBox 17"/>
-          <p:cNvSpPr txBox="1"/>
-          <p:nvPr/>
-        </p:nvSpPr>
-        <p:spPr>
-          <a:xfrm>
-            <a:off x="932688" y="6876288"/>
-            <a:ext cx="9692640" cy="228600"/>
-          </a:xfrm>
-          <a:prstGeom prst="rect">
-            <a:avLst/>
-          </a:prstGeom>
-          <a:noFill/>
-        </p:spPr>
-        <p:txBody>
-          <a:bodyPr wrap="square" anchor="t">
-            <a:spAutoFit/>
-          </a:bodyPr>
-          <a:lstStyle/>
-          <a:p>
-            <a:pPr algn="l"/>
-            <a:r>
-              <a:rPr sz="1700" b="1" i="0" lang="en-US" altLang="en-US">
-                <a:solidFill>
-                  <a:srgbClr val="C96F4A"/>
-                </a:solidFill>
-                <a:latin typeface="Sarabun"/>
-                <a:ea typeface="Sarabun"/>
-                <a:cs typeface="Sarabun"/>
-              </a:rPr>
-              <a:t>Practice</a:t>
-            </a:r>
-          </a:p>
-        </p:txBody>
-      </p:sp>
-      <p:sp>
-        <p:nvSpPr>
-          <p:cNvPr id="19" name="Oval 18"/>
-          <p:cNvSpPr/>
-          <p:nvPr/>
-        </p:nvSpPr>
-        <p:spPr>
-          <a:xfrm>
-            <a:off x="932688" y="7260336"/>
-            <a:ext cx="82296" cy="82296"/>
-          </a:xfrm>
-          <a:prstGeom prst="ellipse">
-            <a:avLst/>
-          </a:prstGeom>
-          <a:solidFill>
-            <a:srgbClr val="C96F4A"/>
-          </a:solidFill>
-          <a:ln>
-            <a:noFill/>
-          </a:ln>
-        </p:spPr>
-        <p:style>
-          <a:lnRef idx="1">
-            <a:schemeClr val="accent1"/>
-          </a:lnRef>
-          <a:fillRef idx="3">
-            <a:schemeClr val="accent1"/>
-          </a:fillRef>
-          <a:effectRef idx="2">
-            <a:schemeClr val="accent1"/>
-          </a:effectRef>
-          <a:fontRef idx="minor">
-            <a:schemeClr val="lt1"/>
-          </a:fontRef>
-        </p:style>
-        <p:txBody>
-          <a:bodyPr rtlCol="0" anchor="ctr"/>
-          <a:lstStyle/>
-          <a:p>
-            <a:pPr algn="ctr"/>
-          </a:p>
-        </p:txBody>
-      </p:sp>
-      <p:sp>
-        <p:nvSpPr>
-          <p:cNvPr id="20" name="TextBox 19"/>
-          <p:cNvSpPr txBox="1"/>
-          <p:nvPr/>
-        </p:nvSpPr>
-        <p:spPr>
-          <a:xfrm>
-            <a:off x="1078992" y="7168896"/>
-            <a:ext cx="9555480" cy="274320"/>
-          </a:xfrm>
-          <a:prstGeom prst="rect">
-            <a:avLst/>
-          </a:prstGeom>
-          <a:noFill/>
-        </p:spPr>
-        <p:txBody>
-          <a:bodyPr wrap="square" anchor="t">
-            <a:spAutoFit/>
-          </a:bodyPr>
-          <a:lstStyle/>
-          <a:p>
-            <a:pPr algn="l"/>
-            <a:r>
-              <a:rPr sz="1700" b="0" i="0" lang="en-US" altLang="en-US">
-                <a:solidFill>
-                  <a:srgbClr val="24333D"/>
-                </a:solidFill>
-                <a:latin typeface="Sarabun"/>
-                <a:ea typeface="Sarabun"/>
-                <a:cs typeface="Sarabun"/>
-              </a:rPr>
-              <a:t>Pause-and-produce: I ask a yes/no question. Say </a:t>
-            </a:r>
-            <a:r>
-              <a:rPr sz="1700" b="0" i="0" lang="th-TH" altLang="en-US">
-                <a:solidFill>
-                  <a:srgbClr val="24333D"/>
-                </a:solidFill>
-                <a:latin typeface="Sarabun"/>
-                <a:ea typeface="Sarabun"/>
-                <a:cs typeface="Sarabun"/>
-              </a:rPr>
-              <a:t>ใช่</a:t>
-            </a:r>
-            <a:r>
-              <a:rPr sz="1700" b="0" i="1" lang="en-US" altLang="en-US">
-                <a:solidFill>
-                  <a:srgbClr val="566873"/>
-                </a:solidFill>
-                <a:latin typeface="Sarabun"/>
-                <a:ea typeface="Sarabun"/>
-                <a:cs typeface="Sarabun"/>
-              </a:rPr>
-              <a:t> (châi)</a:t>
-            </a:r>
-            <a:r>
-              <a:rPr sz="1700" b="0" i="0" lang="en-US" altLang="en-US">
-                <a:solidFill>
-                  <a:srgbClr val="24333D"/>
-                </a:solidFill>
-                <a:latin typeface="Sarabun"/>
-                <a:ea typeface="Sarabun"/>
-                <a:cs typeface="Sarabun"/>
-              </a:rPr>
-              <a:t> or </a:t>
-            </a:r>
-            <a:r>
-              <a:rPr sz="1700" b="0" i="0" lang="th-TH" altLang="en-US">
-                <a:solidFill>
-                  <a:srgbClr val="24333D"/>
-                </a:solidFill>
-                <a:latin typeface="Sarabun"/>
-                <a:ea typeface="Sarabun"/>
-                <a:cs typeface="Sarabun"/>
-              </a:rPr>
-              <a:t>ไม่ใช่</a:t>
-            </a:r>
-            <a:r>
-              <a:rPr sz="1700" b="0" i="1" lang="en-US" altLang="en-US">
-                <a:solidFill>
-                  <a:srgbClr val="566873"/>
-                </a:solidFill>
-                <a:latin typeface="Sarabun"/>
-                <a:ea typeface="Sarabun"/>
-                <a:cs typeface="Sarabun"/>
-              </a:rPr>
-              <a:t> (mâi châi)</a:t>
-            </a:r>
-            <a:r>
-              <a:rPr sz="1700" b="0" i="0" lang="en-US" altLang="en-US">
-                <a:solidFill>
-                  <a:srgbClr val="24333D"/>
-                </a:solidFill>
-                <a:latin typeface="Sarabun"/>
-                <a:ea typeface="Sarabun"/>
-                <a:cs typeface="Sarabun"/>
-              </a:rPr>
-              <a:t> before I show the answer.</a:t>
-            </a:r>
-          </a:p>
-        </p:txBody>
-      </p:sp>
     </p:spTree>
   </p:cSld>
   <p:clrMapOvr>
@@ -8936,189 +8923,6 @@
                 <a:cs typeface="Sarabun"/>
               </a:rPr>
               <a:t>low tone on khàawp — voice stays low</a:t>
-            </a:r>
-          </a:p>
-        </p:txBody>
-      </p:sp>
-      <p:sp>
-        <p:nvSpPr>
-          <p:cNvPr id="18" name="TextBox 17"/>
-          <p:cNvSpPr txBox="1"/>
-          <p:nvPr/>
-        </p:nvSpPr>
-        <p:spPr>
-          <a:xfrm>
-            <a:off x="932688" y="6876288"/>
-            <a:ext cx="9692640" cy="228600"/>
-          </a:xfrm>
-          <a:prstGeom prst="rect">
-            <a:avLst/>
-          </a:prstGeom>
-          <a:noFill/>
-        </p:spPr>
-        <p:txBody>
-          <a:bodyPr wrap="square" anchor="t">
-            <a:spAutoFit/>
-          </a:bodyPr>
-          <a:lstStyle/>
-          <a:p>
-            <a:pPr algn="l"/>
-            <a:r>
-              <a:rPr sz="1700" b="1" i="0" lang="en-US" altLang="en-US">
-                <a:solidFill>
-                  <a:srgbClr val="C96F4A"/>
-                </a:solidFill>
-                <a:latin typeface="Sarabun"/>
-                <a:ea typeface="Sarabun"/>
-                <a:cs typeface="Sarabun"/>
-              </a:rPr>
-              <a:t>Practice</a:t>
-            </a:r>
-          </a:p>
-        </p:txBody>
-      </p:sp>
-      <p:sp>
-        <p:nvSpPr>
-          <p:cNvPr id="19" name="Oval 18"/>
-          <p:cNvSpPr/>
-          <p:nvPr/>
-        </p:nvSpPr>
-        <p:spPr>
-          <a:xfrm>
-            <a:off x="932688" y="7260336"/>
-            <a:ext cx="82296" cy="82296"/>
-          </a:xfrm>
-          <a:prstGeom prst="ellipse">
-            <a:avLst/>
-          </a:prstGeom>
-          <a:solidFill>
-            <a:srgbClr val="C96F4A"/>
-          </a:solidFill>
-          <a:ln>
-            <a:noFill/>
-          </a:ln>
-        </p:spPr>
-        <p:style>
-          <a:lnRef idx="1">
-            <a:schemeClr val="accent1"/>
-          </a:lnRef>
-          <a:fillRef idx="3">
-            <a:schemeClr val="accent1"/>
-          </a:fillRef>
-          <a:effectRef idx="2">
-            <a:schemeClr val="accent1"/>
-          </a:effectRef>
-          <a:fontRef idx="minor">
-            <a:schemeClr val="lt1"/>
-          </a:fontRef>
-        </p:style>
-        <p:txBody>
-          <a:bodyPr rtlCol="0" anchor="ctr"/>
-          <a:lstStyle/>
-          <a:p>
-            <a:pPr algn="ctr"/>
-          </a:p>
-        </p:txBody>
-      </p:sp>
-      <p:sp>
-        <p:nvSpPr>
-          <p:cNvPr id="20" name="TextBox 19"/>
-          <p:cNvSpPr txBox="1"/>
-          <p:nvPr/>
-        </p:nvSpPr>
-        <p:spPr>
-          <a:xfrm>
-            <a:off x="1078992" y="7168896"/>
-            <a:ext cx="9555480" cy="274320"/>
-          </a:xfrm>
-          <a:prstGeom prst="rect">
-            <a:avLst/>
-          </a:prstGeom>
-          <a:noFill/>
-        </p:spPr>
-        <p:txBody>
-          <a:bodyPr wrap="square" anchor="t">
-            <a:spAutoFit/>
-          </a:bodyPr>
-          <a:lstStyle/>
-          <a:p>
-            <a:pPr algn="l"/>
-            <a:r>
-              <a:rPr sz="1700" b="0" i="0" lang="en-US" altLang="en-US">
-                <a:solidFill>
-                  <a:srgbClr val="24333D"/>
-                </a:solidFill>
-                <a:latin typeface="Sarabun"/>
-                <a:ea typeface="Sarabun"/>
-                <a:cs typeface="Sarabun"/>
-              </a:rPr>
-              <a:t>Tone echo: I say </a:t>
-            </a:r>
-            <a:r>
-              <a:rPr sz="1700" b="0" i="0" lang="th-TH" altLang="en-US">
-                <a:solidFill>
-                  <a:srgbClr val="24333D"/>
-                </a:solidFill>
-                <a:latin typeface="Sarabun"/>
-                <a:ea typeface="Sarabun"/>
-                <a:cs typeface="Sarabun"/>
-              </a:rPr>
-              <a:t>ครับ</a:t>
-            </a:r>
-            <a:r>
-              <a:rPr sz="1700" b="0" i="1" lang="en-US" altLang="en-US">
-                <a:solidFill>
-                  <a:srgbClr val="566873"/>
-                </a:solidFill>
-                <a:latin typeface="Sarabun"/>
-                <a:ea typeface="Sarabun"/>
-                <a:cs typeface="Sarabun"/>
-              </a:rPr>
-              <a:t> (khráp)</a:t>
-            </a:r>
-            <a:r>
-              <a:rPr sz="1700" b="0" i="0" lang="en-US" altLang="en-US">
-                <a:solidFill>
-                  <a:srgbClr val="24333D"/>
-                </a:solidFill>
-                <a:latin typeface="Sarabun"/>
-                <a:ea typeface="Sarabun"/>
-                <a:cs typeface="Sarabun"/>
-              </a:rPr>
-              <a:t> khráp. Repeat it. Now I say </a:t>
-            </a:r>
-            <a:r>
-              <a:rPr sz="1700" b="0" i="0" lang="th-TH" altLang="en-US">
-                <a:solidFill>
-                  <a:srgbClr val="24333D"/>
-                </a:solidFill>
-                <a:latin typeface="Sarabun"/>
-                <a:ea typeface="Sarabun"/>
-                <a:cs typeface="Sarabun"/>
-              </a:rPr>
-              <a:t>ค่ะ</a:t>
-            </a:r>
-            <a:r>
-              <a:rPr sz="1700" b="0" i="1" lang="en-US" altLang="en-US">
-                <a:solidFill>
-                  <a:srgbClr val="566873"/>
-                </a:solidFill>
-                <a:latin typeface="Sarabun"/>
-                <a:ea typeface="Sarabun"/>
-                <a:cs typeface="Sarabun"/>
-              </a:rPr>
-              <a:t> (khâ)</a:t>
-            </a:r>
-            <a:r>
-              <a:rPr sz="1700" b="0" i="0" lang="en-US" altLang="en-US">
-                <a:solidFill>
-                  <a:srgbClr val="24333D"/>
-                </a:solidFill>
-                <a:latin typeface="Sarabun"/>
-                <a:ea typeface="Sarabun"/>
-                <a:cs typeface="Sarabun"/>
-              </a:rPr>
-              <a:t> khâ. Repeat it. Can you feel the difference?</a:t>
             </a:r>
           </a:p>
         </p:txBody>
@@ -11579,4 +11383,324 @@
   </ns0:objectDefaults>
   <ns0:extraClrSchemeLst/>
 </ns0:theme>
+</file>
+
+<file path=ppt/theme/theme2.xml><?xml version="1.0" encoding="utf-8"?>
+<a:theme xmlns:a="http://schemas.openxmlformats.org/drawingml/2006/main" name="Office Theme">
+  <a:themeElements>
+    <a:clrScheme name="Office">
+      <a:dk1>
+        <a:sysClr val="windowText" lastClr="000000"/>
+      </a:dk1>
+      <a:lt1>
+        <a:sysClr val="window" lastClr="FFFFFF"/>
+      </a:lt1>
+      <a:dk2>
+        <a:srgbClr val="1F497D"/>
+      </a:dk2>
+      <a:lt2>
+        <a:srgbClr val="EEECE1"/>
+      </a:lt2>
+      <a:accent1>
+        <a:srgbClr val="4F81BD"/>
+      </a:accent1>
+      <a:accent2>
+        <a:srgbClr val="C0504D"/>
+      </a:accent2>
+      <a:accent3>
+        <a:srgbClr val="9BBB59"/>
+      </a:accent3>
+      <a:accent4>
+        <a:srgbClr val="8064A2"/>
+      </a:accent4>
+      <a:accent5>
+        <a:srgbClr val="4BACC6"/>
+      </a:accent5>
+      <a:accent6>
+        <a:srgbClr val="F79646"/>
+      </a:accent6>
+      <a:hlink>
+        <a:srgbClr val="0000FF"/>
+      </a:hlink>
+      <a:folHlink>
+        <a:srgbClr val="800080"/>
+      </a:folHlink>
+    </a:clrScheme>
+    <a:fontScheme name="Office">
+      <a:majorFont>
+        <a:latin typeface="Calibri"/>
+        <a:ea typeface=""/>
+        <a:cs typeface=""/>
+        <a:font script="Jpan" typeface="ＭＳ Ｐゴシック"/>
+        <a:font script="Hang" typeface="맑은 고딕"/>
+        <a:font script="Hans" typeface="宋体"/>
+        <a:font script="Hant" typeface="新細明體"/>
+        <a:font script="Arab" typeface="Times New Roman"/>
+        <a:font script="Hebr" typeface="Times New Roman"/>
+        <a:font script="Thai" typeface="Angsana New"/>
+        <a:font script="Ethi" typeface="Nyala"/>
+        <a:font script="Beng" typeface="Vrinda"/>
+        <a:font script="Gujr" typeface="Shruti"/>
+        <a:font script="Khmr" typeface="MoolBoran"/>
+        <a:font script="Knda" typeface="Tunga"/>
+        <a:font script="Guru" typeface="Raavi"/>
+        <a:font script="Cans" typeface="Euphemia"/>
+        <a:font script="Cher" typeface="Plantagenet Cherokee"/>
+        <a:font script="Yiii" typeface="Microsoft Yi Baiti"/>
+        <a:font script="Tibt" typeface="Microsoft Himalaya"/>
+        <a:font script="Thaa" typeface="MV Boli"/>
+        <a:font script="Deva" typeface="Mangal"/>
+        <a:font script="Telu" typeface="Gautami"/>
+        <a:font script="Taml" typeface="Latha"/>
+        <a:font script="Syrc" typeface="Estrangelo Edessa"/>
+        <a:font script="Orya" typeface="Kalinga"/>
+        <a:font script="Mlym" typeface="Kartika"/>
+        <a:font script="Laoo" typeface="DokChampa"/>
+        <a:font script="Sinh" typeface="Iskoola Pota"/>
+        <a:font script="Mong" typeface="Mongolian Baiti"/>
+        <a:font script="Viet" typeface="Times New Roman"/>
+        <a:font script="Uigh" typeface="Microsoft Uighur"/>
+        <a:font script="Geor" typeface="Sylfaen"/>
+      </a:majorFont>
+      <a:minorFont>
+        <a:latin typeface="Calibri"/>
+        <a:ea typeface=""/>
+        <a:cs typeface=""/>
+        <a:font script="Jpan" typeface="ＭＳ Ｐゴシック"/>
+        <a:font script="Hang" typeface="맑은 고딕"/>
+        <a:font script="Hans" typeface="宋体"/>
+        <a:font script="Hant" typeface="新細明體"/>
+        <a:font script="Arab" typeface="Arial"/>
+        <a:font script="Hebr" typeface="Arial"/>
+        <a:font script="Thai" typeface="Cordia New"/>
+        <a:font script="Ethi" typeface="Nyala"/>
+        <a:font script="Beng" typeface="Vrinda"/>
+        <a:font script="Gujr" typeface="Shruti"/>
+        <a:font script="Khmr" typeface="DaunPenh"/>
+        <a:font script="Knda" typeface="Tunga"/>
+        <a:font script="Guru" typeface="Raavi"/>
+        <a:font script="Cans" typeface="Euphemia"/>
+        <a:font script="Cher" typeface="Plantagenet Cherokee"/>
+        <a:font script="Yiii" typeface="Microsoft Yi Baiti"/>
+        <a:font script="Tibt" typeface="Microsoft Himalaya"/>
+        <a:font script="Thaa" typeface="MV Boli"/>
+        <a:font script="Deva" typeface="Mangal"/>
+        <a:font script="Telu" typeface="Gautami"/>
+        <a:font script="Taml" typeface="Latha"/>
+        <a:font script="Syrc" typeface="Estrangelo Edessa"/>
+        <a:font script="Orya" typeface="Kalinga"/>
+        <a:font script="Mlym" typeface="Kartika"/>
+        <a:font script="Laoo" typeface="DokChampa"/>
+        <a:font script="Sinh" typeface="Iskoola Pota"/>
+        <a:font script="Mong" typeface="Mongolian Baiti"/>
+        <a:font script="Viet" typeface="Arial"/>
+        <a:font script="Uigh" typeface="Microsoft Uighur"/>
+        <a:font script="Geor" typeface="Sylfaen"/>
+      </a:minorFont>
+    </a:fontScheme>
+    <a:fmtScheme name="Office">
+      <a:fillStyleLst>
+        <a:solidFill>
+          <a:schemeClr val="phClr"/>
+        </a:solidFill>
+        <a:gradFill rotWithShape="1">
+          <a:gsLst>
+            <a:gs pos="0">
+              <a:schemeClr val="phClr">
+                <a:tint val="50000"/>
+                <a:satMod val="300000"/>
+              </a:schemeClr>
+            </a:gs>
+            <a:gs pos="35000">
+              <a:schemeClr val="phClr">
+                <a:tint val="37000"/>
+                <a:satMod val="300000"/>
+              </a:schemeClr>
+            </a:gs>
+            <a:gs pos="100000">
+              <a:schemeClr val="phClr">
+                <a:tint val="15000"/>
+                <a:satMod val="350000"/>
+              </a:schemeClr>
+            </a:gs>
+          </a:gsLst>
+          <a:lin ang="16200000" scaled="1"/>
+        </a:gradFill>
+        <a:gradFill rotWithShape="1">
+          <a:gsLst>
+            <a:gs pos="0">
+              <a:schemeClr val="phClr">
+                <a:tint val="100000"/>
+                <a:shade val="100000"/>
+                <a:satMod val="130000"/>
+              </a:schemeClr>
+            </a:gs>
+            <a:gs pos="100000">
+              <a:schemeClr val="phClr">
+                <a:tint val="50000"/>
+                <a:shade val="100000"/>
+                <a:satMod val="350000"/>
+              </a:schemeClr>
+            </a:gs>
+          </a:gsLst>
+          <a:lin ang="16200000" scaled="0"/>
+        </a:gradFill>
+      </a:fillStyleLst>
+      <a:lnStyleLst>
+        <a:ln w="9525" cap="flat" cmpd="sng" algn="ctr">
+          <a:solidFill>
+            <a:schemeClr val="phClr">
+              <a:shade val="95000"/>
+              <a:satMod val="105000"/>
+            </a:schemeClr>
+          </a:solidFill>
+          <a:prstDash val="solid"/>
+        </a:ln>
+        <a:ln w="25400" cap="flat" cmpd="sng" algn="ctr">
+          <a:solidFill>
+            <a:schemeClr val="phClr"/>
+          </a:solidFill>
+          <a:prstDash val="solid"/>
+        </a:ln>
+        <a:ln w="38100" cap="flat" cmpd="sng" algn="ctr">
+          <a:solidFill>
+            <a:schemeClr val="phClr"/>
+          </a:solidFill>
+          <a:prstDash val="solid"/>
+        </a:ln>
+      </a:lnStyleLst>
+      <a:effectStyleLst>
+        <a:effectStyle>
+          <a:effectLst>
+            <a:outerShdw blurRad="40000" dist="20000" dir="5400000" rotWithShape="0">
+              <a:srgbClr val="000000">
+                <a:alpha val="38000"/>
+              </a:srgbClr>
+            </a:outerShdw>
+          </a:effectLst>
+        </a:effectStyle>
+        <a:effectStyle>
+          <a:effectLst>
+            <a:outerShdw blurRad="40000" dist="23000" dir="5400000" rotWithShape="0">
+              <a:srgbClr val="000000">
+                <a:alpha val="35000"/>
+              </a:srgbClr>
+            </a:outerShdw>
+          </a:effectLst>
+        </a:effectStyle>
+        <a:effectStyle>
+          <a:effectLst>
+            <a:outerShdw blurRad="40000" dist="23000" dir="5400000" rotWithShape="0">
+              <a:srgbClr val="000000">
+                <a:alpha val="35000"/>
+              </a:srgbClr>
+            </a:outerShdw>
+          </a:effectLst>
+          <a:scene3d>
+            <a:camera prst="orthographicFront">
+              <a:rot lat="0" lon="0" rev="0"/>
+            </a:camera>
+            <a:lightRig rig="threePt" dir="t">
+              <a:rot lat="0" lon="0" rev="1200000"/>
+            </a:lightRig>
+          </a:scene3d>
+          <a:sp3d>
+            <a:bevelT w="63500" h="25400"/>
+          </a:sp3d>
+        </a:effectStyle>
+      </a:effectStyleLst>
+      <a:bgFillStyleLst>
+        <a:solidFill>
+          <a:schemeClr val="phClr"/>
+        </a:solidFill>
+        <a:gradFill rotWithShape="1">
+          <a:gsLst>
+            <a:gs pos="0">
+              <a:schemeClr val="phClr">
+                <a:tint val="40000"/>
+                <a:satMod val="350000"/>
+              </a:schemeClr>
+            </a:gs>
+            <a:gs pos="40000">
+              <a:schemeClr val="phClr">
+                <a:tint val="45000"/>
+                <a:shade val="99000"/>
+                <a:satMod val="350000"/>
+              </a:schemeClr>
+            </a:gs>
+            <a:gs pos="100000">
+              <a:schemeClr val="phClr">
+                <a:shade val="20000"/>
+                <a:satMod val="255000"/>
+              </a:schemeClr>
+            </a:gs>
+          </a:gsLst>
+          <a:path path="circle">
+            <a:fillToRect l="50000" t="-80000" r="50000" b="180000"/>
+          </a:path>
+        </a:gradFill>
+        <a:gradFill rotWithShape="1">
+          <a:gsLst>
+            <a:gs pos="0">
+              <a:schemeClr val="phClr">
+                <a:tint val="80000"/>
+                <a:satMod val="300000"/>
+              </a:schemeClr>
+            </a:gs>
+            <a:gs pos="100000">
+              <a:schemeClr val="phClr">
+                <a:shade val="30000"/>
+                <a:satMod val="200000"/>
+              </a:schemeClr>
+            </a:gs>
+          </a:gsLst>
+          <a:path path="circle">
+            <a:fillToRect l="50000" t="50000" r="50000" b="50000"/>
+          </a:path>
+        </a:gradFill>
+      </a:bgFillStyleLst>
+    </a:fmtScheme>
+  </a:themeElements>
+  <a:objectDefaults>
+    <a:spDef>
+      <a:spPr/>
+      <a:bodyPr/>
+      <a:lstStyle/>
+      <a:style>
+        <a:lnRef idx="1">
+          <a:schemeClr val="accent1"/>
+        </a:lnRef>
+        <a:fillRef idx="3">
+          <a:schemeClr val="accent1"/>
+        </a:fillRef>
+        <a:effectRef idx="2">
+          <a:schemeClr val="accent1"/>
+        </a:effectRef>
+        <a:fontRef idx="minor">
+          <a:schemeClr val="lt1"/>
+        </a:fontRef>
+      </a:style>
+    </a:spDef>
+    <a:lnDef>
+      <a:spPr/>
+      <a:bodyPr/>
+      <a:lstStyle/>
+      <a:style>
+        <a:lnRef idx="2">
+          <a:schemeClr val="accent1"/>
+        </a:lnRef>
+        <a:fillRef idx="0">
+          <a:schemeClr val="accent1"/>
+        </a:fillRef>
+        <a:effectRef idx="1">
+          <a:schemeClr val="accent1"/>
+        </a:effectRef>
+        <a:fontRef idx="minor">
+          <a:schemeClr val="tx1"/>
+        </a:fontRef>
+      </a:style>
+    </a:lnDef>
+  </a:objectDefaults>
+  <a:extraClrSchemeLst/>
+</a:theme>
 </file>
--- a/course/modules/M01/L001/M01-L001-canva-deck.pptx
+++ b/course/modules/M01/L001/M01-L001-canva-deck.pptx
@@ -4190,7 +4190,7 @@
         <p:spPr>
           <a:xfrm>
             <a:off x="1078992" y="4553712"/>
-            <a:ext cx="6568135" cy="274320"/>
+            <a:ext cx="6568135" cy="676656"/>
           </a:xfrm>
           <a:prstGeom prst="rect">
             <a:avLst/>
@@ -4226,7 +4226,7 @@
         </p:nvSpPr>
         <p:spPr>
           <a:xfrm>
-            <a:off x="932688" y="4956048"/>
+            <a:off x="932688" y="5376672"/>
             <a:ext cx="82296" cy="82296"/>
           </a:xfrm>
           <a:prstGeom prst="ellipse">
@@ -4269,8 +4269,8 @@
         </p:nvSpPr>
         <p:spPr>
           <a:xfrm>
-            <a:off x="1078992" y="4864608"/>
-            <a:ext cx="6568135" cy="274320"/>
+            <a:off x="1078992" y="5285232"/>
+            <a:ext cx="6568135" cy="475488"/>
           </a:xfrm>
           <a:prstGeom prst="rect">
             <a:avLst/>
@@ -4624,7 +4624,7 @@
         <p:spPr>
           <a:xfrm>
             <a:off x="1078992" y="2039112"/>
-            <a:ext cx="6568135" cy="274320"/>
+            <a:ext cx="6568135" cy="475488"/>
           </a:xfrm>
           <a:prstGeom prst="rect">
             <a:avLst/>
@@ -4660,7 +4660,7 @@
         </p:nvSpPr>
         <p:spPr>
           <a:xfrm>
-            <a:off x="932688" y="2441448"/>
+            <a:off x="932688" y="2660904"/>
             <a:ext cx="82296" cy="82296"/>
           </a:xfrm>
           <a:prstGeom prst="ellipse">
@@ -4703,7 +4703,7 @@
         </p:nvSpPr>
         <p:spPr>
           <a:xfrm>
-            <a:off x="1078992" y="2350008"/>
+            <a:off x="1078992" y="2569464"/>
             <a:ext cx="6568135" cy="274320"/>
           </a:xfrm>
           <a:prstGeom prst="rect">
@@ -10262,7 +10262,7 @@
         <p:spPr>
           <a:xfrm>
             <a:off x="1078992" y="1856232"/>
-            <a:ext cx="6568135" cy="274320"/>
+            <a:ext cx="6568135" cy="475488"/>
           </a:xfrm>
           <a:prstGeom prst="rect">
             <a:avLst/>
@@ -10298,7 +10298,7 @@
         </p:nvSpPr>
         <p:spPr>
           <a:xfrm>
-            <a:off x="932688" y="2258568"/>
+            <a:off x="932688" y="2478024"/>
             <a:ext cx="82296" cy="82296"/>
           </a:xfrm>
           <a:prstGeom prst="ellipse">
@@ -10341,8 +10341,8 @@
         </p:nvSpPr>
         <p:spPr>
           <a:xfrm>
-            <a:off x="1078992" y="2167128"/>
-            <a:ext cx="6568135" cy="274320"/>
+            <a:off x="1078992" y="2386584"/>
+            <a:ext cx="6568135" cy="475488"/>
           </a:xfrm>
           <a:prstGeom prst="rect">
             <a:avLst/>
@@ -10444,7 +10444,7 @@
         </p:nvSpPr>
         <p:spPr>
           <a:xfrm>
-            <a:off x="932688" y="2569464"/>
+            <a:off x="932688" y="3008376"/>
             <a:ext cx="82296" cy="82296"/>
           </a:xfrm>
           <a:prstGeom prst="ellipse">
@@ -10487,8 +10487,8 @@
         </p:nvSpPr>
         <p:spPr>
           <a:xfrm>
-            <a:off x="1078992" y="2478024"/>
-            <a:ext cx="6568135" cy="274320"/>
+            <a:off x="1078992" y="2916936"/>
+            <a:ext cx="6568135" cy="475488"/>
           </a:xfrm>
           <a:prstGeom prst="rect">
             <a:avLst/>
@@ -10590,7 +10590,7 @@
         </p:nvSpPr>
         <p:spPr>
           <a:xfrm>
-            <a:off x="932688" y="2880360"/>
+            <a:off x="932688" y="3538728"/>
             <a:ext cx="82296" cy="82296"/>
           </a:xfrm>
           <a:prstGeom prst="ellipse">
@@ -10633,8 +10633,8 @@
         </p:nvSpPr>
         <p:spPr>
           <a:xfrm>
-            <a:off x="1078992" y="2788920"/>
-            <a:ext cx="6568135" cy="274320"/>
+            <a:off x="1078992" y="3447288"/>
+            <a:ext cx="6568135" cy="676656"/>
           </a:xfrm>
           <a:prstGeom prst="rect">
             <a:avLst/>
@@ -10736,7 +10736,7 @@
         </p:nvSpPr>
         <p:spPr>
           <a:xfrm>
-            <a:off x="932688" y="3191256"/>
+            <a:off x="932688" y="4270248"/>
             <a:ext cx="82296" cy="82296"/>
           </a:xfrm>
           <a:prstGeom prst="ellipse">
@@ -10779,8 +10779,8 @@
         </p:nvSpPr>
         <p:spPr>
           <a:xfrm>
-            <a:off x="1078992" y="3099816"/>
-            <a:ext cx="6568135" cy="274320"/>
+            <a:off x="1078992" y="4178808"/>
+            <a:ext cx="6568135" cy="475488"/>
           </a:xfrm>
           <a:prstGeom prst="rect">
             <a:avLst/>
@@ -10882,7 +10882,7 @@
         </p:nvSpPr>
         <p:spPr>
           <a:xfrm>
-            <a:off x="932688" y="4306824"/>
+            <a:off x="932688" y="5129784"/>
             <a:ext cx="9692640" cy="228600"/>
           </a:xfrm>
           <a:prstGeom prst="rect">
@@ -10919,7 +10919,7 @@
         </p:nvSpPr>
         <p:spPr>
           <a:xfrm>
-            <a:off x="932688" y="4690872"/>
+            <a:off x="932688" y="5513832"/>
             <a:ext cx="82296" cy="82296"/>
           </a:xfrm>
           <a:prstGeom prst="ellipse">
@@ -10962,7 +10962,7 @@
         </p:nvSpPr>
         <p:spPr>
           <a:xfrm>
-            <a:off x="1078992" y="4599432"/>
+            <a:off x="1078992" y="5422392"/>
             <a:ext cx="9555480" cy="274320"/>
           </a:xfrm>
           <a:prstGeom prst="rect">

--- a/course/modules/M01/L001/M01-L001-canva-deck.pptx
+++ b/course/modules/M01/L001/M01-L001-canva-deck.pptx
@@ -5684,8 +5684,8 @@
         </p:nvSpPr>
         <p:spPr>
           <a:xfrm>
-            <a:off x="1078992" y="1435608"/>
-            <a:ext cx="6613855" cy="658368"/>
+            <a:off x="1078992" y="1463040"/>
+            <a:ext cx="6613855" cy="320040"/>
           </a:xfrm>
           <a:prstGeom prst="rect">
             <a:avLst/>
@@ -5700,7 +5700,7 @@
           <a:p>
             <a:pPr algn="l"/>
             <a:r>
-              <a:rPr sz="3600" b="1" i="0" lang="th-TH" altLang="en-US">
+              <a:rPr sz="1700" b="0" i="0" lang="th-TH" altLang="en-US">
                 <a:solidFill>
                   <a:srgbClr val="24333D"/>
                 </a:solidFill>
@@ -5709,17 +5709,6 @@
                 <a:cs typeface="Sarabun"/>
               </a:rPr>
               <a:t>สวัสดี</a:t>
-            </a:r>
-            <a:r>
-              <a:rPr sz="2230" b="0" i="1" lang="en-US" altLang="en-US">
-                <a:solidFill>
-                  <a:srgbClr val="566873"/>
-                </a:solidFill>
-                <a:latin typeface="Sarabun"/>
-                <a:ea typeface="Sarabun"/>
-                <a:cs typeface="Sarabun"/>
-              </a:rPr>
-              <a:t> (sà-wàt-dii)</a:t>
             </a:r>
           </a:p>
         </p:txBody>
@@ -5732,7 +5721,7 @@
         </p:nvSpPr>
         <p:spPr>
           <a:xfrm>
-            <a:off x="1078992" y="2203704"/>
+            <a:off x="1078992" y="1828800"/>
             <a:ext cx="6613855" cy="274320"/>
           </a:xfrm>
           <a:prstGeom prst="rect">
@@ -5748,6 +5737,43 @@
           <a:p>
             <a:pPr algn="l"/>
             <a:r>
+              <a:rPr sz="1700" b="0" i="1" lang="en-US" altLang="en-US">
+                <a:solidFill>
+                  <a:srgbClr val="566873"/>
+                </a:solidFill>
+                <a:latin typeface="Sarabun"/>
+                <a:ea typeface="Sarabun"/>
+                <a:cs typeface="Sarabun"/>
+              </a:rPr>
+              <a:t>sà-wàt-dii</a:t>
+            </a:r>
+          </a:p>
+        </p:txBody>
+      </p:sp>
+      <p:sp>
+        <p:nvSpPr>
+          <p:cNvPr id="10" name="TextBox 9"/>
+          <p:cNvSpPr txBox="1"/>
+          <p:nvPr/>
+        </p:nvSpPr>
+        <p:spPr>
+          <a:xfrm>
+            <a:off x="1078992" y="2203704"/>
+            <a:ext cx="6613855" cy="274320"/>
+          </a:xfrm>
+          <a:prstGeom prst="rect">
+            <a:avLst/>
+          </a:prstGeom>
+          <a:noFill/>
+        </p:spPr>
+        <p:txBody>
+          <a:bodyPr wrap="square" anchor="t">
+            <a:spAutoFit/>
+          </a:bodyPr>
+          <a:lstStyle/>
+          <a:p>
+            <a:pPr algn="l"/>
+            <a:r>
               <a:rPr sz="1700" b="0" i="0" lang="en-US" altLang="en-US">
                 <a:solidFill>
                   <a:srgbClr val="82909A"/>
@@ -5763,7 +5789,7 @@
       </p:sp>
       <p:sp>
         <p:nvSpPr>
-          <p:cNvPr id="10" name="Rounded Rectangle 9"/>
+          <p:cNvPr id="11" name="Rounded Rectangle 10"/>
           <p:cNvSpPr/>
           <p:nvPr/>
         </p:nvSpPr>
@@ -5804,7 +5830,7 @@
       </p:sp>
       <p:sp>
         <p:nvSpPr>
-          <p:cNvPr id="11" name="Rectangle 10"/>
+          <p:cNvPr id="12" name="Rectangle 11"/>
           <p:cNvSpPr/>
           <p:nvPr/>
         </p:nvSpPr>
@@ -5847,14 +5873,14 @@
       </p:sp>
       <p:sp>
         <p:nvSpPr>
-          <p:cNvPr id="12" name="TextBox 11"/>
+          <p:cNvPr id="13" name="TextBox 12"/>
           <p:cNvSpPr txBox="1"/>
           <p:nvPr/>
         </p:nvSpPr>
         <p:spPr>
           <a:xfrm>
-            <a:off x="1078992" y="3191256"/>
-            <a:ext cx="6613855" cy="658368"/>
+            <a:off x="1078992" y="3218688"/>
+            <a:ext cx="6613855" cy="320040"/>
           </a:xfrm>
           <a:prstGeom prst="rect">
             <a:avLst/>
@@ -5869,7 +5895,7 @@
           <a:p>
             <a:pPr algn="l"/>
             <a:r>
-              <a:rPr sz="3600" b="1" i="0" lang="th-TH" altLang="en-US">
+              <a:rPr sz="1700" b="0" i="0" lang="th-TH" altLang="en-US">
                 <a:solidFill>
                   <a:srgbClr val="24333D"/>
                 </a:solidFill>
@@ -5879,29 +5905,18 @@
               </a:rPr>
               <a:t>สวัสดีครับ</a:t>
             </a:r>
-            <a:r>
-              <a:rPr sz="2230" b="0" i="1" lang="en-US" altLang="en-US">
-                <a:solidFill>
-                  <a:srgbClr val="566873"/>
-                </a:solidFill>
-                <a:latin typeface="Sarabun"/>
-                <a:ea typeface="Sarabun"/>
-                <a:cs typeface="Sarabun"/>
-              </a:rPr>
-              <a:t> (sà-wàt-dii khráp)</a:t>
-            </a:r>
-          </a:p>
-        </p:txBody>
-      </p:sp>
-      <p:sp>
-        <p:nvSpPr>
-          <p:cNvPr id="13" name="TextBox 12"/>
+          </a:p>
+        </p:txBody>
+      </p:sp>
+      <p:sp>
+        <p:nvSpPr>
+          <p:cNvPr id="14" name="TextBox 13"/>
           <p:cNvSpPr txBox="1"/>
           <p:nvPr/>
         </p:nvSpPr>
         <p:spPr>
           <a:xfrm>
-            <a:off x="1078992" y="3959352"/>
+            <a:off x="1078992" y="3584448"/>
             <a:ext cx="6613855" cy="274320"/>
           </a:xfrm>
           <a:prstGeom prst="rect">
@@ -5917,6 +5932,43 @@
           <a:p>
             <a:pPr algn="l"/>
             <a:r>
+              <a:rPr sz="1700" b="0" i="1" lang="en-US" altLang="en-US">
+                <a:solidFill>
+                  <a:srgbClr val="566873"/>
+                </a:solidFill>
+                <a:latin typeface="Sarabun"/>
+                <a:ea typeface="Sarabun"/>
+                <a:cs typeface="Sarabun"/>
+              </a:rPr>
+              <a:t>sà-wàt-dii khráp</a:t>
+            </a:r>
+          </a:p>
+        </p:txBody>
+      </p:sp>
+      <p:sp>
+        <p:nvSpPr>
+          <p:cNvPr id="15" name="TextBox 14"/>
+          <p:cNvSpPr txBox="1"/>
+          <p:nvPr/>
+        </p:nvSpPr>
+        <p:spPr>
+          <a:xfrm>
+            <a:off x="1078992" y="3959352"/>
+            <a:ext cx="6613855" cy="274320"/>
+          </a:xfrm>
+          <a:prstGeom prst="rect">
+            <a:avLst/>
+          </a:prstGeom>
+          <a:noFill/>
+        </p:spPr>
+        <p:txBody>
+          <a:bodyPr wrap="square" anchor="t">
+            <a:spAutoFit/>
+          </a:bodyPr>
+          <a:lstStyle/>
+          <a:p>
+            <a:pPr algn="l"/>
+            <a:r>
               <a:rPr sz="1700" b="0" i="0" lang="en-US" altLang="en-US">
                 <a:solidFill>
                   <a:srgbClr val="82909A"/>
@@ -5932,7 +5984,7 @@
       </p:sp>
       <p:sp>
         <p:nvSpPr>
-          <p:cNvPr id="14" name="Rounded Rectangle 13"/>
+          <p:cNvPr id="16" name="Rounded Rectangle 15"/>
           <p:cNvSpPr/>
           <p:nvPr/>
         </p:nvSpPr>
@@ -5973,7 +6025,7 @@
       </p:sp>
       <p:sp>
         <p:nvSpPr>
-          <p:cNvPr id="15" name="Rectangle 14"/>
+          <p:cNvPr id="17" name="Rectangle 16"/>
           <p:cNvSpPr/>
           <p:nvPr/>
         </p:nvSpPr>
@@ -6016,14 +6068,14 @@
       </p:sp>
       <p:sp>
         <p:nvSpPr>
-          <p:cNvPr id="16" name="TextBox 15"/>
+          <p:cNvPr id="18" name="TextBox 17"/>
           <p:cNvSpPr txBox="1"/>
           <p:nvPr/>
         </p:nvSpPr>
         <p:spPr>
           <a:xfrm>
-            <a:off x="1078992" y="4946904"/>
-            <a:ext cx="6613855" cy="658368"/>
+            <a:off x="1078992" y="4974336"/>
+            <a:ext cx="6613855" cy="320040"/>
           </a:xfrm>
           <a:prstGeom prst="rect">
             <a:avLst/>
@@ -6038,7 +6090,7 @@
           <a:p>
             <a:pPr algn="l"/>
             <a:r>
-              <a:rPr sz="3600" b="1" i="0" lang="th-TH" altLang="en-US">
+              <a:rPr sz="1700" b="0" i="0" lang="th-TH" altLang="en-US">
                 <a:solidFill>
                   <a:srgbClr val="24333D"/>
                 </a:solidFill>
@@ -6048,8 +6100,34 @@
               </a:rPr>
               <a:t>สวัสดีค่ะ</a:t>
             </a:r>
-            <a:r>
-              <a:rPr sz="2230" b="0" i="1" lang="en-US" altLang="en-US">
+          </a:p>
+        </p:txBody>
+      </p:sp>
+      <p:sp>
+        <p:nvSpPr>
+          <p:cNvPr id="19" name="TextBox 18"/>
+          <p:cNvSpPr txBox="1"/>
+          <p:nvPr/>
+        </p:nvSpPr>
+        <p:spPr>
+          <a:xfrm>
+            <a:off x="1078992" y="5340096"/>
+            <a:ext cx="6613855" cy="274320"/>
+          </a:xfrm>
+          <a:prstGeom prst="rect">
+            <a:avLst/>
+          </a:prstGeom>
+          <a:noFill/>
+        </p:spPr>
+        <p:txBody>
+          <a:bodyPr wrap="square" anchor="t">
+            <a:spAutoFit/>
+          </a:bodyPr>
+          <a:lstStyle/>
+          <a:p>
+            <a:pPr algn="l"/>
+            <a:r>
+              <a:rPr sz="1700" b="0" i="1" lang="en-US" altLang="en-US">
                 <a:solidFill>
                   <a:srgbClr val="566873"/>
                 </a:solidFill>
@@ -6057,14 +6135,14 @@
                 <a:ea typeface="Sarabun"/>
                 <a:cs typeface="Sarabun"/>
               </a:rPr>
-              <a:t> (sà-wàt-dii khâ)</a:t>
-            </a:r>
-          </a:p>
-        </p:txBody>
-      </p:sp>
-      <p:sp>
-        <p:nvSpPr>
-          <p:cNvPr id="17" name="TextBox 16"/>
+              <a:t>sà-wàt-dii khâ</a:t>
+            </a:r>
+          </a:p>
+        </p:txBody>
+      </p:sp>
+      <p:sp>
+        <p:nvSpPr>
+          <p:cNvPr id="20" name="TextBox 19"/>
           <p:cNvSpPr txBox="1"/>
           <p:nvPr/>
         </p:nvSpPr>
@@ -6391,8 +6469,8 @@
         </p:nvSpPr>
         <p:spPr>
           <a:xfrm>
-            <a:off x="1078992" y="1435608"/>
-            <a:ext cx="6613855" cy="658368"/>
+            <a:off x="1078992" y="1463040"/>
+            <a:ext cx="6613855" cy="320040"/>
           </a:xfrm>
           <a:prstGeom prst="rect">
             <a:avLst/>
@@ -6407,7 +6485,7 @@
           <a:p>
             <a:pPr algn="l"/>
             <a:r>
-              <a:rPr sz="3600" b="1" i="0" lang="th-TH" altLang="en-US">
+              <a:rPr sz="1700" b="0" i="0" lang="th-TH" altLang="en-US">
                 <a:solidFill>
                   <a:srgbClr val="24333D"/>
                 </a:solidFill>
@@ -6416,17 +6494,6 @@
                 <a:cs typeface="Sarabun"/>
               </a:rPr>
               <a:t>ขอบคุณ</a:t>
-            </a:r>
-            <a:r>
-              <a:rPr sz="2230" b="0" i="1" lang="en-US" altLang="en-US">
-                <a:solidFill>
-                  <a:srgbClr val="566873"/>
-                </a:solidFill>
-                <a:latin typeface="Sarabun"/>
-                <a:ea typeface="Sarabun"/>
-                <a:cs typeface="Sarabun"/>
-              </a:rPr>
-              <a:t> (khàawp-khun)</a:t>
             </a:r>
           </a:p>
         </p:txBody>
@@ -6439,7 +6506,7 @@
         </p:nvSpPr>
         <p:spPr>
           <a:xfrm>
-            <a:off x="1078992" y="2203704"/>
+            <a:off x="1078992" y="1828800"/>
             <a:ext cx="6613855" cy="274320"/>
           </a:xfrm>
           <a:prstGeom prst="rect">
@@ -6455,6 +6522,43 @@
           <a:p>
             <a:pPr algn="l"/>
             <a:r>
+              <a:rPr sz="1700" b="0" i="1" lang="en-US" altLang="en-US">
+                <a:solidFill>
+                  <a:srgbClr val="566873"/>
+                </a:solidFill>
+                <a:latin typeface="Sarabun"/>
+                <a:ea typeface="Sarabun"/>
+                <a:cs typeface="Sarabun"/>
+              </a:rPr>
+              <a:t>khàawp-khun</a:t>
+            </a:r>
+          </a:p>
+        </p:txBody>
+      </p:sp>
+      <p:sp>
+        <p:nvSpPr>
+          <p:cNvPr id="10" name="TextBox 9"/>
+          <p:cNvSpPr txBox="1"/>
+          <p:nvPr/>
+        </p:nvSpPr>
+        <p:spPr>
+          <a:xfrm>
+            <a:off x="1078992" y="2203704"/>
+            <a:ext cx="6613855" cy="274320"/>
+          </a:xfrm>
+          <a:prstGeom prst="rect">
+            <a:avLst/>
+          </a:prstGeom>
+          <a:noFill/>
+        </p:spPr>
+        <p:txBody>
+          <a:bodyPr wrap="square" anchor="t">
+            <a:spAutoFit/>
+          </a:bodyPr>
+          <a:lstStyle/>
+          <a:p>
+            <a:pPr algn="l"/>
+            <a:r>
               <a:rPr sz="1700" b="0" i="0" lang="en-US" altLang="en-US">
                 <a:solidFill>
                   <a:srgbClr val="82909A"/>
@@ -6470,7 +6574,7 @@
       </p:sp>
       <p:sp>
         <p:nvSpPr>
-          <p:cNvPr id="10" name="Rounded Rectangle 9"/>
+          <p:cNvPr id="11" name="Rounded Rectangle 10"/>
           <p:cNvSpPr/>
           <p:nvPr/>
         </p:nvSpPr>
@@ -6511,7 +6615,7 @@
       </p:sp>
       <p:sp>
         <p:nvSpPr>
-          <p:cNvPr id="11" name="Rectangle 10"/>
+          <p:cNvPr id="12" name="Rectangle 11"/>
           <p:cNvSpPr/>
           <p:nvPr/>
         </p:nvSpPr>
@@ -6554,14 +6658,14 @@
       </p:sp>
       <p:sp>
         <p:nvSpPr>
-          <p:cNvPr id="12" name="TextBox 11"/>
+          <p:cNvPr id="13" name="TextBox 12"/>
           <p:cNvSpPr txBox="1"/>
           <p:nvPr/>
         </p:nvSpPr>
         <p:spPr>
           <a:xfrm>
-            <a:off x="1078992" y="3191256"/>
-            <a:ext cx="6613855" cy="658368"/>
+            <a:off x="1078992" y="3218688"/>
+            <a:ext cx="6613855" cy="320040"/>
           </a:xfrm>
           <a:prstGeom prst="rect">
             <a:avLst/>
@@ -6576,7 +6680,7 @@
           <a:p>
             <a:pPr algn="l"/>
             <a:r>
-              <a:rPr sz="3600" b="1" i="0" lang="th-TH" altLang="en-US">
+              <a:rPr sz="1700" b="0" i="0" lang="th-TH" altLang="en-US">
                 <a:solidFill>
                   <a:srgbClr val="24333D"/>
                 </a:solidFill>
@@ -6586,29 +6690,18 @@
               </a:rPr>
               <a:t>ขอโทษ</a:t>
             </a:r>
-            <a:r>
-              <a:rPr sz="2230" b="0" i="1" lang="en-US" altLang="en-US">
-                <a:solidFill>
-                  <a:srgbClr val="566873"/>
-                </a:solidFill>
-                <a:latin typeface="Sarabun"/>
-                <a:ea typeface="Sarabun"/>
-                <a:cs typeface="Sarabun"/>
-              </a:rPr>
-              <a:t> (khǎaw-thôot)</a:t>
-            </a:r>
-          </a:p>
-        </p:txBody>
-      </p:sp>
-      <p:sp>
-        <p:nvSpPr>
-          <p:cNvPr id="13" name="TextBox 12"/>
+          </a:p>
+        </p:txBody>
+      </p:sp>
+      <p:sp>
+        <p:nvSpPr>
+          <p:cNvPr id="14" name="TextBox 13"/>
           <p:cNvSpPr txBox="1"/>
           <p:nvPr/>
         </p:nvSpPr>
         <p:spPr>
           <a:xfrm>
-            <a:off x="1078992" y="3959352"/>
+            <a:off x="1078992" y="3584448"/>
             <a:ext cx="6613855" cy="274320"/>
           </a:xfrm>
           <a:prstGeom prst="rect">
@@ -6624,6 +6717,43 @@
           <a:p>
             <a:pPr algn="l"/>
             <a:r>
+              <a:rPr sz="1700" b="0" i="1" lang="en-US" altLang="en-US">
+                <a:solidFill>
+                  <a:srgbClr val="566873"/>
+                </a:solidFill>
+                <a:latin typeface="Sarabun"/>
+                <a:ea typeface="Sarabun"/>
+                <a:cs typeface="Sarabun"/>
+              </a:rPr>
+              <a:t>khǎaw-thôot</a:t>
+            </a:r>
+          </a:p>
+        </p:txBody>
+      </p:sp>
+      <p:sp>
+        <p:nvSpPr>
+          <p:cNvPr id="15" name="TextBox 14"/>
+          <p:cNvSpPr txBox="1"/>
+          <p:nvPr/>
+        </p:nvSpPr>
+        <p:spPr>
+          <a:xfrm>
+            <a:off x="1078992" y="3959352"/>
+            <a:ext cx="6613855" cy="274320"/>
+          </a:xfrm>
+          <a:prstGeom prst="rect">
+            <a:avLst/>
+          </a:prstGeom>
+          <a:noFill/>
+        </p:spPr>
+        <p:txBody>
+          <a:bodyPr wrap="square" anchor="t">
+            <a:spAutoFit/>
+          </a:bodyPr>
+          <a:lstStyle/>
+          <a:p>
+            <a:pPr algn="l"/>
+            <a:r>
               <a:rPr sz="1700" b="0" i="0" lang="en-US" altLang="en-US">
                 <a:solidFill>
                   <a:srgbClr val="82909A"/>
@@ -6639,7 +6769,7 @@
       </p:sp>
       <p:sp>
         <p:nvSpPr>
-          <p:cNvPr id="14" name="Rounded Rectangle 13"/>
+          <p:cNvPr id="16" name="Rounded Rectangle 15"/>
           <p:cNvSpPr/>
           <p:nvPr/>
         </p:nvSpPr>
@@ -6680,7 +6810,7 @@
       </p:sp>
       <p:sp>
         <p:nvSpPr>
-          <p:cNvPr id="15" name="Rectangle 14"/>
+          <p:cNvPr id="17" name="Rectangle 16"/>
           <p:cNvSpPr/>
           <p:nvPr/>
         </p:nvSpPr>
@@ -6723,14 +6853,14 @@
       </p:sp>
       <p:sp>
         <p:nvSpPr>
-          <p:cNvPr id="16" name="TextBox 15"/>
+          <p:cNvPr id="18" name="TextBox 17"/>
           <p:cNvSpPr txBox="1"/>
           <p:nvPr/>
         </p:nvSpPr>
         <p:spPr>
           <a:xfrm>
-            <a:off x="1078992" y="4946904"/>
-            <a:ext cx="6613855" cy="658368"/>
+            <a:off x="1078992" y="4974336"/>
+            <a:ext cx="6613855" cy="320040"/>
           </a:xfrm>
           <a:prstGeom prst="rect">
             <a:avLst/>
@@ -6745,7 +6875,7 @@
           <a:p>
             <a:pPr algn="l"/>
             <a:r>
-              <a:rPr sz="3600" b="1" i="0" lang="th-TH" altLang="en-US">
+              <a:rPr sz="1700" b="0" i="0" lang="th-TH" altLang="en-US">
                 <a:solidFill>
                   <a:srgbClr val="24333D"/>
                 </a:solidFill>
@@ -6755,8 +6885,34 @@
               </a:rPr>
               <a:t>ไม่เป็นไร</a:t>
             </a:r>
-            <a:r>
-              <a:rPr sz="2230" b="0" i="1" lang="en-US" altLang="en-US">
+          </a:p>
+        </p:txBody>
+      </p:sp>
+      <p:sp>
+        <p:nvSpPr>
+          <p:cNvPr id="19" name="TextBox 18"/>
+          <p:cNvSpPr txBox="1"/>
+          <p:nvPr/>
+        </p:nvSpPr>
+        <p:spPr>
+          <a:xfrm>
+            <a:off x="1078992" y="5340096"/>
+            <a:ext cx="6613855" cy="274320"/>
+          </a:xfrm>
+          <a:prstGeom prst="rect">
+            <a:avLst/>
+          </a:prstGeom>
+          <a:noFill/>
+        </p:spPr>
+        <p:txBody>
+          <a:bodyPr wrap="square" anchor="t">
+            <a:spAutoFit/>
+          </a:bodyPr>
+          <a:lstStyle/>
+          <a:p>
+            <a:pPr algn="l"/>
+            <a:r>
+              <a:rPr sz="1700" b="0" i="1" lang="en-US" altLang="en-US">
                 <a:solidFill>
                   <a:srgbClr val="566873"/>
                 </a:solidFill>
@@ -6764,14 +6920,14 @@
                 <a:ea typeface="Sarabun"/>
                 <a:cs typeface="Sarabun"/>
               </a:rPr>
-              <a:t> (mâi bpen rai)</a:t>
-            </a:r>
-          </a:p>
-        </p:txBody>
-      </p:sp>
-      <p:sp>
-        <p:nvSpPr>
-          <p:cNvPr id="17" name="TextBox 16"/>
+              <a:t>mâi bpen rai</a:t>
+            </a:r>
+          </a:p>
+        </p:txBody>
+      </p:sp>
+      <p:sp>
+        <p:nvSpPr>
+          <p:cNvPr id="20" name="TextBox 19"/>
           <p:cNvSpPr txBox="1"/>
           <p:nvPr/>
         </p:nvSpPr>
@@ -7098,8 +7254,8 @@
         </p:nvSpPr>
         <p:spPr>
           <a:xfrm>
-            <a:off x="1078992" y="1435608"/>
-            <a:ext cx="6613855" cy="658368"/>
+            <a:off x="1078992" y="1463040"/>
+            <a:ext cx="6613855" cy="320040"/>
           </a:xfrm>
           <a:prstGeom prst="rect">
             <a:avLst/>
@@ -7114,7 +7270,7 @@
           <a:p>
             <a:pPr algn="l"/>
             <a:r>
-              <a:rPr sz="3600" b="1" i="0" lang="th-TH" altLang="en-US">
+              <a:rPr sz="1700" b="0" i="0" lang="th-TH" altLang="en-US">
                 <a:solidFill>
                   <a:srgbClr val="24333D"/>
                 </a:solidFill>
@@ -7123,17 +7279,6 @@
                 <a:cs typeface="Sarabun"/>
               </a:rPr>
               <a:t>ครับ</a:t>
-            </a:r>
-            <a:r>
-              <a:rPr sz="2230" b="0" i="1" lang="en-US" altLang="en-US">
-                <a:solidFill>
-                  <a:srgbClr val="566873"/>
-                </a:solidFill>
-                <a:latin typeface="Sarabun"/>
-                <a:ea typeface="Sarabun"/>
-                <a:cs typeface="Sarabun"/>
-              </a:rPr>
-              <a:t> (khráp)</a:t>
             </a:r>
           </a:p>
         </p:txBody>
@@ -7146,7 +7291,7 @@
         </p:nvSpPr>
         <p:spPr>
           <a:xfrm>
-            <a:off x="1078992" y="2203704"/>
+            <a:off x="1078992" y="1828800"/>
             <a:ext cx="6613855" cy="274320"/>
           </a:xfrm>
           <a:prstGeom prst="rect">
@@ -7162,6 +7307,43 @@
           <a:p>
             <a:pPr algn="l"/>
             <a:r>
+              <a:rPr sz="1700" b="0" i="1" lang="en-US" altLang="en-US">
+                <a:solidFill>
+                  <a:srgbClr val="566873"/>
+                </a:solidFill>
+                <a:latin typeface="Sarabun"/>
+                <a:ea typeface="Sarabun"/>
+                <a:cs typeface="Sarabun"/>
+              </a:rPr>
+              <a:t>khráp</a:t>
+            </a:r>
+          </a:p>
+        </p:txBody>
+      </p:sp>
+      <p:sp>
+        <p:nvSpPr>
+          <p:cNvPr id="10" name="TextBox 9"/>
+          <p:cNvSpPr txBox="1"/>
+          <p:nvPr/>
+        </p:nvSpPr>
+        <p:spPr>
+          <a:xfrm>
+            <a:off x="1078992" y="2203704"/>
+            <a:ext cx="6613855" cy="274320"/>
+          </a:xfrm>
+          <a:prstGeom prst="rect">
+            <a:avLst/>
+          </a:prstGeom>
+          <a:noFill/>
+        </p:spPr>
+        <p:txBody>
+          <a:bodyPr wrap="square" anchor="t">
+            <a:spAutoFit/>
+          </a:bodyPr>
+          <a:lstStyle/>
+          <a:p>
+            <a:pPr algn="l"/>
+            <a:r>
               <a:rPr sz="1700" b="0" i="0" lang="en-US" altLang="en-US">
                 <a:solidFill>
                   <a:srgbClr val="82909A"/>
@@ -7177,7 +7359,7 @@
       </p:sp>
       <p:sp>
         <p:nvSpPr>
-          <p:cNvPr id="10" name="Rounded Rectangle 9"/>
+          <p:cNvPr id="11" name="Rounded Rectangle 10"/>
           <p:cNvSpPr/>
           <p:nvPr/>
         </p:nvSpPr>
@@ -7218,7 +7400,7 @@
       </p:sp>
       <p:sp>
         <p:nvSpPr>
-          <p:cNvPr id="11" name="Rectangle 10"/>
+          <p:cNvPr id="12" name="Rectangle 11"/>
           <p:cNvSpPr/>
           <p:nvPr/>
         </p:nvSpPr>
@@ -7261,14 +7443,14 @@
       </p:sp>
       <p:sp>
         <p:nvSpPr>
-          <p:cNvPr id="12" name="TextBox 11"/>
+          <p:cNvPr id="13" name="TextBox 12"/>
           <p:cNvSpPr txBox="1"/>
           <p:nvPr/>
         </p:nvSpPr>
         <p:spPr>
           <a:xfrm>
-            <a:off x="1078992" y="3191256"/>
-            <a:ext cx="6613855" cy="658368"/>
+            <a:off x="1078992" y="3218688"/>
+            <a:ext cx="6613855" cy="320040"/>
           </a:xfrm>
           <a:prstGeom prst="rect">
             <a:avLst/>
@@ -7283,7 +7465,7 @@
           <a:p>
             <a:pPr algn="l"/>
             <a:r>
-              <a:rPr sz="3600" b="1" i="0" lang="th-TH" altLang="en-US">
+              <a:rPr sz="1700" b="0" i="0" lang="th-TH" altLang="en-US">
                 <a:solidFill>
                   <a:srgbClr val="24333D"/>
                 </a:solidFill>
@@ -7293,29 +7475,18 @@
               </a:rPr>
               <a:t>ค่ะ</a:t>
             </a:r>
-            <a:r>
-              <a:rPr sz="2230" b="0" i="1" lang="en-US" altLang="en-US">
-                <a:solidFill>
-                  <a:srgbClr val="566873"/>
-                </a:solidFill>
-                <a:latin typeface="Sarabun"/>
-                <a:ea typeface="Sarabun"/>
-                <a:cs typeface="Sarabun"/>
-              </a:rPr>
-              <a:t> (khâ)</a:t>
-            </a:r>
-          </a:p>
-        </p:txBody>
-      </p:sp>
-      <p:sp>
-        <p:nvSpPr>
-          <p:cNvPr id="13" name="TextBox 12"/>
+          </a:p>
+        </p:txBody>
+      </p:sp>
+      <p:sp>
+        <p:nvSpPr>
+          <p:cNvPr id="14" name="TextBox 13"/>
           <p:cNvSpPr txBox="1"/>
           <p:nvPr/>
         </p:nvSpPr>
         <p:spPr>
           <a:xfrm>
-            <a:off x="1078992" y="3959352"/>
+            <a:off x="1078992" y="3584448"/>
             <a:ext cx="6613855" cy="274320"/>
           </a:xfrm>
           <a:prstGeom prst="rect">
@@ -7331,6 +7502,43 @@
           <a:p>
             <a:pPr algn="l"/>
             <a:r>
+              <a:rPr sz="1700" b="0" i="1" lang="en-US" altLang="en-US">
+                <a:solidFill>
+                  <a:srgbClr val="566873"/>
+                </a:solidFill>
+                <a:latin typeface="Sarabun"/>
+                <a:ea typeface="Sarabun"/>
+                <a:cs typeface="Sarabun"/>
+              </a:rPr>
+              <a:t>khâ</a:t>
+            </a:r>
+          </a:p>
+        </p:txBody>
+      </p:sp>
+      <p:sp>
+        <p:nvSpPr>
+          <p:cNvPr id="15" name="TextBox 14"/>
+          <p:cNvSpPr txBox="1"/>
+          <p:nvPr/>
+        </p:nvSpPr>
+        <p:spPr>
+          <a:xfrm>
+            <a:off x="1078992" y="3959352"/>
+            <a:ext cx="6613855" cy="274320"/>
+          </a:xfrm>
+          <a:prstGeom prst="rect">
+            <a:avLst/>
+          </a:prstGeom>
+          <a:noFill/>
+        </p:spPr>
+        <p:txBody>
+          <a:bodyPr wrap="square" anchor="t">
+            <a:spAutoFit/>
+          </a:bodyPr>
+          <a:lstStyle/>
+          <a:p>
+            <a:pPr algn="l"/>
+            <a:r>
               <a:rPr sz="1700" b="0" i="0" lang="en-US" altLang="en-US">
                 <a:solidFill>
                   <a:srgbClr val="82909A"/>
@@ -7346,7 +7554,7 @@
       </p:sp>
       <p:sp>
         <p:nvSpPr>
-          <p:cNvPr id="14" name="Rounded Rectangle 13"/>
+          <p:cNvPr id="16" name="Rounded Rectangle 15"/>
           <p:cNvSpPr/>
           <p:nvPr/>
         </p:nvSpPr>
@@ -7387,7 +7595,7 @@
       </p:sp>
       <p:sp>
         <p:nvSpPr>
-          <p:cNvPr id="15" name="Rectangle 14"/>
+          <p:cNvPr id="17" name="Rectangle 16"/>
           <p:cNvSpPr/>
           <p:nvPr/>
         </p:nvSpPr>
@@ -7430,14 +7638,14 @@
       </p:sp>
       <p:sp>
         <p:nvSpPr>
-          <p:cNvPr id="16" name="TextBox 15"/>
+          <p:cNvPr id="18" name="TextBox 17"/>
           <p:cNvSpPr txBox="1"/>
           <p:nvPr/>
         </p:nvSpPr>
         <p:spPr>
           <a:xfrm>
-            <a:off x="1078992" y="4946904"/>
-            <a:ext cx="6613855" cy="658368"/>
+            <a:off x="1078992" y="4974336"/>
+            <a:ext cx="6613855" cy="320040"/>
           </a:xfrm>
           <a:prstGeom prst="rect">
             <a:avLst/>
@@ -7452,7 +7660,7 @@
           <a:p>
             <a:pPr algn="l"/>
             <a:r>
-              <a:rPr sz="3600" b="1" i="0" lang="th-TH" altLang="en-US">
+              <a:rPr sz="1700" b="0" i="0" lang="th-TH" altLang="en-US">
                 <a:solidFill>
                   <a:srgbClr val="24333D"/>
                 </a:solidFill>
@@ -7462,8 +7670,34 @@
               </a:rPr>
               <a:t>คะ</a:t>
             </a:r>
-            <a:r>
-              <a:rPr sz="2230" b="0" i="1" lang="en-US" altLang="en-US">
+          </a:p>
+        </p:txBody>
+      </p:sp>
+      <p:sp>
+        <p:nvSpPr>
+          <p:cNvPr id="19" name="TextBox 18"/>
+          <p:cNvSpPr txBox="1"/>
+          <p:nvPr/>
+        </p:nvSpPr>
+        <p:spPr>
+          <a:xfrm>
+            <a:off x="1078992" y="5340096"/>
+            <a:ext cx="6613855" cy="274320"/>
+          </a:xfrm>
+          <a:prstGeom prst="rect">
+            <a:avLst/>
+          </a:prstGeom>
+          <a:noFill/>
+        </p:spPr>
+        <p:txBody>
+          <a:bodyPr wrap="square" anchor="t">
+            <a:spAutoFit/>
+          </a:bodyPr>
+          <a:lstStyle/>
+          <a:p>
+            <a:pPr algn="l"/>
+            <a:r>
+              <a:rPr sz="1700" b="0" i="1" lang="en-US" altLang="en-US">
                 <a:solidFill>
                   <a:srgbClr val="566873"/>
                 </a:solidFill>
@@ -7471,14 +7705,14 @@
                 <a:ea typeface="Sarabun"/>
                 <a:cs typeface="Sarabun"/>
               </a:rPr>
-              <a:t> (khá)</a:t>
-            </a:r>
-          </a:p>
-        </p:txBody>
-      </p:sp>
-      <p:sp>
-        <p:nvSpPr>
-          <p:cNvPr id="17" name="TextBox 16"/>
+              <a:t>khá</a:t>
+            </a:r>
+          </a:p>
+        </p:txBody>
+      </p:sp>
+      <p:sp>
+        <p:nvSpPr>
+          <p:cNvPr id="20" name="TextBox 19"/>
           <p:cNvSpPr txBox="1"/>
           <p:nvPr/>
         </p:nvSpPr>
@@ -7805,8 +8039,8 @@
         </p:nvSpPr>
         <p:spPr>
           <a:xfrm>
-            <a:off x="1078992" y="1435608"/>
-            <a:ext cx="6613855" cy="658368"/>
+            <a:off x="1078992" y="1463040"/>
+            <a:ext cx="6613855" cy="320040"/>
           </a:xfrm>
           <a:prstGeom prst="rect">
             <a:avLst/>
@@ -7821,7 +8055,7 @@
           <a:p>
             <a:pPr algn="l"/>
             <a:r>
-              <a:rPr sz="3600" b="1" i="0" lang="th-TH" altLang="en-US">
+              <a:rPr sz="1700" b="0" i="0" lang="th-TH" altLang="en-US">
                 <a:solidFill>
                   <a:srgbClr val="24333D"/>
                 </a:solidFill>
@@ -7830,17 +8064,6 @@
                 <a:cs typeface="Sarabun"/>
               </a:rPr>
               <a:t>ใช่</a:t>
-            </a:r>
-            <a:r>
-              <a:rPr sz="2230" b="0" i="1" lang="en-US" altLang="en-US">
-                <a:solidFill>
-                  <a:srgbClr val="566873"/>
-                </a:solidFill>
-                <a:latin typeface="Sarabun"/>
-                <a:ea typeface="Sarabun"/>
-                <a:cs typeface="Sarabun"/>
-              </a:rPr>
-              <a:t> (châi)</a:t>
             </a:r>
           </a:p>
         </p:txBody>
@@ -7853,7 +8076,7 @@
         </p:nvSpPr>
         <p:spPr>
           <a:xfrm>
-            <a:off x="1078992" y="2203704"/>
+            <a:off x="1078992" y="1828800"/>
             <a:ext cx="6613855" cy="274320"/>
           </a:xfrm>
           <a:prstGeom prst="rect">
@@ -7869,6 +8092,43 @@
           <a:p>
             <a:pPr algn="l"/>
             <a:r>
+              <a:rPr sz="1700" b="0" i="1" lang="en-US" altLang="en-US">
+                <a:solidFill>
+                  <a:srgbClr val="566873"/>
+                </a:solidFill>
+                <a:latin typeface="Sarabun"/>
+                <a:ea typeface="Sarabun"/>
+                <a:cs typeface="Sarabun"/>
+              </a:rPr>
+              <a:t>châi</a:t>
+            </a:r>
+          </a:p>
+        </p:txBody>
+      </p:sp>
+      <p:sp>
+        <p:nvSpPr>
+          <p:cNvPr id="10" name="TextBox 9"/>
+          <p:cNvSpPr txBox="1"/>
+          <p:nvPr/>
+        </p:nvSpPr>
+        <p:spPr>
+          <a:xfrm>
+            <a:off x="1078992" y="2203704"/>
+            <a:ext cx="6613855" cy="274320"/>
+          </a:xfrm>
+          <a:prstGeom prst="rect">
+            <a:avLst/>
+          </a:prstGeom>
+          <a:noFill/>
+        </p:spPr>
+        <p:txBody>
+          <a:bodyPr wrap="square" anchor="t">
+            <a:spAutoFit/>
+          </a:bodyPr>
+          <a:lstStyle/>
+          <a:p>
+            <a:pPr algn="l"/>
+            <a:r>
               <a:rPr sz="1700" b="0" i="0" lang="en-US" altLang="en-US">
                 <a:solidFill>
                   <a:srgbClr val="82909A"/>
@@ -7884,7 +8144,7 @@
       </p:sp>
       <p:sp>
         <p:nvSpPr>
-          <p:cNvPr id="10" name="Rounded Rectangle 9"/>
+          <p:cNvPr id="11" name="Rounded Rectangle 10"/>
           <p:cNvSpPr/>
           <p:nvPr/>
         </p:nvSpPr>
@@ -7925,7 +8185,7 @@
       </p:sp>
       <p:sp>
         <p:nvSpPr>
-          <p:cNvPr id="11" name="Rectangle 10"/>
+          <p:cNvPr id="12" name="Rectangle 11"/>
           <p:cNvSpPr/>
           <p:nvPr/>
         </p:nvSpPr>
@@ -7968,14 +8228,14 @@
       </p:sp>
       <p:sp>
         <p:nvSpPr>
-          <p:cNvPr id="12" name="TextBox 11"/>
+          <p:cNvPr id="13" name="TextBox 12"/>
           <p:cNvSpPr txBox="1"/>
           <p:nvPr/>
         </p:nvSpPr>
         <p:spPr>
           <a:xfrm>
-            <a:off x="1078992" y="3191256"/>
-            <a:ext cx="6613855" cy="658368"/>
+            <a:off x="1078992" y="3218688"/>
+            <a:ext cx="6613855" cy="320040"/>
           </a:xfrm>
           <a:prstGeom prst="rect">
             <a:avLst/>
@@ -7990,7 +8250,7 @@
           <a:p>
             <a:pPr algn="l"/>
             <a:r>
-              <a:rPr sz="3600" b="1" i="0" lang="th-TH" altLang="en-US">
+              <a:rPr sz="1700" b="0" i="0" lang="th-TH" altLang="en-US">
                 <a:solidFill>
                   <a:srgbClr val="24333D"/>
                 </a:solidFill>
@@ -8000,29 +8260,18 @@
               </a:rPr>
               <a:t>ไม่ใช่</a:t>
             </a:r>
-            <a:r>
-              <a:rPr sz="2230" b="0" i="1" lang="en-US" altLang="en-US">
-                <a:solidFill>
-                  <a:srgbClr val="566873"/>
-                </a:solidFill>
-                <a:latin typeface="Sarabun"/>
-                <a:ea typeface="Sarabun"/>
-                <a:cs typeface="Sarabun"/>
-              </a:rPr>
-              <a:t> (mâi châi)</a:t>
-            </a:r>
-          </a:p>
-        </p:txBody>
-      </p:sp>
-      <p:sp>
-        <p:nvSpPr>
-          <p:cNvPr id="13" name="TextBox 12"/>
+          </a:p>
+        </p:txBody>
+      </p:sp>
+      <p:sp>
+        <p:nvSpPr>
+          <p:cNvPr id="14" name="TextBox 13"/>
           <p:cNvSpPr txBox="1"/>
           <p:nvPr/>
         </p:nvSpPr>
         <p:spPr>
           <a:xfrm>
-            <a:off x="1078992" y="3959352"/>
+            <a:off x="1078992" y="3584448"/>
             <a:ext cx="6613855" cy="274320"/>
           </a:xfrm>
           <a:prstGeom prst="rect">
@@ -8038,6 +8287,43 @@
           <a:p>
             <a:pPr algn="l"/>
             <a:r>
+              <a:rPr sz="1700" b="0" i="1" lang="en-US" altLang="en-US">
+                <a:solidFill>
+                  <a:srgbClr val="566873"/>
+                </a:solidFill>
+                <a:latin typeface="Sarabun"/>
+                <a:ea typeface="Sarabun"/>
+                <a:cs typeface="Sarabun"/>
+              </a:rPr>
+              <a:t>mâi châi</a:t>
+            </a:r>
+          </a:p>
+        </p:txBody>
+      </p:sp>
+      <p:sp>
+        <p:nvSpPr>
+          <p:cNvPr id="15" name="TextBox 14"/>
+          <p:cNvSpPr txBox="1"/>
+          <p:nvPr/>
+        </p:nvSpPr>
+        <p:spPr>
+          <a:xfrm>
+            <a:off x="1078992" y="3959352"/>
+            <a:ext cx="6613855" cy="274320"/>
+          </a:xfrm>
+          <a:prstGeom prst="rect">
+            <a:avLst/>
+          </a:prstGeom>
+          <a:noFill/>
+        </p:spPr>
+        <p:txBody>
+          <a:bodyPr wrap="square" anchor="t">
+            <a:spAutoFit/>
+          </a:bodyPr>
+          <a:lstStyle/>
+          <a:p>
+            <a:pPr algn="l"/>
+            <a:r>
               <a:rPr sz="1700" b="0" i="0" lang="en-US" altLang="en-US">
                 <a:solidFill>
                   <a:srgbClr val="82909A"/>
@@ -8053,7 +8339,7 @@
       </p:sp>
       <p:sp>
         <p:nvSpPr>
-          <p:cNvPr id="14" name="Rounded Rectangle 13"/>
+          <p:cNvPr id="16" name="Rounded Rectangle 15"/>
           <p:cNvSpPr/>
           <p:nvPr/>
         </p:nvSpPr>
@@ -8094,7 +8380,7 @@
       </p:sp>
       <p:sp>
         <p:nvSpPr>
-          <p:cNvPr id="15" name="Rectangle 14"/>
+          <p:cNvPr id="17" name="Rectangle 16"/>
           <p:cNvSpPr/>
           <p:nvPr/>
         </p:nvSpPr>
@@ -8137,14 +8423,14 @@
       </p:sp>
       <p:sp>
         <p:nvSpPr>
-          <p:cNvPr id="16" name="TextBox 15"/>
+          <p:cNvPr id="18" name="TextBox 17"/>
           <p:cNvSpPr txBox="1"/>
           <p:nvPr/>
         </p:nvSpPr>
         <p:spPr>
           <a:xfrm>
-            <a:off x="1078992" y="4946904"/>
-            <a:ext cx="6613855" cy="658368"/>
+            <a:off x="1078992" y="4974336"/>
+            <a:ext cx="6613855" cy="320040"/>
           </a:xfrm>
           <a:prstGeom prst="rect">
             <a:avLst/>
@@ -8159,7 +8445,7 @@
           <a:p>
             <a:pPr algn="l"/>
             <a:r>
-              <a:rPr sz="3600" b="1" i="0" lang="th-TH" altLang="en-US">
+              <a:rPr sz="1700" b="0" i="0" lang="th-TH" altLang="en-US">
                 <a:solidFill>
                   <a:srgbClr val="24333D"/>
                 </a:solidFill>
@@ -8169,8 +8455,34 @@
               </a:rPr>
               <a:t>ไม่เป็นไร</a:t>
             </a:r>
-            <a:r>
-              <a:rPr sz="2230" b="0" i="1" lang="en-US" altLang="en-US">
+          </a:p>
+        </p:txBody>
+      </p:sp>
+      <p:sp>
+        <p:nvSpPr>
+          <p:cNvPr id="19" name="TextBox 18"/>
+          <p:cNvSpPr txBox="1"/>
+          <p:nvPr/>
+        </p:nvSpPr>
+        <p:spPr>
+          <a:xfrm>
+            <a:off x="1078992" y="5340096"/>
+            <a:ext cx="6613855" cy="274320"/>
+          </a:xfrm>
+          <a:prstGeom prst="rect">
+            <a:avLst/>
+          </a:prstGeom>
+          <a:noFill/>
+        </p:spPr>
+        <p:txBody>
+          <a:bodyPr wrap="square" anchor="t">
+            <a:spAutoFit/>
+          </a:bodyPr>
+          <a:lstStyle/>
+          <a:p>
+            <a:pPr algn="l"/>
+            <a:r>
+              <a:rPr sz="1700" b="0" i="1" lang="en-US" altLang="en-US">
                 <a:solidFill>
                   <a:srgbClr val="566873"/>
                 </a:solidFill>
@@ -8178,14 +8490,14 @@
                 <a:ea typeface="Sarabun"/>
                 <a:cs typeface="Sarabun"/>
               </a:rPr>
-              <a:t> (mâi bpen rai)</a:t>
-            </a:r>
-          </a:p>
-        </p:txBody>
-      </p:sp>
-      <p:sp>
-        <p:nvSpPr>
-          <p:cNvPr id="17" name="TextBox 16"/>
+              <a:t>mâi bpen rai</a:t>
+            </a:r>
+          </a:p>
+        </p:txBody>
+      </p:sp>
+      <p:sp>
+        <p:nvSpPr>
+          <p:cNvPr id="20" name="TextBox 19"/>
           <p:cNvSpPr txBox="1"/>
           <p:nvPr/>
         </p:nvSpPr>
@@ -8512,8 +8824,8 @@
         </p:nvSpPr>
         <p:spPr>
           <a:xfrm>
-            <a:off x="1078992" y="1435608"/>
-            <a:ext cx="6613855" cy="658368"/>
+            <a:off x="1078992" y="1463040"/>
+            <a:ext cx="6613855" cy="320040"/>
           </a:xfrm>
           <a:prstGeom prst="rect">
             <a:avLst/>
@@ -8528,7 +8840,7 @@
           <a:p>
             <a:pPr algn="l"/>
             <a:r>
-              <a:rPr sz="3600" b="1" i="0" lang="th-TH" altLang="en-US">
+              <a:rPr sz="1700" b="0" i="0" lang="th-TH" altLang="en-US">
                 <a:solidFill>
                   <a:srgbClr val="24333D"/>
                 </a:solidFill>
@@ -8537,17 +8849,6 @@
                 <a:cs typeface="Sarabun"/>
               </a:rPr>
               <a:t>ครับ</a:t>
-            </a:r>
-            <a:r>
-              <a:rPr sz="2230" b="0" i="1" lang="en-US" altLang="en-US">
-                <a:solidFill>
-                  <a:srgbClr val="566873"/>
-                </a:solidFill>
-                <a:latin typeface="Sarabun"/>
-                <a:ea typeface="Sarabun"/>
-                <a:cs typeface="Sarabun"/>
-              </a:rPr>
-              <a:t> (khráp)</a:t>
             </a:r>
           </a:p>
         </p:txBody>
@@ -8560,7 +8861,7 @@
         </p:nvSpPr>
         <p:spPr>
           <a:xfrm>
-            <a:off x="1078992" y="2203704"/>
+            <a:off x="1078992" y="1828800"/>
             <a:ext cx="6613855" cy="274320"/>
           </a:xfrm>
           <a:prstGeom prst="rect">
@@ -8576,6 +8877,43 @@
           <a:p>
             <a:pPr algn="l"/>
             <a:r>
+              <a:rPr sz="1700" b="0" i="1" lang="en-US" altLang="en-US">
+                <a:solidFill>
+                  <a:srgbClr val="566873"/>
+                </a:solidFill>
+                <a:latin typeface="Sarabun"/>
+                <a:ea typeface="Sarabun"/>
+                <a:cs typeface="Sarabun"/>
+              </a:rPr>
+              <a:t>khráp</a:t>
+            </a:r>
+          </a:p>
+        </p:txBody>
+      </p:sp>
+      <p:sp>
+        <p:nvSpPr>
+          <p:cNvPr id="10" name="TextBox 9"/>
+          <p:cNvSpPr txBox="1"/>
+          <p:nvPr/>
+        </p:nvSpPr>
+        <p:spPr>
+          <a:xfrm>
+            <a:off x="1078992" y="2203704"/>
+            <a:ext cx="6613855" cy="274320"/>
+          </a:xfrm>
+          <a:prstGeom prst="rect">
+            <a:avLst/>
+          </a:prstGeom>
+          <a:noFill/>
+        </p:spPr>
+        <p:txBody>
+          <a:bodyPr wrap="square" anchor="t">
+            <a:spAutoFit/>
+          </a:bodyPr>
+          <a:lstStyle/>
+          <a:p>
+            <a:pPr algn="l"/>
+            <a:r>
               <a:rPr sz="1700" b="0" i="0" lang="en-US" altLang="en-US">
                 <a:solidFill>
                   <a:srgbClr val="82909A"/>
@@ -8591,7 +8929,7 @@
       </p:sp>
       <p:sp>
         <p:nvSpPr>
-          <p:cNvPr id="10" name="Rounded Rectangle 9"/>
+          <p:cNvPr id="11" name="Rounded Rectangle 10"/>
           <p:cNvSpPr/>
           <p:nvPr/>
         </p:nvSpPr>
@@ -8632,7 +8970,7 @@
       </p:sp>
       <p:sp>
         <p:nvSpPr>
-          <p:cNvPr id="11" name="Rectangle 10"/>
+          <p:cNvPr id="12" name="Rectangle 11"/>
           <p:cNvSpPr/>
           <p:nvPr/>
         </p:nvSpPr>
@@ -8675,14 +9013,14 @@
       </p:sp>
       <p:sp>
         <p:nvSpPr>
-          <p:cNvPr id="12" name="TextBox 11"/>
+          <p:cNvPr id="13" name="TextBox 12"/>
           <p:cNvSpPr txBox="1"/>
           <p:nvPr/>
         </p:nvSpPr>
         <p:spPr>
           <a:xfrm>
-            <a:off x="1078992" y="3191256"/>
-            <a:ext cx="6613855" cy="658368"/>
+            <a:off x="1078992" y="3218688"/>
+            <a:ext cx="6613855" cy="320040"/>
           </a:xfrm>
           <a:prstGeom prst="rect">
             <a:avLst/>
@@ -8697,7 +9035,7 @@
           <a:p>
             <a:pPr algn="l"/>
             <a:r>
-              <a:rPr sz="3600" b="1" i="0" lang="th-TH" altLang="en-US">
+              <a:rPr sz="1700" b="0" i="0" lang="th-TH" altLang="en-US">
                 <a:solidFill>
                   <a:srgbClr val="24333D"/>
                 </a:solidFill>
@@ -8707,29 +9045,18 @@
               </a:rPr>
               <a:t>ค่ะ</a:t>
             </a:r>
-            <a:r>
-              <a:rPr sz="2230" b="0" i="1" lang="en-US" altLang="en-US">
-                <a:solidFill>
-                  <a:srgbClr val="566873"/>
-                </a:solidFill>
-                <a:latin typeface="Sarabun"/>
-                <a:ea typeface="Sarabun"/>
-                <a:cs typeface="Sarabun"/>
-              </a:rPr>
-              <a:t> (khâ)</a:t>
-            </a:r>
-          </a:p>
-        </p:txBody>
-      </p:sp>
-      <p:sp>
-        <p:nvSpPr>
-          <p:cNvPr id="13" name="TextBox 12"/>
+          </a:p>
+        </p:txBody>
+      </p:sp>
+      <p:sp>
+        <p:nvSpPr>
+          <p:cNvPr id="14" name="TextBox 13"/>
           <p:cNvSpPr txBox="1"/>
           <p:nvPr/>
         </p:nvSpPr>
         <p:spPr>
           <a:xfrm>
-            <a:off x="1078992" y="3959352"/>
+            <a:off x="1078992" y="3584448"/>
             <a:ext cx="6613855" cy="274320"/>
           </a:xfrm>
           <a:prstGeom prst="rect">
@@ -8745,6 +9072,43 @@
           <a:p>
             <a:pPr algn="l"/>
             <a:r>
+              <a:rPr sz="1700" b="0" i="1" lang="en-US" altLang="en-US">
+                <a:solidFill>
+                  <a:srgbClr val="566873"/>
+                </a:solidFill>
+                <a:latin typeface="Sarabun"/>
+                <a:ea typeface="Sarabun"/>
+                <a:cs typeface="Sarabun"/>
+              </a:rPr>
+              <a:t>khâ</a:t>
+            </a:r>
+          </a:p>
+        </p:txBody>
+      </p:sp>
+      <p:sp>
+        <p:nvSpPr>
+          <p:cNvPr id="15" name="TextBox 14"/>
+          <p:cNvSpPr txBox="1"/>
+          <p:nvPr/>
+        </p:nvSpPr>
+        <p:spPr>
+          <a:xfrm>
+            <a:off x="1078992" y="3959352"/>
+            <a:ext cx="6613855" cy="274320"/>
+          </a:xfrm>
+          <a:prstGeom prst="rect">
+            <a:avLst/>
+          </a:prstGeom>
+          <a:noFill/>
+        </p:spPr>
+        <p:txBody>
+          <a:bodyPr wrap="square" anchor="t">
+            <a:spAutoFit/>
+          </a:bodyPr>
+          <a:lstStyle/>
+          <a:p>
+            <a:pPr algn="l"/>
+            <a:r>
               <a:rPr sz="1700" b="0" i="0" lang="en-US" altLang="en-US">
                 <a:solidFill>
                   <a:srgbClr val="82909A"/>
@@ -8760,7 +9124,7 @@
       </p:sp>
       <p:sp>
         <p:nvSpPr>
-          <p:cNvPr id="14" name="Rounded Rectangle 13"/>
+          <p:cNvPr id="16" name="Rounded Rectangle 15"/>
           <p:cNvSpPr/>
           <p:nvPr/>
         </p:nvSpPr>
@@ -8801,7 +9165,7 @@
       </p:sp>
       <p:sp>
         <p:nvSpPr>
-          <p:cNvPr id="15" name="Rectangle 14"/>
+          <p:cNvPr id="17" name="Rectangle 16"/>
           <p:cNvSpPr/>
           <p:nvPr/>
         </p:nvSpPr>
@@ -8844,14 +9208,14 @@
       </p:sp>
       <p:sp>
         <p:nvSpPr>
-          <p:cNvPr id="16" name="TextBox 15"/>
+          <p:cNvPr id="18" name="TextBox 17"/>
           <p:cNvSpPr txBox="1"/>
           <p:nvPr/>
         </p:nvSpPr>
         <p:spPr>
           <a:xfrm>
-            <a:off x="1078992" y="4946904"/>
-            <a:ext cx="6613855" cy="658368"/>
+            <a:off x="1078992" y="4974336"/>
+            <a:ext cx="6613855" cy="320040"/>
           </a:xfrm>
           <a:prstGeom prst="rect">
             <a:avLst/>
@@ -8866,7 +9230,7 @@
           <a:p>
             <a:pPr algn="l"/>
             <a:r>
-              <a:rPr sz="3600" b="1" i="0" lang="th-TH" altLang="en-US">
+              <a:rPr sz="1700" b="0" i="0" lang="th-TH" altLang="en-US">
                 <a:solidFill>
                   <a:srgbClr val="24333D"/>
                 </a:solidFill>
@@ -8876,8 +9240,34 @@
               </a:rPr>
               <a:t>ขอบคุณ</a:t>
             </a:r>
-            <a:r>
-              <a:rPr sz="2230" b="0" i="1" lang="en-US" altLang="en-US">
+          </a:p>
+        </p:txBody>
+      </p:sp>
+      <p:sp>
+        <p:nvSpPr>
+          <p:cNvPr id="19" name="TextBox 18"/>
+          <p:cNvSpPr txBox="1"/>
+          <p:nvPr/>
+        </p:nvSpPr>
+        <p:spPr>
+          <a:xfrm>
+            <a:off x="1078992" y="5340096"/>
+            <a:ext cx="6613855" cy="274320"/>
+          </a:xfrm>
+          <a:prstGeom prst="rect">
+            <a:avLst/>
+          </a:prstGeom>
+          <a:noFill/>
+        </p:spPr>
+        <p:txBody>
+          <a:bodyPr wrap="square" anchor="t">
+            <a:spAutoFit/>
+          </a:bodyPr>
+          <a:lstStyle/>
+          <a:p>
+            <a:pPr algn="l"/>
+            <a:r>
+              <a:rPr sz="1700" b="0" i="1" lang="en-US" altLang="en-US">
                 <a:solidFill>
                   <a:srgbClr val="566873"/>
                 </a:solidFill>
@@ -8885,14 +9275,14 @@
                 <a:ea typeface="Sarabun"/>
                 <a:cs typeface="Sarabun"/>
               </a:rPr>
-              <a:t> (khàawp-khun)</a:t>
-            </a:r>
-          </a:p>
-        </p:txBody>
-      </p:sp>
-      <p:sp>
-        <p:nvSpPr>
-          <p:cNvPr id="17" name="TextBox 16"/>
+              <a:t>khàawp-khun</a:t>
+            </a:r>
+          </a:p>
+        </p:txBody>
+      </p:sp>
+      <p:sp>
+        <p:nvSpPr>
+          <p:cNvPr id="20" name="TextBox 19"/>
           <p:cNvSpPr txBox="1"/>
           <p:nvPr/>
         </p:nvSpPr>
@@ -9192,7 +9582,7 @@
         <p:spPr>
           <a:xfrm>
             <a:off x="1965960" y="1069848"/>
-            <a:ext cx="5836615" cy="384048"/>
+            <a:ext cx="5836615" cy="228600"/>
           </a:xfrm>
           <a:prstGeom prst="rect">
             <a:avLst/>
@@ -9207,7 +9597,7 @@
           <a:p>
             <a:pPr algn="l"/>
             <a:r>
-              <a:rPr sz="2600" b="1" i="0" lang="th-TH" altLang="en-US">
+              <a:rPr sz="1700" b="0" i="0" lang="th-TH" altLang="en-US">
                 <a:solidFill>
                   <a:srgbClr val="24333D"/>
                 </a:solidFill>
@@ -9216,17 +9606,6 @@
                 <a:cs typeface="Sarabun"/>
               </a:rPr>
               <a:t>ขอโทษครับ สวัสดีครับ</a:t>
-            </a:r>
-            <a:r>
-              <a:rPr sz="1700" b="0" i="1" lang="en-US" altLang="en-US">
-                <a:solidFill>
-                  <a:srgbClr val="566873"/>
-                </a:solidFill>
-                <a:latin typeface="Sarabun"/>
-                <a:ea typeface="Sarabun"/>
-                <a:cs typeface="Sarabun"/>
-              </a:rPr>
-              <a:t> (khǎaw-thôot khráp sà-wàt-dii khráp)</a:t>
             </a:r>
           </a:p>
         </p:txBody>
@@ -9239,8 +9618,8 @@
         </p:nvSpPr>
         <p:spPr>
           <a:xfrm>
-            <a:off x="1965960" y="1353312"/>
-            <a:ext cx="5836615" cy="228600"/>
+            <a:off x="1965960" y="1298448"/>
+            <a:ext cx="5836615" cy="201168"/>
           </a:xfrm>
           <a:prstGeom prst="rect">
             <a:avLst/>
@@ -9255,7 +9634,7 @@
           <a:p>
             <a:pPr algn="l"/>
             <a:r>
-              <a:rPr sz="1300" b="0" i="0" lang="en-US" altLang="en-US">
+              <a:rPr sz="1700" b="0" i="1" lang="en-US" altLang="en-US">
                 <a:solidFill>
                   <a:srgbClr val="566873"/>
                 </a:solidFill>
@@ -9263,6 +9642,43 @@
                 <a:ea typeface="Sarabun"/>
                 <a:cs typeface="Sarabun"/>
               </a:rPr>
+              <a:t>khǎaw-thôot khráp sà-wàt-dii khráp</a:t>
+            </a:r>
+          </a:p>
+        </p:txBody>
+      </p:sp>
+      <p:sp>
+        <p:nvSpPr>
+          <p:cNvPr id="9" name="TextBox 8"/>
+          <p:cNvSpPr txBox="1"/>
+          <p:nvPr/>
+        </p:nvSpPr>
+        <p:spPr>
+          <a:xfrm>
+            <a:off x="1965960" y="1499616"/>
+            <a:ext cx="5836615" cy="201168"/>
+          </a:xfrm>
+          <a:prstGeom prst="rect">
+            <a:avLst/>
+          </a:prstGeom>
+          <a:noFill/>
+        </p:spPr>
+        <p:txBody>
+          <a:bodyPr wrap="square" anchor="t">
+            <a:spAutoFit/>
+          </a:bodyPr>
+          <a:lstStyle/>
+          <a:p>
+            <a:pPr algn="l"/>
+            <a:r>
+              <a:rPr sz="1700" b="0" i="0" lang="en-US" altLang="en-US">
+                <a:solidFill>
+                  <a:srgbClr val="566873"/>
+                </a:solidFill>
+                <a:latin typeface="Sarabun"/>
+                <a:ea typeface="Sarabun"/>
+                <a:cs typeface="Sarabun"/>
+              </a:rPr>
               <a:t>Excuse me, hello.</a:t>
             </a:r>
           </a:p>
@@ -9270,13 +9686,13 @@
       </p:sp>
       <p:sp>
         <p:nvSpPr>
-          <p:cNvPr id="9" name="Rounded Rectangle 8"/>
+          <p:cNvPr id="10" name="Rounded Rectangle 9"/>
           <p:cNvSpPr/>
           <p:nvPr/>
         </p:nvSpPr>
         <p:spPr>
           <a:xfrm>
-            <a:off x="731520" y="1874520"/>
+            <a:off x="731520" y="2011680"/>
             <a:ext cx="1051560" cy="274320"/>
           </a:xfrm>
           <a:prstGeom prst="roundRect">
@@ -9326,14 +9742,14 @@
       </p:sp>
       <p:sp>
         <p:nvSpPr>
-          <p:cNvPr id="10" name="TextBox 9"/>
+          <p:cNvPr id="11" name="TextBox 10"/>
           <p:cNvSpPr txBox="1"/>
           <p:nvPr/>
         </p:nvSpPr>
         <p:spPr>
           <a:xfrm>
-            <a:off x="1965960" y="1847088"/>
-            <a:ext cx="5836615" cy="384048"/>
+            <a:off x="1965960" y="1984248"/>
+            <a:ext cx="5836615" cy="228600"/>
           </a:xfrm>
           <a:prstGeom prst="rect">
             <a:avLst/>
@@ -9348,7 +9764,7 @@
           <a:p>
             <a:pPr algn="l"/>
             <a:r>
-              <a:rPr sz="2600" b="1" i="0" lang="th-TH" altLang="en-US">
+              <a:rPr sz="1700" b="0" i="0" lang="th-TH" altLang="en-US">
                 <a:solidFill>
                   <a:srgbClr val="24333D"/>
                 </a:solidFill>
@@ -9358,30 +9774,19 @@
               </a:rPr>
               <a:t>สวัสดีค่ะ</a:t>
             </a:r>
-            <a:r>
-              <a:rPr sz="1700" b="0" i="1" lang="en-US" altLang="en-US">
-                <a:solidFill>
-                  <a:srgbClr val="566873"/>
-                </a:solidFill>
-                <a:latin typeface="Sarabun"/>
-                <a:ea typeface="Sarabun"/>
-                <a:cs typeface="Sarabun"/>
-              </a:rPr>
-              <a:t> (sà-wàt-dii khâ)</a:t>
-            </a:r>
-          </a:p>
-        </p:txBody>
-      </p:sp>
-      <p:sp>
-        <p:nvSpPr>
-          <p:cNvPr id="11" name="TextBox 10"/>
+          </a:p>
+        </p:txBody>
+      </p:sp>
+      <p:sp>
+        <p:nvSpPr>
+          <p:cNvPr id="12" name="TextBox 11"/>
           <p:cNvSpPr txBox="1"/>
           <p:nvPr/>
         </p:nvSpPr>
         <p:spPr>
           <a:xfrm>
-            <a:off x="1965960" y="2130552"/>
-            <a:ext cx="5836615" cy="228600"/>
+            <a:off x="1965960" y="2212848"/>
+            <a:ext cx="5836615" cy="201168"/>
           </a:xfrm>
           <a:prstGeom prst="rect">
             <a:avLst/>
@@ -9396,7 +9801,7 @@
           <a:p>
             <a:pPr algn="l"/>
             <a:r>
-              <a:rPr sz="1300" b="0" i="0" lang="en-US" altLang="en-US">
+              <a:rPr sz="1700" b="0" i="1" lang="en-US" altLang="en-US">
                 <a:solidFill>
                   <a:srgbClr val="566873"/>
                 </a:solidFill>
@@ -9404,6 +9809,43 @@
                 <a:ea typeface="Sarabun"/>
                 <a:cs typeface="Sarabun"/>
               </a:rPr>
+              <a:t>sà-wàt-dii khâ</a:t>
+            </a:r>
+          </a:p>
+        </p:txBody>
+      </p:sp>
+      <p:sp>
+        <p:nvSpPr>
+          <p:cNvPr id="13" name="TextBox 12"/>
+          <p:cNvSpPr txBox="1"/>
+          <p:nvPr/>
+        </p:nvSpPr>
+        <p:spPr>
+          <a:xfrm>
+            <a:off x="1965960" y="2414016"/>
+            <a:ext cx="5836615" cy="201168"/>
+          </a:xfrm>
+          <a:prstGeom prst="rect">
+            <a:avLst/>
+          </a:prstGeom>
+          <a:noFill/>
+        </p:spPr>
+        <p:txBody>
+          <a:bodyPr wrap="square" anchor="t">
+            <a:spAutoFit/>
+          </a:bodyPr>
+          <a:lstStyle/>
+          <a:p>
+            <a:pPr algn="l"/>
+            <a:r>
+              <a:rPr sz="1700" b="0" i="0" lang="en-US" altLang="en-US">
+                <a:solidFill>
+                  <a:srgbClr val="566873"/>
+                </a:solidFill>
+                <a:latin typeface="Sarabun"/>
+                <a:ea typeface="Sarabun"/>
+                <a:cs typeface="Sarabun"/>
+              </a:rPr>
               <a:t>Hello.</a:t>
             </a:r>
           </a:p>
@@ -9411,13 +9853,13 @@
       </p:sp>
       <p:sp>
         <p:nvSpPr>
-          <p:cNvPr id="12" name="Rounded Rectangle 11"/>
+          <p:cNvPr id="14" name="Rounded Rectangle 13"/>
           <p:cNvSpPr/>
           <p:nvPr/>
         </p:nvSpPr>
         <p:spPr>
           <a:xfrm>
-            <a:off x="731520" y="2651760"/>
+            <a:off x="731520" y="2926080"/>
             <a:ext cx="1051560" cy="274320"/>
           </a:xfrm>
           <a:prstGeom prst="roundRect">
@@ -9467,14 +9909,14 @@
       </p:sp>
       <p:sp>
         <p:nvSpPr>
-          <p:cNvPr id="13" name="TextBox 12"/>
+          <p:cNvPr id="15" name="TextBox 14"/>
           <p:cNvSpPr txBox="1"/>
           <p:nvPr/>
         </p:nvSpPr>
         <p:spPr>
           <a:xfrm>
-            <a:off x="1965960" y="2624328"/>
-            <a:ext cx="5836615" cy="384048"/>
+            <a:off x="1965960" y="2898648"/>
+            <a:ext cx="8823960" cy="228600"/>
           </a:xfrm>
           <a:prstGeom prst="rect">
             <a:avLst/>
@@ -9489,7 +9931,7 @@
           <a:p>
             <a:pPr algn="l"/>
             <a:r>
-              <a:rPr sz="2600" b="1" i="0" lang="th-TH" altLang="en-US">
+              <a:rPr sz="1700" b="0" i="0" lang="th-TH" altLang="en-US">
                 <a:solidFill>
                   <a:srgbClr val="24333D"/>
                 </a:solidFill>
@@ -9499,30 +9941,19 @@
               </a:rPr>
               <a:t>นี่ใช่ไหมครับ</a:t>
             </a:r>
-            <a:r>
-              <a:rPr sz="1700" b="0" i="1" lang="en-US" altLang="en-US">
-                <a:solidFill>
-                  <a:srgbClr val="566873"/>
-                </a:solidFill>
-                <a:latin typeface="Sarabun"/>
-                <a:ea typeface="Sarabun"/>
-                <a:cs typeface="Sarabun"/>
-              </a:rPr>
-              <a:t> (nîi châi mái khráp)</a:t>
-            </a:r>
-          </a:p>
-        </p:txBody>
-      </p:sp>
-      <p:sp>
-        <p:nvSpPr>
-          <p:cNvPr id="14" name="TextBox 13"/>
+          </a:p>
+        </p:txBody>
+      </p:sp>
+      <p:sp>
+        <p:nvSpPr>
+          <p:cNvPr id="16" name="TextBox 15"/>
           <p:cNvSpPr txBox="1"/>
           <p:nvPr/>
         </p:nvSpPr>
         <p:spPr>
           <a:xfrm>
-            <a:off x="1965960" y="2907792"/>
-            <a:ext cx="5836615" cy="228600"/>
+            <a:off x="1965960" y="3127248"/>
+            <a:ext cx="8823960" cy="201168"/>
           </a:xfrm>
           <a:prstGeom prst="rect">
             <a:avLst/>
@@ -9537,7 +9968,7 @@
           <a:p>
             <a:pPr algn="l"/>
             <a:r>
-              <a:rPr sz="1300" b="0" i="0" lang="en-US" altLang="en-US">
+              <a:rPr sz="1700" b="0" i="1" lang="en-US" altLang="en-US">
                 <a:solidFill>
                   <a:srgbClr val="566873"/>
                 </a:solidFill>
@@ -9545,6 +9976,43 @@
                 <a:ea typeface="Sarabun"/>
                 <a:cs typeface="Sarabun"/>
               </a:rPr>
+              <a:t>nîi châi mái khráp</a:t>
+            </a:r>
+          </a:p>
+        </p:txBody>
+      </p:sp>
+      <p:sp>
+        <p:nvSpPr>
+          <p:cNvPr id="17" name="TextBox 16"/>
+          <p:cNvSpPr txBox="1"/>
+          <p:nvPr/>
+        </p:nvSpPr>
+        <p:spPr>
+          <a:xfrm>
+            <a:off x="1965960" y="3328416"/>
+            <a:ext cx="8823960" cy="201168"/>
+          </a:xfrm>
+          <a:prstGeom prst="rect">
+            <a:avLst/>
+          </a:prstGeom>
+          <a:noFill/>
+        </p:spPr>
+        <p:txBody>
+          <a:bodyPr wrap="square" anchor="t">
+            <a:spAutoFit/>
+          </a:bodyPr>
+          <a:lstStyle/>
+          <a:p>
+            <a:pPr algn="l"/>
+            <a:r>
+              <a:rPr sz="1700" b="0" i="0" lang="en-US" altLang="en-US">
+                <a:solidFill>
+                  <a:srgbClr val="566873"/>
+                </a:solidFill>
+                <a:latin typeface="Sarabun"/>
+                <a:ea typeface="Sarabun"/>
+                <a:cs typeface="Sarabun"/>
+              </a:rPr>
               <a:t>Is this right?</a:t>
             </a:r>
           </a:p>
@@ -9552,13 +10020,13 @@
       </p:sp>
       <p:sp>
         <p:nvSpPr>
-          <p:cNvPr id="15" name="Rounded Rectangle 14"/>
+          <p:cNvPr id="18" name="Rounded Rectangle 17"/>
           <p:cNvSpPr/>
           <p:nvPr/>
         </p:nvSpPr>
         <p:spPr>
           <a:xfrm>
-            <a:off x="731520" y="3429000"/>
+            <a:off x="731520" y="3840480"/>
             <a:ext cx="1051560" cy="274320"/>
           </a:xfrm>
           <a:prstGeom prst="roundRect">
@@ -9608,14 +10076,14 @@
       </p:sp>
       <p:sp>
         <p:nvSpPr>
-          <p:cNvPr id="16" name="TextBox 15"/>
+          <p:cNvPr id="19" name="TextBox 18"/>
           <p:cNvSpPr txBox="1"/>
           <p:nvPr/>
         </p:nvSpPr>
         <p:spPr>
           <a:xfrm>
-            <a:off x="1965960" y="3401568"/>
-            <a:ext cx="8823960" cy="384048"/>
+            <a:off x="1965960" y="3813048"/>
+            <a:ext cx="8823960" cy="228600"/>
           </a:xfrm>
           <a:prstGeom prst="rect">
             <a:avLst/>
@@ -9630,7 +10098,7 @@
           <a:p>
             <a:pPr algn="l"/>
             <a:r>
-              <a:rPr sz="2600" b="1" i="0" lang="th-TH" altLang="en-US">
+              <a:rPr sz="1700" b="0" i="0" lang="th-TH" altLang="en-US">
                 <a:solidFill>
                   <a:srgbClr val="24333D"/>
                 </a:solidFill>
@@ -9640,30 +10108,19 @@
               </a:rPr>
               <a:t>ใช่ค่ะ</a:t>
             </a:r>
-            <a:r>
-              <a:rPr sz="1700" b="0" i="1" lang="en-US" altLang="en-US">
-                <a:solidFill>
-                  <a:srgbClr val="566873"/>
-                </a:solidFill>
-                <a:latin typeface="Sarabun"/>
-                <a:ea typeface="Sarabun"/>
-                <a:cs typeface="Sarabun"/>
-              </a:rPr>
-              <a:t> (châi khâ)</a:t>
-            </a:r>
-          </a:p>
-        </p:txBody>
-      </p:sp>
-      <p:sp>
-        <p:nvSpPr>
-          <p:cNvPr id="17" name="TextBox 16"/>
+          </a:p>
+        </p:txBody>
+      </p:sp>
+      <p:sp>
+        <p:nvSpPr>
+          <p:cNvPr id="20" name="TextBox 19"/>
           <p:cNvSpPr txBox="1"/>
           <p:nvPr/>
         </p:nvSpPr>
         <p:spPr>
           <a:xfrm>
-            <a:off x="1965960" y="3685032"/>
-            <a:ext cx="8823960" cy="228600"/>
+            <a:off x="1965960" y="4041648"/>
+            <a:ext cx="8823960" cy="201168"/>
           </a:xfrm>
           <a:prstGeom prst="rect">
             <a:avLst/>
@@ -9678,7 +10135,7 @@
           <a:p>
             <a:pPr algn="l"/>
             <a:r>
-              <a:rPr sz="1300" b="0" i="0" lang="en-US" altLang="en-US">
+              <a:rPr sz="1700" b="0" i="1" lang="en-US" altLang="en-US">
                 <a:solidFill>
                   <a:srgbClr val="566873"/>
                 </a:solidFill>
@@ -9686,6 +10143,43 @@
                 <a:ea typeface="Sarabun"/>
                 <a:cs typeface="Sarabun"/>
               </a:rPr>
+              <a:t>châi khâ</a:t>
+            </a:r>
+          </a:p>
+        </p:txBody>
+      </p:sp>
+      <p:sp>
+        <p:nvSpPr>
+          <p:cNvPr id="21" name="TextBox 20"/>
+          <p:cNvSpPr txBox="1"/>
+          <p:nvPr/>
+        </p:nvSpPr>
+        <p:spPr>
+          <a:xfrm>
+            <a:off x="1965960" y="4242816"/>
+            <a:ext cx="8823960" cy="201168"/>
+          </a:xfrm>
+          <a:prstGeom prst="rect">
+            <a:avLst/>
+          </a:prstGeom>
+          <a:noFill/>
+        </p:spPr>
+        <p:txBody>
+          <a:bodyPr wrap="square" anchor="t">
+            <a:spAutoFit/>
+          </a:bodyPr>
+          <a:lstStyle/>
+          <a:p>
+            <a:pPr algn="l"/>
+            <a:r>
+              <a:rPr sz="1700" b="0" i="0" lang="en-US" altLang="en-US">
+                <a:solidFill>
+                  <a:srgbClr val="566873"/>
+                </a:solidFill>
+                <a:latin typeface="Sarabun"/>
+                <a:ea typeface="Sarabun"/>
+                <a:cs typeface="Sarabun"/>
+              </a:rPr>
               <a:t>Yes.</a:t>
             </a:r>
           </a:p>
@@ -9693,13 +10187,13 @@
       </p:sp>
       <p:sp>
         <p:nvSpPr>
-          <p:cNvPr id="18" name="Rounded Rectangle 17"/>
+          <p:cNvPr id="22" name="Rounded Rectangle 21"/>
           <p:cNvSpPr/>
           <p:nvPr/>
         </p:nvSpPr>
         <p:spPr>
           <a:xfrm>
-            <a:off x="731520" y="4206240"/>
+            <a:off x="731520" y="4754880"/>
             <a:ext cx="1051560" cy="274320"/>
           </a:xfrm>
           <a:prstGeom prst="roundRect">
@@ -9749,14 +10243,14 @@
       </p:sp>
       <p:sp>
         <p:nvSpPr>
-          <p:cNvPr id="19" name="TextBox 18"/>
+          <p:cNvPr id="23" name="TextBox 22"/>
           <p:cNvSpPr txBox="1"/>
           <p:nvPr/>
         </p:nvSpPr>
         <p:spPr>
           <a:xfrm>
-            <a:off x="1965960" y="4178808"/>
-            <a:ext cx="8823960" cy="384048"/>
+            <a:off x="1965960" y="4727448"/>
+            <a:ext cx="8823960" cy="228600"/>
           </a:xfrm>
           <a:prstGeom prst="rect">
             <a:avLst/>
@@ -9771,7 +10265,7 @@
           <a:p>
             <a:pPr algn="l"/>
             <a:r>
-              <a:rPr sz="2600" b="1" i="0" lang="th-TH" altLang="en-US">
+              <a:rPr sz="1700" b="0" i="0" lang="th-TH" altLang="en-US">
                 <a:solidFill>
                   <a:srgbClr val="24333D"/>
                 </a:solidFill>
@@ -9781,30 +10275,19 @@
               </a:rPr>
               <a:t>ขอบคุณครับ</a:t>
             </a:r>
-            <a:r>
-              <a:rPr sz="1700" b="0" i="1" lang="en-US" altLang="en-US">
-                <a:solidFill>
-                  <a:srgbClr val="566873"/>
-                </a:solidFill>
-                <a:latin typeface="Sarabun"/>
-                <a:ea typeface="Sarabun"/>
-                <a:cs typeface="Sarabun"/>
-              </a:rPr>
-              <a:t> (khàawp-khun khráp)</a:t>
-            </a:r>
-          </a:p>
-        </p:txBody>
-      </p:sp>
-      <p:sp>
-        <p:nvSpPr>
-          <p:cNvPr id="20" name="TextBox 19"/>
+          </a:p>
+        </p:txBody>
+      </p:sp>
+      <p:sp>
+        <p:nvSpPr>
+          <p:cNvPr id="24" name="TextBox 23"/>
           <p:cNvSpPr txBox="1"/>
           <p:nvPr/>
         </p:nvSpPr>
         <p:spPr>
           <a:xfrm>
-            <a:off x="1965960" y="4462272"/>
-            <a:ext cx="8823960" cy="228600"/>
+            <a:off x="1965960" y="4956048"/>
+            <a:ext cx="8823960" cy="201168"/>
           </a:xfrm>
           <a:prstGeom prst="rect">
             <a:avLst/>
@@ -9819,7 +10302,7 @@
           <a:p>
             <a:pPr algn="l"/>
             <a:r>
-              <a:rPr sz="1300" b="0" i="0" lang="en-US" altLang="en-US">
+              <a:rPr sz="1700" b="0" i="1" lang="en-US" altLang="en-US">
                 <a:solidFill>
                   <a:srgbClr val="566873"/>
                 </a:solidFill>
@@ -9827,77 +10310,21 @@
                 <a:ea typeface="Sarabun"/>
                 <a:cs typeface="Sarabun"/>
               </a:rPr>
-              <a:t>Thank you.</a:t>
-            </a:r>
-          </a:p>
-        </p:txBody>
-      </p:sp>
-      <p:sp>
-        <p:nvSpPr>
-          <p:cNvPr id="21" name="Rounded Rectangle 20"/>
-          <p:cNvSpPr/>
-          <p:nvPr/>
-        </p:nvSpPr>
-        <p:spPr>
-          <a:xfrm>
-            <a:off x="731520" y="4983480"/>
-            <a:ext cx="1051560" cy="274320"/>
-          </a:xfrm>
-          <a:prstGeom prst="roundRect">
-            <a:avLst>
-              <a:gd name="adj" fmla="val 28000"/>
-            </a:avLst>
-          </a:prstGeom>
-          <a:solidFill>
-            <a:srgbClr val="C96F4A"/>
-          </a:solidFill>
-          <a:ln>
-            <a:noFill/>
-          </a:ln>
-        </p:spPr>
-        <p:style>
-          <a:lnRef idx="1">
-            <a:schemeClr val="accent1"/>
-          </a:lnRef>
-          <a:fillRef idx="3">
-            <a:schemeClr val="accent1"/>
-          </a:fillRef>
-          <a:effectRef idx="2">
-            <a:schemeClr val="accent1"/>
-          </a:effectRef>
-          <a:fontRef idx="minor">
-            <a:schemeClr val="lt1"/>
-          </a:fontRef>
-        </p:style>
-        <p:txBody>
-          <a:bodyPr rtlCol="0" anchor="ctr" wrap="none"/>
-          <a:lstStyle/>
-          <a:p>
-            <a:pPr algn="ctr"/>
-            <a:r>
-              <a:rPr sz="1200" b="1" lang="en-US" altLang="en-US">
-                <a:solidFill>
-                  <a:srgbClr val="FFFFFF"/>
-                </a:solidFill>
-                <a:latin typeface="Sarabun"/>
-                <a:ea typeface="Sarabun"/>
-                <a:cs typeface="Sarabun"/>
-              </a:rPr>
-              <a:t>Staff</a:t>
-            </a:r>
-          </a:p>
-        </p:txBody>
-      </p:sp>
-      <p:sp>
-        <p:nvSpPr>
-          <p:cNvPr id="22" name="TextBox 21"/>
+              <a:t>khàawp-khun khráp</a:t>
+            </a:r>
+          </a:p>
+        </p:txBody>
+      </p:sp>
+      <p:sp>
+        <p:nvSpPr>
+          <p:cNvPr id="25" name="TextBox 24"/>
           <p:cNvSpPr txBox="1"/>
           <p:nvPr/>
         </p:nvSpPr>
         <p:spPr>
           <a:xfrm>
-            <a:off x="1965960" y="4956048"/>
-            <a:ext cx="8823960" cy="384048"/>
+            <a:off x="1965960" y="5157216"/>
+            <a:ext cx="8823960" cy="201168"/>
           </a:xfrm>
           <a:prstGeom prst="rect">
             <a:avLst/>
@@ -9912,18 +10339,7 @@
           <a:p>
             <a:pPr algn="l"/>
             <a:r>
-              <a:rPr sz="2600" b="1" i="0" lang="th-TH" altLang="en-US">
-                <a:solidFill>
-                  <a:srgbClr val="24333D"/>
-                </a:solidFill>
-                <a:latin typeface="Sarabun"/>
-                <a:ea typeface="Sarabun"/>
-                <a:cs typeface="Sarabun"/>
-              </a:rPr>
-              <a:t>ไม่เป็นไรค่ะ</a:t>
-            </a:r>
-            <a:r>
-              <a:rPr sz="1700" b="0" i="1" lang="en-US" altLang="en-US">
+              <a:rPr sz="1700" b="0" i="0" lang="en-US" altLang="en-US">
                 <a:solidFill>
                   <a:srgbClr val="566873"/>
                 </a:solidFill>
@@ -9931,44 +10347,7 @@
                 <a:ea typeface="Sarabun"/>
                 <a:cs typeface="Sarabun"/>
               </a:rPr>
-              <a:t> (mâi bpen rai khâ)</a:t>
-            </a:r>
-          </a:p>
-        </p:txBody>
-      </p:sp>
-      <p:sp>
-        <p:nvSpPr>
-          <p:cNvPr id="23" name="TextBox 22"/>
-          <p:cNvSpPr txBox="1"/>
-          <p:nvPr/>
-        </p:nvSpPr>
-        <p:spPr>
-          <a:xfrm>
-            <a:off x="1965960" y="5239512"/>
-            <a:ext cx="8823960" cy="228600"/>
-          </a:xfrm>
-          <a:prstGeom prst="rect">
-            <a:avLst/>
-          </a:prstGeom>
-          <a:noFill/>
-        </p:spPr>
-        <p:txBody>
-          <a:bodyPr wrap="square" anchor="t">
-            <a:spAutoFit/>
-          </a:bodyPr>
-          <a:lstStyle/>
-          <a:p>
-            <a:pPr algn="l"/>
-            <a:r>
-              <a:rPr sz="1300" b="0" i="0" lang="en-US" altLang="en-US">
-                <a:solidFill>
-                  <a:srgbClr val="566873"/>
-                </a:solidFill>
-                <a:latin typeface="Sarabun"/>
-                <a:ea typeface="Sarabun"/>
-                <a:cs typeface="Sarabun"/>
-              </a:rPr>
-              <a:t>No problem.</a:t>
+              <a:t>Thank you.</a:t>
             </a:r>
           </a:p>
         </p:txBody>

--- a/course/modules/M01/L001/M01-L001-canva-deck.pptx
+++ b/course/modules/M01/L001/M01-L001-canva-deck.pptx
@@ -8,7 +8,7 @@
     <p:sldId id="256" r:id="rId7"/>
     <p:sldId id="257" r:id="rId8"/>
     <p:sldId id="258" r:id="rId9"/>
-    <p:sldId id="259" r:id="rId11"/>
+    <p:sldId id="259" r:id="rId10"/>
     <p:sldId id="260" r:id="rId12"/>
     <p:sldId id="261" r:id="rId13"/>
     <p:sldId id="262" r:id="rId14"/>
@@ -518,17 +518,17 @@
           </a:p>
           <a:p>
             <a:r>
-              <a:t>• Listen and repeat three times: สวัสดี, สวัสดีครับ, สวัสดีค่ะ.</a:t>
-            </a:r>
-          </a:p>
-          <a:p>
-            <a:r>
-              <a:t>• Your turn: I will point to a male or female role. Say the correct full greeting aloud before I show the answer.</a:t>
-            </a:r>
-          </a:p>
-          <a:p>
-            <a:r>
-              <a:t>• Substitution drill: replace the ending — say สวัสดี with ครับ, now with ค่ะ.</a:t>
+              <a:t>• Listen and repeat: ครับ khráp. Now: ค่ะ khâ. Repeat each three times.</a:t>
+            </a:r>
+          </a:p>
+          <a:p>
+            <a:r>
+              <a:t>• Substitution drill: I say สวัสดี — you add ครับ. Now I say สวัสดี again — you add ค่ะ.</a:t>
+            </a:r>
+          </a:p>
+          <a:p>
+            <a:r>
+              <a:t>• Your turn: I point to male or female. Say the correct full greeting: สวัสดีครับ or สวัสดีค่ะ.</a:t>
             </a:r>
           </a:p>
           <a:p/>
@@ -606,17 +606,17 @@
           </a:p>
           <a:p>
             <a:r>
-              <a:t>• Discrimination drill: I describe a situation. Choose ขอบคุณ or ขอโทษ — which one fits? Say it aloud.</a:t>
-            </a:r>
-          </a:p>
-          <a:p>
-            <a:r>
-              <a:t>• Response-building drill: I say ขอโทษครับ. Your turn — what do you say back? Pause and answer before I show it.</a:t>
-            </a:r>
-          </a:p>
-          <a:p>
-            <a:r>
-              <a:t>• Substitution drill: say ขอบคุณ with ครับ, now with ค่ะ. Now say ขอโทษ with ครับ, now with ค่ะ.</a:t>
+              <a:t>• Listen and repeat: ขอบคุณ khàawp-khun. Now: ขอโทษ khǎaw-thôot. Say each three times.</a:t>
+            </a:r>
+          </a:p>
+          <a:p>
+            <a:r>
+              <a:t>• Discrimination drill: I describe a situation. You choose ขอบคุณ or ขอโทษ — say it aloud. Situation 1: someone helps you carry a bag. Situation 2: you need to pass through a crowd.</a:t>
+            </a:r>
+          </a:p>
+          <a:p>
+            <a:r>
+              <a:t>• Substitution drill: say ขอบคุณ with ครับ. Now with ค่ะ. Say ขอโทษ with ครับ. Now with ค่ะ.</a:t>
             </a:r>
           </a:p>
           <a:p/>
@@ -694,17 +694,17 @@
           </a:p>
           <a:p>
             <a:r>
-              <a:t>• Substitution drill: I say a bare phrase. You add the correct polite ending. สวัสดี — your turn. ขอบคุณ — your turn. ขอโทษ — your turn.</a:t>
-            </a:r>
-          </a:p>
-          <a:p>
-            <a:r>
-              <a:t>• Discrimination drill: I say ค่ะ or คะ. Is the speaker making a statement or asking a question? Choose before I tell you.</a:t>
-            </a:r>
-          </a:p>
-          <a:p>
-            <a:r>
-              <a:t>• Substitution drill round 2: now try it with ไม่เป็นไร and ใช่. Add ครับ or ค่ะ.</a:t>
+              <a:t>• Listen and repeat: ไม่เป็นไร mâi bpen rai. Say it three times. Now: ใช่ châi. Three times. Now: ไม่ใช่ mâi châi. Three times.</a:t>
+            </a:r>
+          </a:p>
+          <a:p>
+            <a:r>
+              <a:t>• Response-building drill: I say ขอโทษครับ — what do you say back? Pause and answer. I say ขอบคุณค่ะ — what do you say back?</a:t>
+            </a:r>
+          </a:p>
+          <a:p>
+            <a:r>
+              <a:t>• Pause-and-produce: is this สวัสดี? ใช่ or ไม่ใช่? Say it aloud before I show the answer.</a:t>
             </a:r>
           </a:p>
           <a:p/>
@@ -782,100 +782,12 @@
           </a:p>
           <a:p>
             <a:r>
-              <a:t>• Pause-and-produce: I ask a yes/no question. Say ใช่ or ไม่ใช่ before I show the answer.</a:t>
-            </a:r>
-          </a:p>
-          <a:p>
-            <a:r>
-              <a:t>• Response-building: I say ขอโทษครับ. What do you say back? Then I say ขอบคุณค่ะ. What do you say back?</a:t>
-            </a:r>
-          </a:p>
-          <a:p>
-            <a:r>
-              <a:t>• Substitution drill: say ใช่ with ครับ, now with ค่ะ. Say ไม่ใช่ with ครับ, now with ค่ะ.</a:t>
-            </a:r>
-          </a:p>
-          <a:p/>
-        </p:txBody>
-      </p:sp>
-      <p:sp>
-        <p:nvSpPr>
-          <p:cNvPr id="4" name="Slide Number Placeholder 3"/>
-          <p:cNvSpPr>
-            <a:spLocks noGrp="1"/>
-          </p:cNvSpPr>
-          <p:nvPr>
-            <p:ph type="sldNum" idx="5" sz="quarter"/>
-          </p:nvPr>
-        </p:nvSpPr>
-        <p:spPr/>
-      </p:sp>
-    </p:spTree>
-  </p:cSld>
-  <p:clrMapOvr>
-    <a:masterClrMapping/>
-  </p:clrMapOvr>
-</p:notes>
-</file>
-
-<file path=ppt/notesSlides/notesSlide5.xml><?xml version="1.0" encoding="utf-8"?>
-<p:notes xmlns:a="http://schemas.openxmlformats.org/drawingml/2006/main" xmlns:p="http://schemas.openxmlformats.org/presentationml/2006/main" xmlns:r="http://schemas.openxmlformats.org/officeDocument/2006/relationships">
-  <p:cSld>
-    <p:spTree>
-      <p:nvGrpSpPr>
-        <p:cNvPr id="1" name=""/>
-        <p:cNvGrpSpPr/>
-        <p:nvPr/>
-      </p:nvGrpSpPr>
-      <p:grpSpPr>
-        <a:xfrm>
-          <a:off x="0" y="0"/>
-          <a:ext cx="0" cy="0"/>
-          <a:chOff x="0" y="0"/>
-          <a:chExt cx="0" cy="0"/>
-        </a:xfrm>
-      </p:grpSpPr>
-      <p:sp>
-        <p:nvSpPr>
-          <p:cNvPr id="2" name="Slide Image Placeholder 1"/>
-          <p:cNvSpPr>
-            <a:spLocks noGrp="1"/>
-          </p:cNvSpPr>
-          <p:nvPr>
-            <p:ph type="sldImg" idx="2"/>
-          </p:nvPr>
-        </p:nvSpPr>
-        <p:spPr/>
-      </p:sp>
-      <p:sp>
-        <p:nvSpPr>
-          <p:cNvPr id="3" name="Notes Placeholder 2"/>
-          <p:cNvSpPr>
-            <a:spLocks noGrp="1"/>
-          </p:cNvSpPr>
-          <p:nvPr>
-            <p:ph type="body" idx="3" sz="quarter"/>
-          </p:nvPr>
-        </p:nvSpPr>
-        <p:spPr/>
-        <p:txBody>
-          <a:bodyPr/>
-          <a:lstStyle/>
-          <a:p/>
-          <a:p/>
-          <a:p>
-            <a:r>
-              <a:t>[Practice — moved to notes, no room on slide]</a:t>
-            </a:r>
-          </a:p>
-          <a:p>
-            <a:r>
-              <a:t>• Tone echo: I say ครับ khráp. Repeat it. Now I say ค่ะ khâ. Repeat it. Can you feel the difference?</a:t>
-            </a:r>
-          </a:p>
-          <a:p>
-            <a:r>
-              <a:t>• Minimal pair choice: I say two words. Which one is ครับ and which is ค่ะ? Point to the answer.</a:t>
+              <a:t>• Tone echo drill: I say ครับ khráp — repeat it. Now I say ค่ะ khâ — repeat it. Feel the difference in your voice.</a:t>
+            </a:r>
+          </a:p>
+          <a:p>
+            <a:r>
+              <a:t>• Minimal pair choice: I say two words. Which one is the high tone ครับ and which is the falling tone ค่ะ? Point before I tell you.</a:t>
             </a:r>
           </a:p>
           <a:p/>
@@ -4647,7 +4559,7 @@
                 <a:ea typeface="Sarabun"/>
                 <a:cs typeface="Sarabun"/>
               </a:rPr>
-              <a:t>By the end, you can open, repair, thank, and close a tiny first-contact exchange politely.</a:t>
+              <a:t>By the end, you can greet, thank, apologise, respond to thanks, and answer yes or no politely.</a:t>
             </a:r>
           </a:p>
         </p:txBody>
@@ -5587,7 +5499,29 @@
                 <a:ea typeface="Sarabun"/>
                 <a:cs typeface="Sarabun"/>
               </a:rPr>
-              <a:t>Say hello the Thai way</a:t>
+              <a:t>Your first Thai word: </a:t>
+            </a:r>
+            <a:r>
+              <a:rPr sz="3600" b="1" i="0" lang="th-TH" altLang="en-US">
+                <a:solidFill>
+                  <a:srgbClr val="24333D"/>
+                </a:solidFill>
+                <a:latin typeface="Sarabun"/>
+                <a:ea typeface="Sarabun"/>
+                <a:cs typeface="Sarabun"/>
+              </a:rPr>
+              <a:t>สวัสดี</a:t>
+            </a:r>
+            <a:r>
+              <a:rPr sz="2230" b="0" i="1" lang="en-US" altLang="en-US">
+                <a:solidFill>
+                  <a:srgbClr val="566873"/>
+                </a:solidFill>
+                <a:latin typeface="Sarabun"/>
+                <a:ea typeface="Sarabun"/>
+                <a:cs typeface="Sarabun"/>
+              </a:rPr>
+              <a:t> (sà-wàt-dii)</a:t>
             </a:r>
           </a:p>
         </p:txBody>
@@ -5789,19 +5723,58 @@
       </p:sp>
       <p:sp>
         <p:nvSpPr>
-          <p:cNvPr id="11" name="Rounded Rectangle 10"/>
+          <p:cNvPr id="11" name="TextBox 10"/>
+          <p:cNvSpPr txBox="1"/>
+          <p:nvPr/>
+        </p:nvSpPr>
+        <p:spPr>
+          <a:xfrm>
+            <a:off x="932688" y="3364992"/>
+            <a:ext cx="9692640" cy="228600"/>
+          </a:xfrm>
+          <a:prstGeom prst="rect">
+            <a:avLst/>
+          </a:prstGeom>
+          <a:noFill/>
+        </p:spPr>
+        <p:txBody>
+          <a:bodyPr wrap="square" anchor="t">
+            <a:spAutoFit/>
+          </a:bodyPr>
+          <a:lstStyle/>
+          <a:p>
+            <a:pPr algn="l"/>
+            <a:r>
+              <a:rPr sz="1700" b="1" i="0" lang="en-US" altLang="en-US">
+                <a:solidFill>
+                  <a:srgbClr val="C96F4A"/>
+                </a:solidFill>
+                <a:latin typeface="Sarabun"/>
+                <a:ea typeface="Sarabun"/>
+                <a:cs typeface="Sarabun"/>
+              </a:rPr>
+              <a:t>Practice</a:t>
+            </a:r>
+          </a:p>
+        </p:txBody>
+      </p:sp>
+      <p:sp>
+        <p:nvSpPr>
+          <p:cNvPr id="12" name="Oval 11"/>
           <p:cNvSpPr/>
           <p:nvPr/>
         </p:nvSpPr>
         <p:spPr>
           <a:xfrm>
-            <a:off x="731520" y="3081528"/>
-            <a:ext cx="7071055" cy="1572768"/>
-          </a:xfrm>
-          <a:prstGeom prst="roundRect">
-            <a:avLst/>
-          </a:prstGeom>
-          <a:noFill/>
+            <a:off x="932688" y="3749040"/>
+            <a:ext cx="82296" cy="82296"/>
+          </a:xfrm>
+          <a:prstGeom prst="ellipse">
+            <a:avLst/>
+          </a:prstGeom>
+          <a:solidFill>
+            <a:srgbClr val="C96F4A"/>
+          </a:solidFill>
           <a:ln>
             <a:noFill/>
           </a:ln>
@@ -5830,20 +5803,90 @@
       </p:sp>
       <p:sp>
         <p:nvSpPr>
-          <p:cNvPr id="12" name="Rectangle 11"/>
+          <p:cNvPr id="13" name="TextBox 12"/>
+          <p:cNvSpPr txBox="1"/>
+          <p:nvPr/>
+        </p:nvSpPr>
+        <p:spPr>
+          <a:xfrm>
+            <a:off x="1078992" y="3657600"/>
+            <a:ext cx="9555480" cy="274320"/>
+          </a:xfrm>
+          <a:prstGeom prst="rect">
+            <a:avLst/>
+          </a:prstGeom>
+          <a:noFill/>
+        </p:spPr>
+        <p:txBody>
+          <a:bodyPr wrap="square" anchor="t">
+            <a:spAutoFit/>
+          </a:bodyPr>
+          <a:lstStyle/>
+          <a:p>
+            <a:pPr algn="l"/>
+            <a:r>
+              <a:rPr sz="1700" b="0" i="0" lang="en-US" altLang="en-US">
+                <a:solidFill>
+                  <a:srgbClr val="24333D"/>
+                </a:solidFill>
+                <a:latin typeface="Sarabun"/>
+                <a:ea typeface="Sarabun"/>
+                <a:cs typeface="Sarabun"/>
+              </a:rPr>
+              <a:t>Listen and repeat: </a:t>
+            </a:r>
+            <a:r>
+              <a:rPr sz="1700" b="0" i="0" lang="th-TH" altLang="en-US">
+                <a:solidFill>
+                  <a:srgbClr val="24333D"/>
+                </a:solidFill>
+                <a:latin typeface="Sarabun"/>
+                <a:ea typeface="Sarabun"/>
+                <a:cs typeface="Sarabun"/>
+              </a:rPr>
+              <a:t>สวัสดี</a:t>
+            </a:r>
+            <a:r>
+              <a:rPr sz="1700" b="0" i="1" lang="en-US" altLang="en-US">
+                <a:solidFill>
+                  <a:srgbClr val="566873"/>
+                </a:solidFill>
+                <a:latin typeface="Sarabun"/>
+                <a:ea typeface="Sarabun"/>
+                <a:cs typeface="Sarabun"/>
+              </a:rPr>
+              <a:t> (sà-wàt-dii)</a:t>
+            </a:r>
+            <a:r>
+              <a:rPr sz="1700" b="0" i="0" lang="en-US" altLang="en-US">
+                <a:solidFill>
+                  <a:srgbClr val="24333D"/>
+                </a:solidFill>
+                <a:latin typeface="Sarabun"/>
+                <a:ea typeface="Sarabun"/>
+                <a:cs typeface="Sarabun"/>
+              </a:rPr>
+              <a:t> sà-wàt-dii. Say it three times.</a:t>
+            </a:r>
+          </a:p>
+        </p:txBody>
+      </p:sp>
+      <p:sp>
+        <p:nvSpPr>
+          <p:cNvPr id="14" name="Oval 13"/>
           <p:cNvSpPr/>
           <p:nvPr/>
         </p:nvSpPr>
         <p:spPr>
           <a:xfrm>
-            <a:off x="868680" y="3282696"/>
-            <a:ext cx="73152" cy="1143000"/>
-          </a:xfrm>
-          <a:prstGeom prst="rect">
+            <a:off x="932688" y="4078224"/>
+            <a:ext cx="82296" cy="82296"/>
+          </a:xfrm>
+          <a:prstGeom prst="ellipse">
             <a:avLst/>
           </a:prstGeom>
           <a:solidFill>
-            <a:srgbClr val="355C7D"/>
+            <a:srgbClr val="C96F4A"/>
           </a:solidFill>
           <a:ln>
             <a:noFill/>
@@ -5873,14 +5916,14 @@
       </p:sp>
       <p:sp>
         <p:nvSpPr>
-          <p:cNvPr id="13" name="TextBox 12"/>
+          <p:cNvPr id="15" name="TextBox 14"/>
           <p:cNvSpPr txBox="1"/>
           <p:nvPr/>
         </p:nvSpPr>
         <p:spPr>
           <a:xfrm>
-            <a:off x="1078992" y="3218688"/>
-            <a:ext cx="6613855" cy="320040"/>
+            <a:off x="1078992" y="3986784"/>
+            <a:ext cx="9555480" cy="475488"/>
           </a:xfrm>
           <a:prstGeom prst="rect">
             <a:avLst/>
@@ -5895,7 +5938,7 @@
           <a:p>
             <a:pPr algn="l"/>
             <a:r>
-              <a:rPr sz="1700" b="0" i="0" lang="th-TH" altLang="en-US">
+              <a:rPr sz="1700" b="0" i="0" lang="en-US" altLang="en-US">
                 <a:solidFill>
                   <a:srgbClr val="24333D"/>
                 </a:solidFill>
@@ -5903,276 +5946,7 @@
                 <a:ea typeface="Sarabun"/>
                 <a:cs typeface="Sarabun"/>
               </a:rPr>
-              <a:t>สวัสดีครับ</a:t>
-            </a:r>
-          </a:p>
-        </p:txBody>
-      </p:sp>
-      <p:sp>
-        <p:nvSpPr>
-          <p:cNvPr id="14" name="TextBox 13"/>
-          <p:cNvSpPr txBox="1"/>
-          <p:nvPr/>
-        </p:nvSpPr>
-        <p:spPr>
-          <a:xfrm>
-            <a:off x="1078992" y="3584448"/>
-            <a:ext cx="6613855" cy="274320"/>
-          </a:xfrm>
-          <a:prstGeom prst="rect">
-            <a:avLst/>
-          </a:prstGeom>
-          <a:noFill/>
-        </p:spPr>
-        <p:txBody>
-          <a:bodyPr wrap="square" anchor="t">
-            <a:spAutoFit/>
-          </a:bodyPr>
-          <a:lstStyle/>
-          <a:p>
-            <a:pPr algn="l"/>
-            <a:r>
-              <a:rPr sz="1700" b="0" i="1" lang="en-US" altLang="en-US">
-                <a:solidFill>
-                  <a:srgbClr val="566873"/>
-                </a:solidFill>
-                <a:latin typeface="Sarabun"/>
-                <a:ea typeface="Sarabun"/>
-                <a:cs typeface="Sarabun"/>
-              </a:rPr>
-              <a:t>sà-wàt-dii khráp</a:t>
-            </a:r>
-          </a:p>
-        </p:txBody>
-      </p:sp>
-      <p:sp>
-        <p:nvSpPr>
-          <p:cNvPr id="15" name="TextBox 14"/>
-          <p:cNvSpPr txBox="1"/>
-          <p:nvPr/>
-        </p:nvSpPr>
-        <p:spPr>
-          <a:xfrm>
-            <a:off x="1078992" y="3959352"/>
-            <a:ext cx="6613855" cy="274320"/>
-          </a:xfrm>
-          <a:prstGeom prst="rect">
-            <a:avLst/>
-          </a:prstGeom>
-          <a:noFill/>
-        </p:spPr>
-        <p:txBody>
-          <a:bodyPr wrap="square" anchor="t">
-            <a:spAutoFit/>
-          </a:bodyPr>
-          <a:lstStyle/>
-          <a:p>
-            <a:pPr algn="l"/>
-            <a:r>
-              <a:rPr sz="1700" b="0" i="0" lang="en-US" altLang="en-US">
-                <a:solidFill>
-                  <a:srgbClr val="82909A"/>
-                </a:solidFill>
-                <a:latin typeface="Sarabun"/>
-                <a:ea typeface="Sarabun"/>
-                <a:cs typeface="Sarabun"/>
-              </a:rPr>
-              <a:t>hello (male speaker)</a:t>
-            </a:r>
-          </a:p>
-        </p:txBody>
-      </p:sp>
-      <p:sp>
-        <p:nvSpPr>
-          <p:cNvPr id="16" name="Rounded Rectangle 15"/>
-          <p:cNvSpPr/>
-          <p:nvPr/>
-        </p:nvSpPr>
-        <p:spPr>
-          <a:xfrm>
-            <a:off x="731520" y="4837176"/>
-            <a:ext cx="7071055" cy="1572768"/>
-          </a:xfrm>
-          <a:prstGeom prst="roundRect">
-            <a:avLst/>
-          </a:prstGeom>
-          <a:noFill/>
-          <a:ln>
-            <a:noFill/>
-          </a:ln>
-        </p:spPr>
-        <p:style>
-          <a:lnRef idx="1">
-            <a:schemeClr val="accent1"/>
-          </a:lnRef>
-          <a:fillRef idx="3">
-            <a:schemeClr val="accent1"/>
-          </a:fillRef>
-          <a:effectRef idx="2">
-            <a:schemeClr val="accent1"/>
-          </a:effectRef>
-          <a:fontRef idx="minor">
-            <a:schemeClr val="lt1"/>
-          </a:fontRef>
-        </p:style>
-        <p:txBody>
-          <a:bodyPr rtlCol="0" anchor="ctr"/>
-          <a:lstStyle/>
-          <a:p>
-            <a:pPr algn="ctr"/>
-          </a:p>
-        </p:txBody>
-      </p:sp>
-      <p:sp>
-        <p:nvSpPr>
-          <p:cNvPr id="17" name="Rectangle 16"/>
-          <p:cNvSpPr/>
-          <p:nvPr/>
-        </p:nvSpPr>
-        <p:spPr>
-          <a:xfrm>
-            <a:off x="868680" y="5038344"/>
-            <a:ext cx="73152" cy="1143000"/>
-          </a:xfrm>
-          <a:prstGeom prst="rect">
-            <a:avLst/>
-          </a:prstGeom>
-          <a:solidFill>
-            <a:srgbClr val="355C7D"/>
-          </a:solidFill>
-          <a:ln>
-            <a:noFill/>
-          </a:ln>
-        </p:spPr>
-        <p:style>
-          <a:lnRef idx="1">
-            <a:schemeClr val="accent1"/>
-          </a:lnRef>
-          <a:fillRef idx="3">
-            <a:schemeClr val="accent1"/>
-          </a:fillRef>
-          <a:effectRef idx="2">
-            <a:schemeClr val="accent1"/>
-          </a:effectRef>
-          <a:fontRef idx="minor">
-            <a:schemeClr val="lt1"/>
-          </a:fontRef>
-        </p:style>
-        <p:txBody>
-          <a:bodyPr rtlCol="0" anchor="ctr"/>
-          <a:lstStyle/>
-          <a:p>
-            <a:pPr algn="ctr"/>
-          </a:p>
-        </p:txBody>
-      </p:sp>
-      <p:sp>
-        <p:nvSpPr>
-          <p:cNvPr id="18" name="TextBox 17"/>
-          <p:cNvSpPr txBox="1"/>
-          <p:nvPr/>
-        </p:nvSpPr>
-        <p:spPr>
-          <a:xfrm>
-            <a:off x="1078992" y="4974336"/>
-            <a:ext cx="6613855" cy="320040"/>
-          </a:xfrm>
-          <a:prstGeom prst="rect">
-            <a:avLst/>
-          </a:prstGeom>
-          <a:noFill/>
-        </p:spPr>
-        <p:txBody>
-          <a:bodyPr wrap="square" anchor="t">
-            <a:spAutoFit/>
-          </a:bodyPr>
-          <a:lstStyle/>
-          <a:p>
-            <a:pPr algn="l"/>
-            <a:r>
-              <a:rPr sz="1700" b="0" i="0" lang="th-TH" altLang="en-US">
-                <a:solidFill>
-                  <a:srgbClr val="24333D"/>
-                </a:solidFill>
-                <a:latin typeface="Sarabun"/>
-                <a:ea typeface="Sarabun"/>
-                <a:cs typeface="Sarabun"/>
-              </a:rPr>
-              <a:t>สวัสดีค่ะ</a:t>
-            </a:r>
-          </a:p>
-        </p:txBody>
-      </p:sp>
-      <p:sp>
-        <p:nvSpPr>
-          <p:cNvPr id="19" name="TextBox 18"/>
-          <p:cNvSpPr txBox="1"/>
-          <p:nvPr/>
-        </p:nvSpPr>
-        <p:spPr>
-          <a:xfrm>
-            <a:off x="1078992" y="5340096"/>
-            <a:ext cx="6613855" cy="274320"/>
-          </a:xfrm>
-          <a:prstGeom prst="rect">
-            <a:avLst/>
-          </a:prstGeom>
-          <a:noFill/>
-        </p:spPr>
-        <p:txBody>
-          <a:bodyPr wrap="square" anchor="t">
-            <a:spAutoFit/>
-          </a:bodyPr>
-          <a:lstStyle/>
-          <a:p>
-            <a:pPr algn="l"/>
-            <a:r>
-              <a:rPr sz="1700" b="0" i="1" lang="en-US" altLang="en-US">
-                <a:solidFill>
-                  <a:srgbClr val="566873"/>
-                </a:solidFill>
-                <a:latin typeface="Sarabun"/>
-                <a:ea typeface="Sarabun"/>
-                <a:cs typeface="Sarabun"/>
-              </a:rPr>
-              <a:t>sà-wàt-dii khâ</a:t>
-            </a:r>
-          </a:p>
-        </p:txBody>
-      </p:sp>
-      <p:sp>
-        <p:nvSpPr>
-          <p:cNvPr id="20" name="TextBox 19"/>
-          <p:cNvSpPr txBox="1"/>
-          <p:nvPr/>
-        </p:nvSpPr>
-        <p:spPr>
-          <a:xfrm>
-            <a:off x="1078992" y="5715000"/>
-            <a:ext cx="6613855" cy="274320"/>
-          </a:xfrm>
-          <a:prstGeom prst="rect">
-            <a:avLst/>
-          </a:prstGeom>
-          <a:noFill/>
-        </p:spPr>
-        <p:txBody>
-          <a:bodyPr wrap="square" anchor="t">
-            <a:spAutoFit/>
-          </a:bodyPr>
-          <a:lstStyle/>
-          <a:p>
-            <a:pPr algn="l"/>
-            <a:r>
-              <a:rPr sz="1700" b="0" i="0" lang="en-US" altLang="en-US">
-                <a:solidFill>
-                  <a:srgbClr val="82909A"/>
-                </a:solidFill>
-                <a:latin typeface="Sarabun"/>
-                <a:ea typeface="Sarabun"/>
-                <a:cs typeface="Sarabun"/>
-              </a:rPr>
-              <a:t>hello (female speaker)</a:t>
+              <a:t>Pause-and-produce: you walk into a hotel lobby. What do you say? Say it aloud before I show the answer.</a:t>
             </a:r>
           </a:p>
         </p:txBody>
@@ -6364,7 +6138,7 @@
           <a:p>
             <a:pPr algn="l"/>
             <a:r>
-              <a:rPr sz="2800" b="1" i="0" lang="en-US" altLang="en-US">
+              <a:rPr sz="3600" b="1" i="0" lang="en-US" altLang="en-US">
                 <a:solidFill>
                   <a:srgbClr val="24333D"/>
                 </a:solidFill>
@@ -6372,7 +6146,62 @@
                 <a:ea typeface="Sarabun"/>
                 <a:cs typeface="Sarabun"/>
               </a:rPr>
-              <a:t>Thank, apologise, and soften the moment</a:t>
+              <a:t>Polite endings: </a:t>
+            </a:r>
+            <a:r>
+              <a:rPr sz="3600" b="1" i="0" lang="th-TH" altLang="en-US">
+                <a:solidFill>
+                  <a:srgbClr val="24333D"/>
+                </a:solidFill>
+                <a:latin typeface="Sarabun"/>
+                <a:ea typeface="Sarabun"/>
+                <a:cs typeface="Sarabun"/>
+              </a:rPr>
+              <a:t>ครับ</a:t>
+            </a:r>
+            <a:r>
+              <a:rPr sz="2230" b="0" i="1" lang="en-US" altLang="en-US">
+                <a:solidFill>
+                  <a:srgbClr val="566873"/>
+                </a:solidFill>
+                <a:latin typeface="Sarabun"/>
+                <a:ea typeface="Sarabun"/>
+                <a:cs typeface="Sarabun"/>
+              </a:rPr>
+              <a:t> (khráp)</a:t>
+            </a:r>
+            <a:r>
+              <a:rPr sz="3600" b="1" i="0" lang="en-US" altLang="en-US">
+                <a:solidFill>
+                  <a:srgbClr val="24333D"/>
+                </a:solidFill>
+                <a:latin typeface="Sarabun"/>
+                <a:ea typeface="Sarabun"/>
+                <a:cs typeface="Sarabun"/>
+              </a:rPr>
+              <a:t> and </a:t>
+            </a:r>
+            <a:r>
+              <a:rPr sz="3600" b="1" i="0" lang="th-TH" altLang="en-US">
+                <a:solidFill>
+                  <a:srgbClr val="24333D"/>
+                </a:solidFill>
+                <a:latin typeface="Sarabun"/>
+                <a:ea typeface="Sarabun"/>
+                <a:cs typeface="Sarabun"/>
+              </a:rPr>
+              <a:t>ค่ะ</a:t>
+            </a:r>
+            <a:r>
+              <a:rPr sz="2230" b="0" i="1" lang="en-US" altLang="en-US">
+                <a:solidFill>
+                  <a:srgbClr val="566873"/>
+                </a:solidFill>
+                <a:latin typeface="Sarabun"/>
+                <a:ea typeface="Sarabun"/>
+                <a:cs typeface="Sarabun"/>
+              </a:rPr>
+              <a:t> (khâ)</a:t>
             </a:r>
           </a:p>
         </p:txBody>
@@ -6493,7 +6322,7 @@
                 <a:ea typeface="Sarabun"/>
                 <a:cs typeface="Sarabun"/>
               </a:rPr>
-              <a:t>ขอบคุณ</a:t>
+              <a:t>ครับ</a:t>
             </a:r>
           </a:p>
         </p:txBody>
@@ -6530,7 +6359,7 @@
                 <a:ea typeface="Sarabun"/>
                 <a:cs typeface="Sarabun"/>
               </a:rPr>
-              <a:t>khàawp-khun</a:t>
+              <a:t>khráp</a:t>
             </a:r>
           </a:p>
         </p:txBody>
@@ -6567,7 +6396,7 @@
                 <a:ea typeface="Sarabun"/>
                 <a:cs typeface="Sarabun"/>
               </a:rPr>
-              <a:t>thank you</a:t>
+              <a:t>polite ending (male)</a:t>
             </a:r>
           </a:p>
         </p:txBody>
@@ -6580,7 +6409,7 @@
         </p:nvSpPr>
         <p:spPr>
           <a:xfrm>
-            <a:off x="731520" y="3081528"/>
+            <a:off x="731520" y="2606040"/>
             <a:ext cx="7071055" cy="1572768"/>
           </a:xfrm>
           <a:prstGeom prst="roundRect">
@@ -6621,7 +6450,7 @@
         </p:nvSpPr>
         <p:spPr>
           <a:xfrm>
-            <a:off x="868680" y="3282696"/>
+            <a:off x="868680" y="2807208"/>
             <a:ext cx="73152" cy="1143000"/>
           </a:xfrm>
           <a:prstGeom prst="rect">
@@ -6664,7 +6493,7 @@
         </p:nvSpPr>
         <p:spPr>
           <a:xfrm>
-            <a:off x="1078992" y="3218688"/>
+            <a:off x="1078992" y="2743200"/>
             <a:ext cx="6613855" cy="320040"/>
           </a:xfrm>
           <a:prstGeom prst="rect">
@@ -6688,7 +6517,7 @@
                 <a:ea typeface="Sarabun"/>
                 <a:cs typeface="Sarabun"/>
               </a:rPr>
-              <a:t>ขอโทษ</a:t>
+              <a:t>ค่ะ</a:t>
             </a:r>
           </a:p>
         </p:txBody>
@@ -6701,7 +6530,7 @@
         </p:nvSpPr>
         <p:spPr>
           <a:xfrm>
-            <a:off x="1078992" y="3584448"/>
+            <a:off x="1078992" y="3108960"/>
             <a:ext cx="6613855" cy="274320"/>
           </a:xfrm>
           <a:prstGeom prst="rect">
@@ -6725,7 +6554,7 @@
                 <a:ea typeface="Sarabun"/>
                 <a:cs typeface="Sarabun"/>
               </a:rPr>
-              <a:t>khǎaw-thôot</a:t>
+              <a:t>khâ</a:t>
             </a:r>
           </a:p>
         </p:txBody>
@@ -6738,7 +6567,7 @@
         </p:nvSpPr>
         <p:spPr>
           <a:xfrm>
-            <a:off x="1078992" y="3959352"/>
+            <a:off x="1078992" y="3483864"/>
             <a:ext cx="6613855" cy="274320"/>
           </a:xfrm>
           <a:prstGeom prst="rect">
@@ -6762,7 +6591,7 @@
                 <a:ea typeface="Sarabun"/>
                 <a:cs typeface="Sarabun"/>
               </a:rPr>
-              <a:t>excuse me / sorry</a:t>
+              <a:t>polite ending (female)</a:t>
             </a:r>
           </a:p>
         </p:txBody>
@@ -6775,7 +6604,7 @@
         </p:nvSpPr>
         <p:spPr>
           <a:xfrm>
-            <a:off x="731520" y="4837176"/>
+            <a:off x="731520" y="3886200"/>
             <a:ext cx="7071055" cy="1572768"/>
           </a:xfrm>
           <a:prstGeom prst="roundRect">
@@ -6816,7 +6645,7 @@
         </p:nvSpPr>
         <p:spPr>
           <a:xfrm>
-            <a:off x="868680" y="5038344"/>
+            <a:off x="868680" y="4087368"/>
             <a:ext cx="73152" cy="1143000"/>
           </a:xfrm>
           <a:prstGeom prst="rect">
@@ -6859,7 +6688,7 @@
         </p:nvSpPr>
         <p:spPr>
           <a:xfrm>
-            <a:off x="1078992" y="4974336"/>
+            <a:off x="1078992" y="4023360"/>
             <a:ext cx="6613855" cy="320040"/>
           </a:xfrm>
           <a:prstGeom prst="rect">
@@ -6883,7 +6712,7 @@
                 <a:ea typeface="Sarabun"/>
                 <a:cs typeface="Sarabun"/>
               </a:rPr>
-              <a:t>ไม่เป็นไร</a:t>
+              <a:t>สวัสดีครับ</a:t>
             </a:r>
           </a:p>
         </p:txBody>
@@ -6896,7 +6725,7 @@
         </p:nvSpPr>
         <p:spPr>
           <a:xfrm>
-            <a:off x="1078992" y="5340096"/>
+            <a:off x="1078992" y="4389120"/>
             <a:ext cx="6613855" cy="274320"/>
           </a:xfrm>
           <a:prstGeom prst="rect">
@@ -6920,7 +6749,7 @@
                 <a:ea typeface="Sarabun"/>
                 <a:cs typeface="Sarabun"/>
               </a:rPr>
-              <a:t>mâi bpen rai</a:t>
+              <a:t>sà-wàt-dii khráp</a:t>
             </a:r>
           </a:p>
         </p:txBody>
@@ -6933,7 +6762,7 @@
         </p:nvSpPr>
         <p:spPr>
           <a:xfrm>
-            <a:off x="1078992" y="5715000"/>
+            <a:off x="1078992" y="4764024"/>
             <a:ext cx="6613855" cy="274320"/>
           </a:xfrm>
           <a:prstGeom prst="rect">
@@ -6957,7 +6786,202 @@
                 <a:ea typeface="Sarabun"/>
                 <a:cs typeface="Sarabun"/>
               </a:rPr>
-              <a:t>it is okay / no problem</a:t>
+              <a:t>hello (male, polite)</a:t>
+            </a:r>
+          </a:p>
+        </p:txBody>
+      </p:sp>
+      <p:sp>
+        <p:nvSpPr>
+          <p:cNvPr id="21" name="Rounded Rectangle 20"/>
+          <p:cNvSpPr/>
+          <p:nvPr/>
+        </p:nvSpPr>
+        <p:spPr>
+          <a:xfrm>
+            <a:off x="731520" y="5166360"/>
+            <a:ext cx="7071055" cy="1572768"/>
+          </a:xfrm>
+          <a:prstGeom prst="roundRect">
+            <a:avLst/>
+          </a:prstGeom>
+          <a:noFill/>
+          <a:ln>
+            <a:noFill/>
+          </a:ln>
+        </p:spPr>
+        <p:style>
+          <a:lnRef idx="1">
+            <a:schemeClr val="accent1"/>
+          </a:lnRef>
+          <a:fillRef idx="3">
+            <a:schemeClr val="accent1"/>
+          </a:fillRef>
+          <a:effectRef idx="2">
+            <a:schemeClr val="accent1"/>
+          </a:effectRef>
+          <a:fontRef idx="minor">
+            <a:schemeClr val="lt1"/>
+          </a:fontRef>
+        </p:style>
+        <p:txBody>
+          <a:bodyPr rtlCol="0" anchor="ctr"/>
+          <a:lstStyle/>
+          <a:p>
+            <a:pPr algn="ctr"/>
+          </a:p>
+        </p:txBody>
+      </p:sp>
+      <p:sp>
+        <p:nvSpPr>
+          <p:cNvPr id="22" name="Rectangle 21"/>
+          <p:cNvSpPr/>
+          <p:nvPr/>
+        </p:nvSpPr>
+        <p:spPr>
+          <a:xfrm>
+            <a:off x="868680" y="5367528"/>
+            <a:ext cx="73152" cy="1143000"/>
+          </a:xfrm>
+          <a:prstGeom prst="rect">
+            <a:avLst/>
+          </a:prstGeom>
+          <a:solidFill>
+            <a:srgbClr val="355C7D"/>
+          </a:solidFill>
+          <a:ln>
+            <a:noFill/>
+          </a:ln>
+        </p:spPr>
+        <p:style>
+          <a:lnRef idx="1">
+            <a:schemeClr val="accent1"/>
+          </a:lnRef>
+          <a:fillRef idx="3">
+            <a:schemeClr val="accent1"/>
+          </a:fillRef>
+          <a:effectRef idx="2">
+            <a:schemeClr val="accent1"/>
+          </a:effectRef>
+          <a:fontRef idx="minor">
+            <a:schemeClr val="lt1"/>
+          </a:fontRef>
+        </p:style>
+        <p:txBody>
+          <a:bodyPr rtlCol="0" anchor="ctr"/>
+          <a:lstStyle/>
+          <a:p>
+            <a:pPr algn="ctr"/>
+          </a:p>
+        </p:txBody>
+      </p:sp>
+      <p:sp>
+        <p:nvSpPr>
+          <p:cNvPr id="23" name="TextBox 22"/>
+          <p:cNvSpPr txBox="1"/>
+          <p:nvPr/>
+        </p:nvSpPr>
+        <p:spPr>
+          <a:xfrm>
+            <a:off x="1078992" y="5303520"/>
+            <a:ext cx="6613855" cy="320040"/>
+          </a:xfrm>
+          <a:prstGeom prst="rect">
+            <a:avLst/>
+          </a:prstGeom>
+          <a:noFill/>
+        </p:spPr>
+        <p:txBody>
+          <a:bodyPr wrap="square" anchor="t">
+            <a:spAutoFit/>
+          </a:bodyPr>
+          <a:lstStyle/>
+          <a:p>
+            <a:pPr algn="l"/>
+            <a:r>
+              <a:rPr sz="1700" b="0" i="0" lang="th-TH" altLang="en-US">
+                <a:solidFill>
+                  <a:srgbClr val="24333D"/>
+                </a:solidFill>
+                <a:latin typeface="Sarabun"/>
+                <a:ea typeface="Sarabun"/>
+                <a:cs typeface="Sarabun"/>
+              </a:rPr>
+              <a:t>สวัสดีค่ะ</a:t>
+            </a:r>
+          </a:p>
+        </p:txBody>
+      </p:sp>
+      <p:sp>
+        <p:nvSpPr>
+          <p:cNvPr id="24" name="TextBox 23"/>
+          <p:cNvSpPr txBox="1"/>
+          <p:nvPr/>
+        </p:nvSpPr>
+        <p:spPr>
+          <a:xfrm>
+            <a:off x="1078992" y="5669280"/>
+            <a:ext cx="6613855" cy="274320"/>
+          </a:xfrm>
+          <a:prstGeom prst="rect">
+            <a:avLst/>
+          </a:prstGeom>
+          <a:noFill/>
+        </p:spPr>
+        <p:txBody>
+          <a:bodyPr wrap="square" anchor="t">
+            <a:spAutoFit/>
+          </a:bodyPr>
+          <a:lstStyle/>
+          <a:p>
+            <a:pPr algn="l"/>
+            <a:r>
+              <a:rPr sz="1700" b="0" i="1" lang="en-US" altLang="en-US">
+                <a:solidFill>
+                  <a:srgbClr val="566873"/>
+                </a:solidFill>
+                <a:latin typeface="Sarabun"/>
+                <a:ea typeface="Sarabun"/>
+                <a:cs typeface="Sarabun"/>
+              </a:rPr>
+              <a:t>sà-wàt-dii khâ</a:t>
+            </a:r>
+          </a:p>
+        </p:txBody>
+      </p:sp>
+      <p:sp>
+        <p:nvSpPr>
+          <p:cNvPr id="25" name="TextBox 24"/>
+          <p:cNvSpPr txBox="1"/>
+          <p:nvPr/>
+        </p:nvSpPr>
+        <p:spPr>
+          <a:xfrm>
+            <a:off x="1078992" y="6044184"/>
+            <a:ext cx="6613855" cy="274320"/>
+          </a:xfrm>
+          <a:prstGeom prst="rect">
+            <a:avLst/>
+          </a:prstGeom>
+          <a:noFill/>
+        </p:spPr>
+        <p:txBody>
+          <a:bodyPr wrap="square" anchor="t">
+            <a:spAutoFit/>
+          </a:bodyPr>
+          <a:lstStyle/>
+          <a:p>
+            <a:pPr algn="l"/>
+            <a:r>
+              <a:rPr sz="1700" b="0" i="0" lang="en-US" altLang="en-US">
+                <a:solidFill>
+                  <a:srgbClr val="82909A"/>
+                </a:solidFill>
+                <a:latin typeface="Sarabun"/>
+                <a:ea typeface="Sarabun"/>
+                <a:cs typeface="Sarabun"/>
+              </a:rPr>
+              <a:t>hello (female, polite)</a:t>
             </a:r>
           </a:p>
         </p:txBody>
@@ -7149,7 +7173,7 @@
           <a:p>
             <a:pPr algn="l"/>
             <a:r>
-              <a:rPr sz="3600" b="1" i="0" lang="en-US" altLang="en-US">
+              <a:rPr sz="2800" b="1" i="0" lang="en-US" altLang="en-US">
                 <a:solidFill>
                   <a:srgbClr val="24333D"/>
                 </a:solidFill>
@@ -7157,7 +7181,62 @@
                 <a:ea typeface="Sarabun"/>
                 <a:cs typeface="Sarabun"/>
               </a:rPr>
-              <a:t>Pick the right polite ending</a:t>
+              <a:t>Thank you and sorry: </a:t>
+            </a:r>
+            <a:r>
+              <a:rPr sz="2800" b="1" i="0" lang="th-TH" altLang="en-US">
+                <a:solidFill>
+                  <a:srgbClr val="24333D"/>
+                </a:solidFill>
+                <a:latin typeface="Sarabun"/>
+                <a:ea typeface="Sarabun"/>
+                <a:cs typeface="Sarabun"/>
+              </a:rPr>
+              <a:t>ขอบคุณ</a:t>
+            </a:r>
+            <a:r>
+              <a:rPr sz="1739" b="0" i="1" lang="en-US" altLang="en-US">
+                <a:solidFill>
+                  <a:srgbClr val="566873"/>
+                </a:solidFill>
+                <a:latin typeface="Sarabun"/>
+                <a:ea typeface="Sarabun"/>
+                <a:cs typeface="Sarabun"/>
+              </a:rPr>
+              <a:t> (khàawp-khun)</a:t>
+            </a:r>
+            <a:r>
+              <a:rPr sz="2800" b="1" i="0" lang="en-US" altLang="en-US">
+                <a:solidFill>
+                  <a:srgbClr val="24333D"/>
+                </a:solidFill>
+                <a:latin typeface="Sarabun"/>
+                <a:ea typeface="Sarabun"/>
+                <a:cs typeface="Sarabun"/>
+              </a:rPr>
+              <a:t> and </a:t>
+            </a:r>
+            <a:r>
+              <a:rPr sz="2800" b="1" i="0" lang="th-TH" altLang="en-US">
+                <a:solidFill>
+                  <a:srgbClr val="24333D"/>
+                </a:solidFill>
+                <a:latin typeface="Sarabun"/>
+                <a:ea typeface="Sarabun"/>
+                <a:cs typeface="Sarabun"/>
+              </a:rPr>
+              <a:t>ขอโทษ</a:t>
+            </a:r>
+            <a:r>
+              <a:rPr sz="1739" b="0" i="1" lang="en-US" altLang="en-US">
+                <a:solidFill>
+                  <a:srgbClr val="566873"/>
+                </a:solidFill>
+                <a:latin typeface="Sarabun"/>
+                <a:ea typeface="Sarabun"/>
+                <a:cs typeface="Sarabun"/>
+              </a:rPr>
+              <a:t> (khǎaw-thôot)</a:t>
             </a:r>
           </a:p>
         </p:txBody>
@@ -7278,7 +7357,7 @@
                 <a:ea typeface="Sarabun"/>
                 <a:cs typeface="Sarabun"/>
               </a:rPr>
-              <a:t>ครับ</a:t>
+              <a:t>ขอบคุณ</a:t>
             </a:r>
           </a:p>
         </p:txBody>
@@ -7315,7 +7394,7 @@
                 <a:ea typeface="Sarabun"/>
                 <a:cs typeface="Sarabun"/>
               </a:rPr>
-              <a:t>khráp</a:t>
+              <a:t>khàawp-khun</a:t>
             </a:r>
           </a:p>
         </p:txBody>
@@ -7352,7 +7431,7 @@
                 <a:ea typeface="Sarabun"/>
                 <a:cs typeface="Sarabun"/>
               </a:rPr>
-              <a:t>male polite ending</a:t>
+              <a:t>thank you</a:t>
             </a:r>
           </a:p>
         </p:txBody>
@@ -7365,7 +7444,7 @@
         </p:nvSpPr>
         <p:spPr>
           <a:xfrm>
-            <a:off x="731520" y="3081528"/>
+            <a:off x="731520" y="2606040"/>
             <a:ext cx="7071055" cy="1572768"/>
           </a:xfrm>
           <a:prstGeom prst="roundRect">
@@ -7406,7 +7485,7 @@
         </p:nvSpPr>
         <p:spPr>
           <a:xfrm>
-            <a:off x="868680" y="3282696"/>
+            <a:off x="868680" y="2807208"/>
             <a:ext cx="73152" cy="1143000"/>
           </a:xfrm>
           <a:prstGeom prst="rect">
@@ -7449,7 +7528,7 @@
         </p:nvSpPr>
         <p:spPr>
           <a:xfrm>
-            <a:off x="1078992" y="3218688"/>
+            <a:off x="1078992" y="2743200"/>
             <a:ext cx="6613855" cy="320040"/>
           </a:xfrm>
           <a:prstGeom prst="rect">
@@ -7473,7 +7552,7 @@
                 <a:ea typeface="Sarabun"/>
                 <a:cs typeface="Sarabun"/>
               </a:rPr>
-              <a:t>ค่ะ</a:t>
+              <a:t>ขอโทษ</a:t>
             </a:r>
           </a:p>
         </p:txBody>
@@ -7486,7 +7565,7 @@
         </p:nvSpPr>
         <p:spPr>
           <a:xfrm>
-            <a:off x="1078992" y="3584448"/>
+            <a:off x="1078992" y="3108960"/>
             <a:ext cx="6613855" cy="274320"/>
           </a:xfrm>
           <a:prstGeom prst="rect">
@@ -7510,7 +7589,7 @@
                 <a:ea typeface="Sarabun"/>
                 <a:cs typeface="Sarabun"/>
               </a:rPr>
-              <a:t>khâ</a:t>
+              <a:t>khǎaw-thôot</a:t>
             </a:r>
           </a:p>
         </p:txBody>
@@ -7523,7 +7602,7 @@
         </p:nvSpPr>
         <p:spPr>
           <a:xfrm>
-            <a:off x="1078992" y="3959352"/>
+            <a:off x="1078992" y="3483864"/>
             <a:ext cx="6613855" cy="274320"/>
           </a:xfrm>
           <a:prstGeom prst="rect">
@@ -7547,7 +7626,7 @@
                 <a:ea typeface="Sarabun"/>
                 <a:cs typeface="Sarabun"/>
               </a:rPr>
-              <a:t>female statement ending</a:t>
+              <a:t>sorry / excuse me</a:t>
             </a:r>
           </a:p>
         </p:txBody>
@@ -7560,7 +7639,7 @@
         </p:nvSpPr>
         <p:spPr>
           <a:xfrm>
-            <a:off x="731520" y="4837176"/>
+            <a:off x="731520" y="3886200"/>
             <a:ext cx="7071055" cy="1572768"/>
           </a:xfrm>
           <a:prstGeom prst="roundRect">
@@ -7601,7 +7680,7 @@
         </p:nvSpPr>
         <p:spPr>
           <a:xfrm>
-            <a:off x="868680" y="5038344"/>
+            <a:off x="868680" y="4087368"/>
             <a:ext cx="73152" cy="1143000"/>
           </a:xfrm>
           <a:prstGeom prst="rect">
@@ -7644,7 +7723,7 @@
         </p:nvSpPr>
         <p:spPr>
           <a:xfrm>
-            <a:off x="1078992" y="4974336"/>
+            <a:off x="1078992" y="4023360"/>
             <a:ext cx="6613855" cy="320040"/>
           </a:xfrm>
           <a:prstGeom prst="rect">
@@ -7668,7 +7747,7 @@
                 <a:ea typeface="Sarabun"/>
                 <a:cs typeface="Sarabun"/>
               </a:rPr>
-              <a:t>คะ</a:t>
+              <a:t>ขอบคุณครับ</a:t>
             </a:r>
           </a:p>
         </p:txBody>
@@ -7681,7 +7760,7 @@
         </p:nvSpPr>
         <p:spPr>
           <a:xfrm>
-            <a:off x="1078992" y="5340096"/>
+            <a:off x="1078992" y="4389120"/>
             <a:ext cx="6613855" cy="274320"/>
           </a:xfrm>
           <a:prstGeom prst="rect">
@@ -7705,7 +7784,7 @@
                 <a:ea typeface="Sarabun"/>
                 <a:cs typeface="Sarabun"/>
               </a:rPr>
-              <a:t>khá</a:t>
+              <a:t>khàawp-khun khráp</a:t>
             </a:r>
           </a:p>
         </p:txBody>
@@ -7718,7 +7797,7 @@
         </p:nvSpPr>
         <p:spPr>
           <a:xfrm>
-            <a:off x="1078992" y="5715000"/>
+            <a:off x="1078992" y="4764024"/>
             <a:ext cx="6613855" cy="274320"/>
           </a:xfrm>
           <a:prstGeom prst="rect">
@@ -7742,7 +7821,202 @@
                 <a:ea typeface="Sarabun"/>
                 <a:cs typeface="Sarabun"/>
               </a:rPr>
-              <a:t>female question ending</a:t>
+              <a:t>thank you (male, polite)</a:t>
+            </a:r>
+          </a:p>
+        </p:txBody>
+      </p:sp>
+      <p:sp>
+        <p:nvSpPr>
+          <p:cNvPr id="21" name="Rounded Rectangle 20"/>
+          <p:cNvSpPr/>
+          <p:nvPr/>
+        </p:nvSpPr>
+        <p:spPr>
+          <a:xfrm>
+            <a:off x="731520" y="5166360"/>
+            <a:ext cx="7071055" cy="1572768"/>
+          </a:xfrm>
+          <a:prstGeom prst="roundRect">
+            <a:avLst/>
+          </a:prstGeom>
+          <a:noFill/>
+          <a:ln>
+            <a:noFill/>
+          </a:ln>
+        </p:spPr>
+        <p:style>
+          <a:lnRef idx="1">
+            <a:schemeClr val="accent1"/>
+          </a:lnRef>
+          <a:fillRef idx="3">
+            <a:schemeClr val="accent1"/>
+          </a:fillRef>
+          <a:effectRef idx="2">
+            <a:schemeClr val="accent1"/>
+          </a:effectRef>
+          <a:fontRef idx="minor">
+            <a:schemeClr val="lt1"/>
+          </a:fontRef>
+        </p:style>
+        <p:txBody>
+          <a:bodyPr rtlCol="0" anchor="ctr"/>
+          <a:lstStyle/>
+          <a:p>
+            <a:pPr algn="ctr"/>
+          </a:p>
+        </p:txBody>
+      </p:sp>
+      <p:sp>
+        <p:nvSpPr>
+          <p:cNvPr id="22" name="Rectangle 21"/>
+          <p:cNvSpPr/>
+          <p:nvPr/>
+        </p:nvSpPr>
+        <p:spPr>
+          <a:xfrm>
+            <a:off x="868680" y="5367528"/>
+            <a:ext cx="73152" cy="1143000"/>
+          </a:xfrm>
+          <a:prstGeom prst="rect">
+            <a:avLst/>
+          </a:prstGeom>
+          <a:solidFill>
+            <a:srgbClr val="355C7D"/>
+          </a:solidFill>
+          <a:ln>
+            <a:noFill/>
+          </a:ln>
+        </p:spPr>
+        <p:style>
+          <a:lnRef idx="1">
+            <a:schemeClr val="accent1"/>
+          </a:lnRef>
+          <a:fillRef idx="3">
+            <a:schemeClr val="accent1"/>
+          </a:fillRef>
+          <a:effectRef idx="2">
+            <a:schemeClr val="accent1"/>
+          </a:effectRef>
+          <a:fontRef idx="minor">
+            <a:schemeClr val="lt1"/>
+          </a:fontRef>
+        </p:style>
+        <p:txBody>
+          <a:bodyPr rtlCol="0" anchor="ctr"/>
+          <a:lstStyle/>
+          <a:p>
+            <a:pPr algn="ctr"/>
+          </a:p>
+        </p:txBody>
+      </p:sp>
+      <p:sp>
+        <p:nvSpPr>
+          <p:cNvPr id="23" name="TextBox 22"/>
+          <p:cNvSpPr txBox="1"/>
+          <p:nvPr/>
+        </p:nvSpPr>
+        <p:spPr>
+          <a:xfrm>
+            <a:off x="1078992" y="5303520"/>
+            <a:ext cx="6613855" cy="320040"/>
+          </a:xfrm>
+          <a:prstGeom prst="rect">
+            <a:avLst/>
+          </a:prstGeom>
+          <a:noFill/>
+        </p:spPr>
+        <p:txBody>
+          <a:bodyPr wrap="square" anchor="t">
+            <a:spAutoFit/>
+          </a:bodyPr>
+          <a:lstStyle/>
+          <a:p>
+            <a:pPr algn="l"/>
+            <a:r>
+              <a:rPr sz="1700" b="0" i="0" lang="th-TH" altLang="en-US">
+                <a:solidFill>
+                  <a:srgbClr val="24333D"/>
+                </a:solidFill>
+                <a:latin typeface="Sarabun"/>
+                <a:ea typeface="Sarabun"/>
+                <a:cs typeface="Sarabun"/>
+              </a:rPr>
+              <a:t>ขอโทษค่ะ</a:t>
+            </a:r>
+          </a:p>
+        </p:txBody>
+      </p:sp>
+      <p:sp>
+        <p:nvSpPr>
+          <p:cNvPr id="24" name="TextBox 23"/>
+          <p:cNvSpPr txBox="1"/>
+          <p:nvPr/>
+        </p:nvSpPr>
+        <p:spPr>
+          <a:xfrm>
+            <a:off x="1078992" y="5669280"/>
+            <a:ext cx="6613855" cy="274320"/>
+          </a:xfrm>
+          <a:prstGeom prst="rect">
+            <a:avLst/>
+          </a:prstGeom>
+          <a:noFill/>
+        </p:spPr>
+        <p:txBody>
+          <a:bodyPr wrap="square" anchor="t">
+            <a:spAutoFit/>
+          </a:bodyPr>
+          <a:lstStyle/>
+          <a:p>
+            <a:pPr algn="l"/>
+            <a:r>
+              <a:rPr sz="1700" b="0" i="1" lang="en-US" altLang="en-US">
+                <a:solidFill>
+                  <a:srgbClr val="566873"/>
+                </a:solidFill>
+                <a:latin typeface="Sarabun"/>
+                <a:ea typeface="Sarabun"/>
+                <a:cs typeface="Sarabun"/>
+              </a:rPr>
+              <a:t>khǎaw-thôot khâ</a:t>
+            </a:r>
+          </a:p>
+        </p:txBody>
+      </p:sp>
+      <p:sp>
+        <p:nvSpPr>
+          <p:cNvPr id="25" name="TextBox 24"/>
+          <p:cNvSpPr txBox="1"/>
+          <p:nvPr/>
+        </p:nvSpPr>
+        <p:spPr>
+          <a:xfrm>
+            <a:off x="1078992" y="6044184"/>
+            <a:ext cx="6613855" cy="274320"/>
+          </a:xfrm>
+          <a:prstGeom prst="rect">
+            <a:avLst/>
+          </a:prstGeom>
+          <a:noFill/>
+        </p:spPr>
+        <p:txBody>
+          <a:bodyPr wrap="square" anchor="t">
+            <a:spAutoFit/>
+          </a:bodyPr>
+          <a:lstStyle/>
+          <a:p>
+            <a:pPr algn="l"/>
+            <a:r>
+              <a:rPr sz="1700" b="0" i="0" lang="en-US" altLang="en-US">
+                <a:solidFill>
+                  <a:srgbClr val="82909A"/>
+                </a:solidFill>
+                <a:latin typeface="Sarabun"/>
+                <a:ea typeface="Sarabun"/>
+                <a:cs typeface="Sarabun"/>
+              </a:rPr>
+              <a:t>sorry (female, polite)</a:t>
             </a:r>
           </a:p>
         </p:txBody>
@@ -7942,7 +8216,95 @@
                 <a:ea typeface="Sarabun"/>
                 <a:cs typeface="Sarabun"/>
               </a:rPr>
-              <a:t>Answer yes, no, and no problem naturally</a:t>
+              <a:t>Respond naturally: </a:t>
+            </a:r>
+            <a:r>
+              <a:rPr sz="2800" b="1" i="0" lang="th-TH" altLang="en-US">
+                <a:solidFill>
+                  <a:srgbClr val="24333D"/>
+                </a:solidFill>
+                <a:latin typeface="Sarabun"/>
+                <a:ea typeface="Sarabun"/>
+                <a:cs typeface="Sarabun"/>
+              </a:rPr>
+              <a:t>ไม่เป็นไร</a:t>
+            </a:r>
+            <a:r>
+              <a:rPr sz="1739" b="0" i="1" lang="en-US" altLang="en-US">
+                <a:solidFill>
+                  <a:srgbClr val="566873"/>
+                </a:solidFill>
+                <a:latin typeface="Sarabun"/>
+                <a:ea typeface="Sarabun"/>
+                <a:cs typeface="Sarabun"/>
+              </a:rPr>
+              <a:t> (mâi bpen rai)</a:t>
+            </a:r>
+            <a:r>
+              <a:rPr sz="2800" b="1" i="0" lang="en-US" altLang="en-US">
+                <a:solidFill>
+                  <a:srgbClr val="24333D"/>
+                </a:solidFill>
+                <a:latin typeface="Sarabun"/>
+                <a:ea typeface="Sarabun"/>
+                <a:cs typeface="Sarabun"/>
+              </a:rPr>
+              <a:t>, </a:t>
+            </a:r>
+            <a:r>
+              <a:rPr sz="2800" b="1" i="0" lang="th-TH" altLang="en-US">
+                <a:solidFill>
+                  <a:srgbClr val="24333D"/>
+                </a:solidFill>
+                <a:latin typeface="Sarabun"/>
+                <a:ea typeface="Sarabun"/>
+                <a:cs typeface="Sarabun"/>
+              </a:rPr>
+              <a:t>ใช่</a:t>
+            </a:r>
+            <a:r>
+              <a:rPr sz="1739" b="0" i="1" lang="en-US" altLang="en-US">
+                <a:solidFill>
+                  <a:srgbClr val="566873"/>
+                </a:solidFill>
+                <a:latin typeface="Sarabun"/>
+                <a:ea typeface="Sarabun"/>
+                <a:cs typeface="Sarabun"/>
+              </a:rPr>
+              <a:t> (châi)</a:t>
+            </a:r>
+            <a:r>
+              <a:rPr sz="2800" b="1" i="0" lang="en-US" altLang="en-US">
+                <a:solidFill>
+                  <a:srgbClr val="24333D"/>
+                </a:solidFill>
+                <a:latin typeface="Sarabun"/>
+                <a:ea typeface="Sarabun"/>
+                <a:cs typeface="Sarabun"/>
+              </a:rPr>
+              <a:t>, </a:t>
+            </a:r>
+            <a:r>
+              <a:rPr sz="2800" b="1" i="0" lang="th-TH" altLang="en-US">
+                <a:solidFill>
+                  <a:srgbClr val="24333D"/>
+                </a:solidFill>
+                <a:latin typeface="Sarabun"/>
+                <a:ea typeface="Sarabun"/>
+                <a:cs typeface="Sarabun"/>
+              </a:rPr>
+              <a:t>ไม่ใช่</a:t>
+            </a:r>
+            <a:r>
+              <a:rPr sz="1739" b="0" i="1" lang="en-US" altLang="en-US">
+                <a:solidFill>
+                  <a:srgbClr val="566873"/>
+                </a:solidFill>
+                <a:latin typeface="Sarabun"/>
+                <a:ea typeface="Sarabun"/>
+                <a:cs typeface="Sarabun"/>
+              </a:rPr>
+              <a:t> (mâi châi)</a:t>
             </a:r>
           </a:p>
         </p:txBody>
@@ -8063,7 +8425,7 @@
                 <a:ea typeface="Sarabun"/>
                 <a:cs typeface="Sarabun"/>
               </a:rPr>
-              <a:t>ใช่</a:t>
+              <a:t>ไม่เป็นไร</a:t>
             </a:r>
           </a:p>
         </p:txBody>
@@ -8100,7 +8462,7 @@
                 <a:ea typeface="Sarabun"/>
                 <a:cs typeface="Sarabun"/>
               </a:rPr>
-              <a:t>châi</a:t>
+              <a:t>mâi bpen rai</a:t>
             </a:r>
           </a:p>
         </p:txBody>
@@ -8137,7 +8499,7 @@
                 <a:ea typeface="Sarabun"/>
                 <a:cs typeface="Sarabun"/>
               </a:rPr>
-              <a:t>yes / that is right</a:t>
+              <a:t>it is okay / no problem</a:t>
             </a:r>
           </a:p>
         </p:txBody>
@@ -8258,7 +8620,7 @@
                 <a:ea typeface="Sarabun"/>
                 <a:cs typeface="Sarabun"/>
               </a:rPr>
-              <a:t>ไม่ใช่</a:t>
+              <a:t>ใช่</a:t>
             </a:r>
           </a:p>
         </p:txBody>
@@ -8295,7 +8657,7 @@
                 <a:ea typeface="Sarabun"/>
                 <a:cs typeface="Sarabun"/>
               </a:rPr>
-              <a:t>mâi châi</a:t>
+              <a:t>châi</a:t>
             </a:r>
           </a:p>
         </p:txBody>
@@ -8332,7 +8694,7 @@
                 <a:ea typeface="Sarabun"/>
                 <a:cs typeface="Sarabun"/>
               </a:rPr>
-              <a:t>no / not right</a:t>
+              <a:t>yes / that is right</a:t>
             </a:r>
           </a:p>
         </p:txBody>
@@ -8453,7 +8815,7 @@
                 <a:ea typeface="Sarabun"/>
                 <a:cs typeface="Sarabun"/>
               </a:rPr>
-              <a:t>ไม่เป็นไร</a:t>
+              <a:t>ไม่ใช่</a:t>
             </a:r>
           </a:p>
         </p:txBody>
@@ -8490,7 +8852,7 @@
                 <a:ea typeface="Sarabun"/>
                 <a:cs typeface="Sarabun"/>
               </a:rPr>
-              <a:t>mâi bpen rai</a:t>
+              <a:t>mâi châi</a:t>
             </a:r>
           </a:p>
         </p:txBody>
@@ -8527,7 +8889,7 @@
                 <a:ea typeface="Sarabun"/>
                 <a:cs typeface="Sarabun"/>
               </a:rPr>
-              <a:t>it is okay / no problem</a:t>
+              <a:t>no / not right</a:t>
             </a:r>
           </a:p>
         </p:txBody>
@@ -8727,7 +9089,7 @@
                 <a:ea typeface="Sarabun"/>
                 <a:cs typeface="Sarabun"/>
               </a:rPr>
-              <a:t>Pronunciation: hearing Thai tones for the first time</a:t>
+              <a:t>Pronunciation beat: hearing Thai tones</a:t>
             </a:r>
           </a:p>
         </p:txBody>
@@ -9117,7 +9479,7 @@
                 <a:ea typeface="Sarabun"/>
                 <a:cs typeface="Sarabun"/>
               </a:rPr>
-              <a:t>falling tone — voice starts high and drops</a:t>
+              <a:t>falling tone — starts high, drops down</a:t>
             </a:r>
           </a:p>
         </p:txBody>
@@ -9605,7 +9967,7 @@
                 <a:ea typeface="Sarabun"/>
                 <a:cs typeface="Sarabun"/>
               </a:rPr>
-              <a:t>ขอโทษครับ สวัสดีครับ</a:t>
+              <a:t>สวัสดีครับ</a:t>
             </a:r>
           </a:p>
         </p:txBody>
@@ -9642,7 +10004,7 @@
                 <a:ea typeface="Sarabun"/>
                 <a:cs typeface="Sarabun"/>
               </a:rPr>
-              <a:t>khǎaw-thôot khráp sà-wàt-dii khráp</a:t>
+              <a:t>sà-wàt-dii khráp</a:t>
             </a:r>
           </a:p>
         </p:txBody>
@@ -9679,7 +10041,7 @@
                 <a:ea typeface="Sarabun"/>
                 <a:cs typeface="Sarabun"/>
               </a:rPr>
-              <a:t>Excuse me, hello.</a:t>
+              <a:t>Hello.</a:t>
             </a:r>
           </a:p>
         </p:txBody>
@@ -9939,7 +10301,7 @@
                 <a:ea typeface="Sarabun"/>
                 <a:cs typeface="Sarabun"/>
               </a:rPr>
-              <a:t>นี่ใช่ไหมครับ</a:t>
+              <a:t>ขอโทษครับ ใช่ไหมครับ</a:t>
             </a:r>
           </a:p>
         </p:txBody>
@@ -9976,7 +10338,7 @@
                 <a:ea typeface="Sarabun"/>
                 <a:cs typeface="Sarabun"/>
               </a:rPr>
-              <a:t>nîi châi mái khráp</a:t>
+              <a:t>khǎaw-thôot khráp châi mái khráp</a:t>
             </a:r>
           </a:p>
         </p:txBody>
@@ -10013,7 +10375,7 @@
                 <a:ea typeface="Sarabun"/>
                 <a:cs typeface="Sarabun"/>
               </a:rPr>
-              <a:t>Is this right?</a:t>
+              <a:t>Excuse me, is this right?</a:t>
             </a:r>
           </a:p>
         </p:txBody>
@@ -10664,7 +11026,7 @@
                 <a:ea typeface="Sarabun"/>
                 <a:cs typeface="Sarabun"/>
               </a:rPr>
-              <a:t>Look away and try: how do you say hello politely as a male speaker? Say it before looking back.</a:t>
+              <a:t>How do you say hello politely as a male speaker? Say it aloud.</a:t>
             </a:r>
           </a:p>
         </p:txBody>
@@ -10744,73 +11106,7 @@
                 <a:ea typeface="Sarabun"/>
                 <a:cs typeface="Sarabun"/>
               </a:rPr>
-              <a:t>What is the difference between </a:t>
-            </a:r>
-            <a:r>
-              <a:rPr sz="1700" b="0" i="0" lang="th-TH" altLang="en-US">
-                <a:solidFill>
-                  <a:srgbClr val="24333D"/>
-                </a:solidFill>
-                <a:latin typeface="Sarabun"/>
-                <a:ea typeface="Sarabun"/>
-                <a:cs typeface="Sarabun"/>
-              </a:rPr>
-              <a:t>ขอบคุณ</a:t>
-            </a:r>
-            <a:r>
-              <a:rPr sz="1700" b="0" i="1" lang="en-US" altLang="en-US">
-                <a:solidFill>
-                  <a:srgbClr val="566873"/>
-                </a:solidFill>
-                <a:latin typeface="Sarabun"/>
-                <a:ea typeface="Sarabun"/>
-                <a:cs typeface="Sarabun"/>
-              </a:rPr>
-              <a:t> (khàawp-khun)</a:t>
-            </a:r>
-            <a:r>
-              <a:rPr sz="1700" b="0" i="0" lang="en-US" altLang="en-US">
-                <a:solidFill>
-                  <a:srgbClr val="24333D"/>
-                </a:solidFill>
-                <a:latin typeface="Sarabun"/>
-                <a:ea typeface="Sarabun"/>
-                <a:cs typeface="Sarabun"/>
-              </a:rPr>
-              <a:t> and </a:t>
-            </a:r>
-            <a:r>
-              <a:rPr sz="1700" b="0" i="0" lang="th-TH" altLang="en-US">
-                <a:solidFill>
-                  <a:srgbClr val="24333D"/>
-                </a:solidFill>
-                <a:latin typeface="Sarabun"/>
-                <a:ea typeface="Sarabun"/>
-                <a:cs typeface="Sarabun"/>
-              </a:rPr>
-              <a:t>ขอโทษ</a:t>
-            </a:r>
-            <a:r>
-              <a:rPr sz="1700" b="0" i="1" lang="en-US" altLang="en-US">
-                <a:solidFill>
-                  <a:srgbClr val="566873"/>
-                </a:solidFill>
-                <a:latin typeface="Sarabun"/>
-                <a:ea typeface="Sarabun"/>
-                <a:cs typeface="Sarabun"/>
-              </a:rPr>
-              <a:t> (khǎaw-thôot)</a:t>
-            </a:r>
-            <a:r>
-              <a:rPr sz="1700" b="0" i="0" lang="en-US" altLang="en-US">
-                <a:solidFill>
-                  <a:srgbClr val="24333D"/>
-                </a:solidFill>
-                <a:latin typeface="Sarabun"/>
-                <a:ea typeface="Sarabun"/>
-                <a:cs typeface="Sarabun"/>
-              </a:rPr>
-              <a:t>? One closes warmly, one repairs politely.</a:t>
+              <a:t>Someone helps you. What do you say? Add a polite ending.</a:t>
             </a:r>
           </a:p>
         </p:txBody>
@@ -10890,73 +11186,7 @@
                 <a:ea typeface="Sarabun"/>
                 <a:cs typeface="Sarabun"/>
               </a:rPr>
-              <a:t>Someone says </a:t>
-            </a:r>
-            <a:r>
-              <a:rPr sz="1700" b="0" i="0" lang="th-TH" altLang="en-US">
-                <a:solidFill>
-                  <a:srgbClr val="24333D"/>
-                </a:solidFill>
-                <a:latin typeface="Sarabun"/>
-                <a:ea typeface="Sarabun"/>
-                <a:cs typeface="Sarabun"/>
-              </a:rPr>
-              <a:t>ขอโทษ</a:t>
-            </a:r>
-            <a:r>
-              <a:rPr sz="1700" b="0" i="1" lang="en-US" altLang="en-US">
-                <a:solidFill>
-                  <a:srgbClr val="566873"/>
-                </a:solidFill>
-                <a:latin typeface="Sarabun"/>
-                <a:ea typeface="Sarabun"/>
-                <a:cs typeface="Sarabun"/>
-              </a:rPr>
-              <a:t> (khǎaw-thôot)</a:t>
-            </a:r>
-            <a:r>
-              <a:rPr sz="1700" b="0" i="0" lang="en-US" altLang="en-US">
-                <a:solidFill>
-                  <a:srgbClr val="24333D"/>
-                </a:solidFill>
-                <a:latin typeface="Sarabun"/>
-                <a:ea typeface="Sarabun"/>
-                <a:cs typeface="Sarabun"/>
-              </a:rPr>
-              <a:t> to you. What do you say back? </a:t>
-            </a:r>
-            <a:r>
-              <a:rPr sz="1700" b="0" i="0" lang="th-TH" altLang="en-US">
-                <a:solidFill>
-                  <a:srgbClr val="24333D"/>
-                </a:solidFill>
-                <a:latin typeface="Sarabun"/>
-                <a:ea typeface="Sarabun"/>
-                <a:cs typeface="Sarabun"/>
-              </a:rPr>
-              <a:t>ไม่เป็นไร</a:t>
-            </a:r>
-            <a:r>
-              <a:rPr sz="1700" b="0" i="1" lang="en-US" altLang="en-US">
-                <a:solidFill>
-                  <a:srgbClr val="566873"/>
-                </a:solidFill>
-                <a:latin typeface="Sarabun"/>
-                <a:ea typeface="Sarabun"/>
-                <a:cs typeface="Sarabun"/>
-              </a:rPr>
-              <a:t> (mâi bpen rai)</a:t>
-            </a:r>
-            <a:r>
-              <a:rPr sz="1700" b="0" i="0" lang="en-US" altLang="en-US">
-                <a:solidFill>
-                  <a:srgbClr val="24333D"/>
-                </a:solidFill>
-                <a:latin typeface="Sarabun"/>
-                <a:ea typeface="Sarabun"/>
-                <a:cs typeface="Sarabun"/>
-              </a:rPr>
-              <a:t>.</a:t>
+              <a:t>Someone apologises to you. What is the warm Thai response?</a:t>
             </a:r>
           </a:p>
         </p:txBody>
@@ -11013,7 +11243,7 @@
         <p:spPr>
           <a:xfrm>
             <a:off x="1078992" y="3447288"/>
-            <a:ext cx="6568135" cy="676656"/>
+            <a:ext cx="6568135" cy="274320"/>
           </a:xfrm>
           <a:prstGeom prst="rect">
             <a:avLst/>
@@ -11036,7 +11266,7 @@
                 <a:ea typeface="Sarabun"/>
                 <a:cs typeface="Sarabun"/>
               </a:rPr>
-              <a:t>What do </a:t>
+              <a:t>What is the difference between </a:t>
             </a:r>
             <a:r>
               <a:rPr sz="1700" b="0" i="0" lang="th-TH" altLang="en-US">
@@ -11047,7 +11277,7 @@
                 <a:ea typeface="Sarabun"/>
                 <a:cs typeface="Sarabun"/>
               </a:rPr>
-              <a:t>ครับ</a:t>
+              <a:t>ใช่</a:t>
             </a:r>
             <a:r>
               <a:rPr sz="1700" b="0" i="1" lang="en-US" altLang="en-US">
@@ -11058,7 +11288,7 @@
                 <a:ea typeface="Sarabun"/>
                 <a:cs typeface="Sarabun"/>
               </a:rPr>
-              <a:t> (khráp)</a:t>
+              <a:t> (châi)</a:t>
             </a:r>
             <a:r>
               <a:rPr sz="1700" b="0" i="0" lang="en-US" altLang="en-US">
@@ -11080,7 +11310,7 @@
                 <a:ea typeface="Sarabun"/>
                 <a:cs typeface="Sarabun"/>
               </a:rPr>
-              <a:t>ค่ะ</a:t>
+              <a:t>ไม่เป็นไร</a:t>
             </a:r>
             <a:r>
               <a:rPr sz="1700" b="0" i="1" lang="en-US" altLang="en-US">
@@ -11091,7 +11321,7 @@
                 <a:ea typeface="Sarabun"/>
                 <a:cs typeface="Sarabun"/>
               </a:rPr>
-              <a:t> (khâ)</a:t>
+              <a:t> (mâi bpen rai)</a:t>
             </a:r>
             <a:r>
               <a:rPr sz="1700" b="0" i="0" lang="en-US" altLang="en-US">
@@ -11102,7 +11332,7 @@
                 <a:ea typeface="Sarabun"/>
                 <a:cs typeface="Sarabun"/>
               </a:rPr>
-              <a:t> do? They are the polite endings that tell the listener how your line should land.</a:t>
+              <a:t>?</a:t>
             </a:r>
           </a:p>
         </p:txBody>
@@ -11115,7 +11345,7 @@
         </p:nvSpPr>
         <p:spPr>
           <a:xfrm>
-            <a:off x="932688" y="4270248"/>
+            <a:off x="932688" y="3867912"/>
             <a:ext cx="82296" cy="82296"/>
           </a:xfrm>
           <a:prstGeom prst="ellipse">
@@ -11158,8 +11388,8 @@
         </p:nvSpPr>
         <p:spPr>
           <a:xfrm>
-            <a:off x="1078992" y="4178808"/>
-            <a:ext cx="6568135" cy="475488"/>
+            <a:off x="1078992" y="3776472"/>
+            <a:ext cx="6568135" cy="274320"/>
           </a:xfrm>
           <a:prstGeom prst="rect">
             <a:avLst/>
@@ -11182,73 +11412,7 @@
                 <a:ea typeface="Sarabun"/>
                 <a:cs typeface="Sarabun"/>
               </a:rPr>
-              <a:t>Which two words answer the idea — yes or no? </a:t>
-            </a:r>
-            <a:r>
-              <a:rPr sz="1700" b="0" i="0" lang="th-TH" altLang="en-US">
-                <a:solidFill>
-                  <a:srgbClr val="24333D"/>
-                </a:solidFill>
-                <a:latin typeface="Sarabun"/>
-                <a:ea typeface="Sarabun"/>
-                <a:cs typeface="Sarabun"/>
-              </a:rPr>
-              <a:t>ใช่</a:t>
-            </a:r>
-            <a:r>
-              <a:rPr sz="1700" b="0" i="1" lang="en-US" altLang="en-US">
-                <a:solidFill>
-                  <a:srgbClr val="566873"/>
-                </a:solidFill>
-                <a:latin typeface="Sarabun"/>
-                <a:ea typeface="Sarabun"/>
-                <a:cs typeface="Sarabun"/>
-              </a:rPr>
-              <a:t> (châi)</a:t>
-            </a:r>
-            <a:r>
-              <a:rPr sz="1700" b="0" i="0" lang="en-US" altLang="en-US">
-                <a:solidFill>
-                  <a:srgbClr val="24333D"/>
-                </a:solidFill>
-                <a:latin typeface="Sarabun"/>
-                <a:ea typeface="Sarabun"/>
-                <a:cs typeface="Sarabun"/>
-              </a:rPr>
-              <a:t> and </a:t>
-            </a:r>
-            <a:r>
-              <a:rPr sz="1700" b="0" i="0" lang="th-TH" altLang="en-US">
-                <a:solidFill>
-                  <a:srgbClr val="24333D"/>
-                </a:solidFill>
-                <a:latin typeface="Sarabun"/>
-                <a:ea typeface="Sarabun"/>
-                <a:cs typeface="Sarabun"/>
-              </a:rPr>
-              <a:t>ไม่ใช่</a:t>
-            </a:r>
-            <a:r>
-              <a:rPr sz="1700" b="0" i="1" lang="en-US" altLang="en-US">
-                <a:solidFill>
-                  <a:srgbClr val="566873"/>
-                </a:solidFill>
-                <a:latin typeface="Sarabun"/>
-                <a:ea typeface="Sarabun"/>
-                <a:cs typeface="Sarabun"/>
-              </a:rPr>
-              <a:t> (mâi châi)</a:t>
-            </a:r>
-            <a:r>
-              <a:rPr sz="1700" b="0" i="0" lang="en-US" altLang="en-US">
-                <a:solidFill>
-                  <a:srgbClr val="24333D"/>
-                </a:solidFill>
-                <a:latin typeface="Sarabun"/>
-                <a:ea typeface="Sarabun"/>
-                <a:cs typeface="Sarabun"/>
-              </a:rPr>
-              <a:t>.</a:t>
+              <a:t>Say sorry politely as a female speaker.</a:t>
             </a:r>
           </a:p>
         </p:txBody>
@@ -11261,7 +11425,7 @@
         </p:nvSpPr>
         <p:spPr>
           <a:xfrm>
-            <a:off x="932688" y="5129784"/>
+            <a:off x="932688" y="4526280"/>
             <a:ext cx="9692640" cy="228600"/>
           </a:xfrm>
           <a:prstGeom prst="rect">
@@ -11298,7 +11462,7 @@
         </p:nvSpPr>
         <p:spPr>
           <a:xfrm>
-            <a:off x="932688" y="5513832"/>
+            <a:off x="932688" y="4910328"/>
             <a:ext cx="82296" cy="82296"/>
           </a:xfrm>
           <a:prstGeom prst="ellipse">
@@ -11341,7 +11505,7 @@
         </p:nvSpPr>
         <p:spPr>
           <a:xfrm>
-            <a:off x="1078992" y="5422392"/>
+            <a:off x="1078992" y="4818888"/>
             <a:ext cx="9555480" cy="274320"/>
           </a:xfrm>
           <a:prstGeom prst="rect">
@@ -11365,73 +11529,7 @@
                 <a:ea typeface="Sarabun"/>
                 <a:cs typeface="Sarabun"/>
               </a:rPr>
-              <a:t>Which two words answer the idea — yes or no? </a:t>
-            </a:r>
-            <a:r>
-              <a:rPr sz="1700" b="0" i="0" lang="th-TH" altLang="en-US">
-                <a:solidFill>
-                  <a:srgbClr val="24333D"/>
-                </a:solidFill>
-                <a:latin typeface="Sarabun"/>
-                <a:ea typeface="Sarabun"/>
-                <a:cs typeface="Sarabun"/>
-              </a:rPr>
-              <a:t>ใช่</a:t>
-            </a:r>
-            <a:r>
-              <a:rPr sz="1700" b="0" i="1" lang="en-US" altLang="en-US">
-                <a:solidFill>
-                  <a:srgbClr val="566873"/>
-                </a:solidFill>
-                <a:latin typeface="Sarabun"/>
-                <a:ea typeface="Sarabun"/>
-                <a:cs typeface="Sarabun"/>
-              </a:rPr>
-              <a:t> (châi)</a:t>
-            </a:r>
-            <a:r>
-              <a:rPr sz="1700" b="0" i="0" lang="en-US" altLang="en-US">
-                <a:solidFill>
-                  <a:srgbClr val="24333D"/>
-                </a:solidFill>
-                <a:latin typeface="Sarabun"/>
-                <a:ea typeface="Sarabun"/>
-                <a:cs typeface="Sarabun"/>
-              </a:rPr>
-              <a:t> and </a:t>
-            </a:r>
-            <a:r>
-              <a:rPr sz="1700" b="0" i="0" lang="th-TH" altLang="en-US">
-                <a:solidFill>
-                  <a:srgbClr val="24333D"/>
-                </a:solidFill>
-                <a:latin typeface="Sarabun"/>
-                <a:ea typeface="Sarabun"/>
-                <a:cs typeface="Sarabun"/>
-              </a:rPr>
-              <a:t>ไม่ใช่</a:t>
-            </a:r>
-            <a:r>
-              <a:rPr sz="1700" b="0" i="1" lang="en-US" altLang="en-US">
-                <a:solidFill>
-                  <a:srgbClr val="566873"/>
-                </a:solidFill>
-                <a:latin typeface="Sarabun"/>
-                <a:ea typeface="Sarabun"/>
-                <a:cs typeface="Sarabun"/>
-              </a:rPr>
-              <a:t> (mâi châi)</a:t>
-            </a:r>
-            <a:r>
-              <a:rPr sz="1700" b="0" i="0" lang="en-US" altLang="en-US">
-                <a:solidFill>
-                  <a:srgbClr val="24333D"/>
-                </a:solidFill>
-                <a:latin typeface="Sarabun"/>
-                <a:ea typeface="Sarabun"/>
-                <a:cs typeface="Sarabun"/>
-              </a:rPr>
-              <a:t>.</a:t>
+              <a:t>Say sorry politely as a female speaker.</a:t>
             </a:r>
           </a:p>
         </p:txBody>
